--- a/Abgabe/KVA_ERP2028_Management-Praesentation.pptx
+++ b/Abgabe/KVA_ERP2028_Management-Praesentation.pptx
@@ -17,6 +17,10 @@
     <p:sldId id="265" r:id="rId16"/>
     <p:sldId id="266" r:id="rId17"/>
     <p:sldId id="267" r:id="rId18"/>
+    <p:sldId id="268" r:id="rId19"/>
+    <p:sldId id="269" r:id="rId20"/>
+    <p:sldId id="270" r:id="rId21"/>
+    <p:sldId id="271" r:id="rId22"/>
   </p:sldIdLst>
   <p:sldSz cx="12191695" cy="6858000" type="screen4x3"/>
   <p:notesSz cx="6858000" cy="9144000"/>
@@ -578,6 +582,706 @@
     <c:autoUpdate val="0"/>
   </c:externalData>
 </c:chartSpace>
+</file>
+
+<file path=ppt/notesMasters/notesMaster1.xml><?xml version="1.0" encoding="utf-8"?>
+<p:notesMaster xmlns:a="http://schemas.openxmlformats.org/drawingml/2006/main" xmlns:p="http://schemas.openxmlformats.org/presentationml/2006/main" xmlns:r="http://schemas.openxmlformats.org/officeDocument/2006/relationships">
+  <p:cSld>
+    <p:bg>
+      <p:bgRef idx="1001">
+        <a:schemeClr val="bg1"/>
+      </p:bgRef>
+    </p:bg>
+    <p:spTree>
+      <p:nvGrpSpPr>
+        <p:cNvPr id="1" name=""/>
+        <p:cNvGrpSpPr/>
+        <p:nvPr/>
+      </p:nvGrpSpPr>
+      <p:grpSpPr>
+        <a:xfrm>
+          <a:off x="0" y="0"/>
+          <a:ext cx="0" cy="0"/>
+          <a:chOff x="0" y="0"/>
+          <a:chExt cx="0" cy="0"/>
+        </a:xfrm>
+      </p:grpSpPr>
+      <p:sp>
+        <p:nvSpPr>
+          <p:cNvPr id="2" name="Header Placeholder 1"/>
+          <p:cNvSpPr>
+            <a:spLocks noGrp="1"/>
+          </p:cNvSpPr>
+          <p:nvPr>
+            <p:ph type="hdr" sz="quarter"/>
+          </p:nvPr>
+        </p:nvSpPr>
+        <p:spPr>
+          <a:xfrm>
+            <a:off x="0" y="0"/>
+            <a:ext cx="2971800" cy="457200"/>
+          </a:xfrm>
+          <a:prstGeom prst="rect">
+            <a:avLst/>
+          </a:prstGeom>
+        </p:spPr>
+        <p:txBody>
+          <a:bodyPr vert="horz" lIns="91440" tIns="45720" rIns="91440" bIns="45720" rtlCol="0"/>
+          <a:lstStyle>
+            <a:lvl1pPr algn="l">
+              <a:defRPr sz="1200"/>
+            </a:lvl1pPr>
+          </a:lstStyle>
+          <a:p>
+            <a:endParaRPr lang="en-US"/>
+          </a:p>
+        </p:txBody>
+      </p:sp>
+      <p:sp>
+        <p:nvSpPr>
+          <p:cNvPr id="3" name="Date Placeholder 2"/>
+          <p:cNvSpPr>
+            <a:spLocks noGrp="1"/>
+          </p:cNvSpPr>
+          <p:nvPr>
+            <p:ph type="dt" idx="1"/>
+          </p:nvPr>
+        </p:nvSpPr>
+        <p:spPr>
+          <a:xfrm>
+            <a:off x="3884613" y="0"/>
+            <a:ext cx="2971800" cy="457200"/>
+          </a:xfrm>
+          <a:prstGeom prst="rect">
+            <a:avLst/>
+          </a:prstGeom>
+        </p:spPr>
+        <p:txBody>
+          <a:bodyPr vert="horz" lIns="91440" tIns="45720" rIns="91440" bIns="45720" rtlCol="0"/>
+          <a:lstStyle>
+            <a:lvl1pPr algn="r">
+              <a:defRPr sz="1200"/>
+            </a:lvl1pPr>
+          </a:lstStyle>
+          <a:p>
+            <a:fld id="{0F89C1C7-3DCD-1040-A9CF-14679D8B5DDD}" type="datetimeFigureOut">
+              <a:rPr lang="en-US" smtClean="0"/>
+              <a:t>10/17/16</a:t>
+            </a:fld>
+            <a:endParaRPr lang="en-US"/>
+          </a:p>
+        </p:txBody>
+      </p:sp>
+      <p:sp>
+        <p:nvSpPr>
+          <p:cNvPr id="4" name="Slide Image Placeholder 3"/>
+          <p:cNvSpPr>
+            <a:spLocks noGrp="1" noRot="1" noChangeAspect="1"/>
+          </p:cNvSpPr>
+          <p:nvPr>
+            <p:ph type="sldImg" idx="2"/>
+          </p:nvPr>
+        </p:nvSpPr>
+        <p:spPr>
+          <a:xfrm>
+            <a:off x="1143000" y="685800"/>
+            <a:ext cx="4572000" cy="3429000"/>
+          </a:xfrm>
+          <a:prstGeom prst="rect">
+            <a:avLst/>
+          </a:prstGeom>
+          <a:noFill/>
+          <a:ln w="12700">
+            <a:solidFill>
+              <a:prstClr val="black"/>
+            </a:solidFill>
+          </a:ln>
+        </p:spPr>
+        <p:txBody>
+          <a:bodyPr vert="horz" lIns="91440" tIns="45720" rIns="91440" bIns="45720" rtlCol="0" anchor="ctr"/>
+          <a:lstStyle/>
+          <a:p>
+            <a:endParaRPr lang="en-US"/>
+          </a:p>
+        </p:txBody>
+      </p:sp>
+      <p:sp>
+        <p:nvSpPr>
+          <p:cNvPr id="5" name="Notes Placeholder 4"/>
+          <p:cNvSpPr>
+            <a:spLocks noGrp="1"/>
+          </p:cNvSpPr>
+          <p:nvPr>
+            <p:ph type="body" sz="quarter" idx="3"/>
+          </p:nvPr>
+        </p:nvSpPr>
+        <p:spPr>
+          <a:xfrm>
+            <a:off x="685800" y="4343400"/>
+            <a:ext cx="5486400" cy="4114800"/>
+          </a:xfrm>
+          <a:prstGeom prst="rect">
+            <a:avLst/>
+          </a:prstGeom>
+        </p:spPr>
+        <p:txBody>
+          <a:bodyPr vert="horz" lIns="91440" tIns="45720" rIns="91440" bIns="45720" rtlCol="0"/>
+          <a:lstStyle/>
+          <a:p>
+            <a:pPr lvl="0"/>
+            <a:r>
+              <a:rPr lang="en-US" smtClean="0"/>
+              <a:t>Click to edit Master text styles</a:t>
+            </a:r>
+          </a:p>
+          <a:p>
+            <a:pPr lvl="1"/>
+            <a:r>
+              <a:rPr lang="en-US" smtClean="0"/>
+              <a:t>Second level</a:t>
+            </a:r>
+          </a:p>
+          <a:p>
+            <a:pPr lvl="2"/>
+            <a:r>
+              <a:rPr lang="en-US" smtClean="0"/>
+              <a:t>Third level</a:t>
+            </a:r>
+          </a:p>
+          <a:p>
+            <a:pPr lvl="3"/>
+            <a:r>
+              <a:rPr lang="en-US" smtClean="0"/>
+              <a:t>Fourth level</a:t>
+            </a:r>
+          </a:p>
+          <a:p>
+            <a:pPr lvl="4"/>
+            <a:r>
+              <a:rPr lang="en-US" smtClean="0"/>
+              <a:t>Fifth level</a:t>
+            </a:r>
+            <a:endParaRPr lang="en-US"/>
+          </a:p>
+        </p:txBody>
+      </p:sp>
+      <p:sp>
+        <p:nvSpPr>
+          <p:cNvPr id="6" name="Footer Placeholder 5"/>
+          <p:cNvSpPr>
+            <a:spLocks noGrp="1"/>
+          </p:cNvSpPr>
+          <p:nvPr>
+            <p:ph type="ftr" sz="quarter" idx="4"/>
+          </p:nvPr>
+        </p:nvSpPr>
+        <p:spPr>
+          <a:xfrm>
+            <a:off x="0" y="8685213"/>
+            <a:ext cx="2971800" cy="457200"/>
+          </a:xfrm>
+          <a:prstGeom prst="rect">
+            <a:avLst/>
+          </a:prstGeom>
+        </p:spPr>
+        <p:txBody>
+          <a:bodyPr vert="horz" lIns="91440" tIns="45720" rIns="91440" bIns="45720" rtlCol="0" anchor="b"/>
+          <a:lstStyle>
+            <a:lvl1pPr algn="l">
+              <a:defRPr sz="1200"/>
+            </a:lvl1pPr>
+          </a:lstStyle>
+          <a:p>
+            <a:endParaRPr lang="en-US"/>
+          </a:p>
+        </p:txBody>
+      </p:sp>
+      <p:sp>
+        <p:nvSpPr>
+          <p:cNvPr id="7" name="Slide Number Placeholder 6"/>
+          <p:cNvSpPr>
+            <a:spLocks noGrp="1"/>
+          </p:cNvSpPr>
+          <p:nvPr>
+            <p:ph type="sldNum" sz="quarter" idx="5"/>
+          </p:nvPr>
+        </p:nvSpPr>
+        <p:spPr>
+          <a:xfrm>
+            <a:off x="3884613" y="8685213"/>
+            <a:ext cx="2971800" cy="457200"/>
+          </a:xfrm>
+          <a:prstGeom prst="rect">
+            <a:avLst/>
+          </a:prstGeom>
+        </p:spPr>
+        <p:txBody>
+          <a:bodyPr vert="horz" lIns="91440" tIns="45720" rIns="91440" bIns="45720" rtlCol="0" anchor="b"/>
+          <a:lstStyle>
+            <a:lvl1pPr algn="r">
+              <a:defRPr sz="1200"/>
+            </a:lvl1pPr>
+          </a:lstStyle>
+          <a:p>
+            <a:fld id="{BB5E49A5-4136-284D-997B-48E1D791AD67}" type="slidenum">
+              <a:rPr lang="en-US" smtClean="0"/>
+              <a:t>‹#›</a:t>
+            </a:fld>
+            <a:endParaRPr lang="en-US"/>
+          </a:p>
+        </p:txBody>
+      </p:sp>
+    </p:spTree>
+    <p:extLst>
+      <p:ext uri="{BB962C8B-B14F-4D97-AF65-F5344CB8AC3E}">
+        <p14:creationId xmlns:p14="http://schemas.microsoft.com/office/powerpoint/2010/main" val="2623252185"/>
+      </p:ext>
+    </p:extLst>
+  </p:cSld>
+  <p:clrMap bg1="lt1" tx1="dk1" bg2="lt2" tx2="dk2" accent1="accent1" accent2="accent2" accent3="accent3" accent4="accent4" accent5="accent5" accent6="accent6" hlink="hlink" folHlink="folHlink"/>
+  <p:notesStyle>
+    <a:lvl1pPr marL="0" algn="l" defTabSz="457200" rtl="0" eaLnBrk="1" latinLnBrk="0" hangingPunct="1">
+      <a:defRPr sz="1200" kern="1200">
+        <a:solidFill>
+          <a:schemeClr val="tx1"/>
+        </a:solidFill>
+        <a:latin typeface="+mn-lt"/>
+        <a:ea typeface="+mn-ea"/>
+        <a:cs typeface="+mn-cs"/>
+      </a:defRPr>
+    </a:lvl1pPr>
+    <a:lvl2pPr marL="457200" algn="l" defTabSz="457200" rtl="0" eaLnBrk="1" latinLnBrk="0" hangingPunct="1">
+      <a:defRPr sz="1200" kern="1200">
+        <a:solidFill>
+          <a:schemeClr val="tx1"/>
+        </a:solidFill>
+        <a:latin typeface="+mn-lt"/>
+        <a:ea typeface="+mn-ea"/>
+        <a:cs typeface="+mn-cs"/>
+      </a:defRPr>
+    </a:lvl2pPr>
+    <a:lvl3pPr marL="914400" algn="l" defTabSz="457200" rtl="0" eaLnBrk="1" latinLnBrk="0" hangingPunct="1">
+      <a:defRPr sz="1200" kern="1200">
+        <a:solidFill>
+          <a:schemeClr val="tx1"/>
+        </a:solidFill>
+        <a:latin typeface="+mn-lt"/>
+        <a:ea typeface="+mn-ea"/>
+        <a:cs typeface="+mn-cs"/>
+      </a:defRPr>
+    </a:lvl3pPr>
+    <a:lvl4pPr marL="1371600" algn="l" defTabSz="457200" rtl="0" eaLnBrk="1" latinLnBrk="0" hangingPunct="1">
+      <a:defRPr sz="1200" kern="1200">
+        <a:solidFill>
+          <a:schemeClr val="tx1"/>
+        </a:solidFill>
+        <a:latin typeface="+mn-lt"/>
+        <a:ea typeface="+mn-ea"/>
+        <a:cs typeface="+mn-cs"/>
+      </a:defRPr>
+    </a:lvl4pPr>
+    <a:lvl5pPr marL="1828800" algn="l" defTabSz="457200" rtl="0" eaLnBrk="1" latinLnBrk="0" hangingPunct="1">
+      <a:defRPr sz="1200" kern="1200">
+        <a:solidFill>
+          <a:schemeClr val="tx1"/>
+        </a:solidFill>
+        <a:latin typeface="+mn-lt"/>
+        <a:ea typeface="+mn-ea"/>
+        <a:cs typeface="+mn-cs"/>
+      </a:defRPr>
+    </a:lvl5pPr>
+    <a:lvl6pPr marL="2286000" algn="l" defTabSz="457200" rtl="0" eaLnBrk="1" latinLnBrk="0" hangingPunct="1">
+      <a:defRPr sz="1200" kern="1200">
+        <a:solidFill>
+          <a:schemeClr val="tx1"/>
+        </a:solidFill>
+        <a:latin typeface="+mn-lt"/>
+        <a:ea typeface="+mn-ea"/>
+        <a:cs typeface="+mn-cs"/>
+      </a:defRPr>
+    </a:lvl6pPr>
+    <a:lvl7pPr marL="2743200" algn="l" defTabSz="457200" rtl="0" eaLnBrk="1" latinLnBrk="0" hangingPunct="1">
+      <a:defRPr sz="1200" kern="1200">
+        <a:solidFill>
+          <a:schemeClr val="tx1"/>
+        </a:solidFill>
+        <a:latin typeface="+mn-lt"/>
+        <a:ea typeface="+mn-ea"/>
+        <a:cs typeface="+mn-cs"/>
+      </a:defRPr>
+    </a:lvl7pPr>
+    <a:lvl8pPr marL="3200400" algn="l" defTabSz="457200" rtl="0" eaLnBrk="1" latinLnBrk="0" hangingPunct="1">
+      <a:defRPr sz="1200" kern="1200">
+        <a:solidFill>
+          <a:schemeClr val="tx1"/>
+        </a:solidFill>
+        <a:latin typeface="+mn-lt"/>
+        <a:ea typeface="+mn-ea"/>
+        <a:cs typeface="+mn-cs"/>
+      </a:defRPr>
+    </a:lvl8pPr>
+    <a:lvl9pPr marL="3657600" algn="l" defTabSz="457200" rtl="0" eaLnBrk="1" latinLnBrk="0" hangingPunct="1">
+      <a:defRPr sz="1200" kern="1200">
+        <a:solidFill>
+          <a:schemeClr val="tx1"/>
+        </a:solidFill>
+        <a:latin typeface="+mn-lt"/>
+        <a:ea typeface="+mn-ea"/>
+        <a:cs typeface="+mn-cs"/>
+      </a:defRPr>
+    </a:lvl9pPr>
+  </p:notesStyle>
+</p:notesMaster>
+</file>
+
+<file path=ppt/notesSlides/notesSlide1.xml><?xml version="1.0" encoding="utf-8"?>
+<p:notes xmlns:a="http://schemas.openxmlformats.org/drawingml/2006/main" xmlns:p="http://schemas.openxmlformats.org/presentationml/2006/main" xmlns:r="http://schemas.openxmlformats.org/officeDocument/2006/relationships">
+  <p:cSld>
+    <p:spTree>
+      <p:nvGrpSpPr>
+        <p:cNvPr id="1" name=""/>
+        <p:cNvGrpSpPr/>
+        <p:nvPr/>
+      </p:nvGrpSpPr>
+      <p:grpSpPr>
+        <a:xfrm>
+          <a:off x="0" y="0"/>
+          <a:ext cx="0" cy="0"/>
+          <a:chOff x="0" y="0"/>
+          <a:chExt cx="0" cy="0"/>
+        </a:xfrm>
+      </p:grpSpPr>
+      <p:sp>
+        <p:nvSpPr>
+          <p:cNvPr id="2" name="Slide Image Placeholder 1"/>
+          <p:cNvSpPr>
+            <a:spLocks noGrp="1"/>
+          </p:cNvSpPr>
+          <p:nvPr>
+            <p:ph type="sldImg" idx="2"/>
+          </p:nvPr>
+        </p:nvSpPr>
+        <p:spPr/>
+      </p:sp>
+      <p:sp>
+        <p:nvSpPr>
+          <p:cNvPr id="3" name="Notes Placeholder 2"/>
+          <p:cNvSpPr>
+            <a:spLocks noGrp="1"/>
+          </p:cNvSpPr>
+          <p:nvPr>
+            <p:ph type="body" idx="3" sz="quarter"/>
+          </p:nvPr>
+        </p:nvSpPr>
+        <p:spPr/>
+        <p:txBody>
+          <a:bodyPr/>
+          <a:lstStyle/>
+          <a:p>
+            <a:r>
+              <a:t>Einstieg (ca. 2 Min.): Frau Dr. Kessler, Herr Vogt, Frau Haller, Herr Brenner – Sie haben uns gebeten, die Vorauswahl vorzubereiten. Zuerst: Warum jetzt? Fünf Fristen bis Ende 2027 – die wichtigste ist der Ruhestand von Herrn Brugger. Neu für Sie: Die E-Rechnung muss KVA schon ab 01.01.2027 versenden, nicht erst 2028. Und wir sagen offen: 2016 sind 940 T€ ohne Ergebnis geblieben – unser Vorschlag ist so gebaut, dass sich diese Fehler nicht wiederholen.</a:t>
+            </a:r>
+          </a:p>
+        </p:txBody>
+      </p:sp>
+      <p:sp>
+        <p:nvSpPr>
+          <p:cNvPr id="4" name="Slide Number Placeholder 3"/>
+          <p:cNvSpPr>
+            <a:spLocks noGrp="1"/>
+          </p:cNvSpPr>
+          <p:nvPr>
+            <p:ph type="sldNum" idx="5" sz="quarter"/>
+          </p:nvPr>
+        </p:nvSpPr>
+        <p:spPr/>
+      </p:sp>
+    </p:spTree>
+  </p:cSld>
+  <p:clrMapOvr>
+    <a:masterClrMapping/>
+  </p:clrMapOvr>
+</p:notes>
+</file>
+
+<file path=ppt/notesSlides/notesSlide2.xml><?xml version="1.0" encoding="utf-8"?>
+<p:notes xmlns:a="http://schemas.openxmlformats.org/drawingml/2006/main" xmlns:p="http://schemas.openxmlformats.org/presentationml/2006/main" xmlns:r="http://schemas.openxmlformats.org/officeDocument/2006/relationships">
+  <p:cSld>
+    <p:spTree>
+      <p:nvGrpSpPr>
+        <p:cNvPr id="1" name=""/>
+        <p:cNvGrpSpPr/>
+        <p:nvPr/>
+      </p:nvGrpSpPr>
+      <p:grpSpPr>
+        <a:xfrm>
+          <a:off x="0" y="0"/>
+          <a:ext cx="0" cy="0"/>
+          <a:chOff x="0" y="0"/>
+          <a:chExt cx="0" cy="0"/>
+        </a:xfrm>
+      </p:grpSpPr>
+      <p:sp>
+        <p:nvSpPr>
+          <p:cNvPr id="2" name="Slide Image Placeholder 1"/>
+          <p:cNvSpPr>
+            <a:spLocks noGrp="1"/>
+          </p:cNvSpPr>
+          <p:nvPr>
+            <p:ph type="sldImg" idx="2"/>
+          </p:nvPr>
+        </p:nvSpPr>
+        <p:spPr/>
+      </p:sp>
+      <p:sp>
+        <p:nvSpPr>
+          <p:cNvPr id="3" name="Notes Placeholder 2"/>
+          <p:cNvSpPr>
+            <a:spLocks noGrp="1"/>
+          </p:cNvSpPr>
+          <p:nvPr>
+            <p:ph type="body" idx="3" sz="quarter"/>
+          </p:nvPr>
+        </p:nvSpPr>
+        <p:spPr/>
+        <p:txBody>
+          <a:bodyPr/>
+          <a:lstStyle/>
+          <a:p>
+            <a:r>
+              <a:t>Anforderungen (ca. 2 Min.): Wir haben alle 111 Wünsche sortiert. Nur 8 sind K.o. – das sind die Dinge, ohne die KVA nicht arbeiten kann. Herr Vogt, der Konfigurator ist K.o.-Kriterium Nr. 1, genau wie Sie es gefordert haben. Frau Nováková, CZ-Lokalisierung und CZ-Oberfläche sind K.o. Fünf Konflikte müssen Sie als GF entscheiden – unsere Vorschläge stehen rechts. Viele Infos im Material waren veraltet oder irreführend (Anhang A9).</a:t>
+            </a:r>
+          </a:p>
+        </p:txBody>
+      </p:sp>
+      <p:sp>
+        <p:nvSpPr>
+          <p:cNvPr id="4" name="Slide Number Placeholder 3"/>
+          <p:cNvSpPr>
+            <a:spLocks noGrp="1"/>
+          </p:cNvSpPr>
+          <p:nvPr>
+            <p:ph type="sldNum" idx="5" sz="quarter"/>
+          </p:nvPr>
+        </p:nvSpPr>
+        <p:spPr/>
+      </p:sp>
+    </p:spTree>
+  </p:cSld>
+  <p:clrMapOvr>
+    <a:masterClrMapping/>
+  </p:clrMapOvr>
+</p:notes>
+</file>
+
+<file path=ppt/notesSlides/notesSlide3.xml><?xml version="1.0" encoding="utf-8"?>
+<p:notes xmlns:a="http://schemas.openxmlformats.org/drawingml/2006/main" xmlns:p="http://schemas.openxmlformats.org/presentationml/2006/main" xmlns:r="http://schemas.openxmlformats.org/officeDocument/2006/relationships">
+  <p:cSld>
+    <p:spTree>
+      <p:nvGrpSpPr>
+        <p:cNvPr id="1" name=""/>
+        <p:cNvGrpSpPr/>
+        <p:nvPr/>
+      </p:nvGrpSpPr>
+      <p:grpSpPr>
+        <a:xfrm>
+          <a:off x="0" y="0"/>
+          <a:ext cx="0" cy="0"/>
+          <a:chOff x="0" y="0"/>
+          <a:chExt cx="0" cy="0"/>
+        </a:xfrm>
+      </p:grpSpPr>
+      <p:sp>
+        <p:nvSpPr>
+          <p:cNvPr id="2" name="Slide Image Placeholder 1"/>
+          <p:cNvSpPr>
+            <a:spLocks noGrp="1"/>
+          </p:cNvSpPr>
+          <p:nvPr>
+            <p:ph type="sldImg" idx="2"/>
+          </p:nvPr>
+        </p:nvSpPr>
+        <p:spPr/>
+      </p:sp>
+      <p:sp>
+        <p:nvSpPr>
+          <p:cNvPr id="3" name="Notes Placeholder 2"/>
+          <p:cNvSpPr>
+            <a:spLocks noGrp="1"/>
+          </p:cNvSpPr>
+          <p:nvPr>
+            <p:ph type="body" idx="3" sz="quarter"/>
+          </p:nvPr>
+        </p:nvSpPr>
+        <p:spPr/>
+        <p:txBody>
+          <a:bodyPr/>
+          <a:lstStyle/>
+          <a:p>
+            <a:r>
+              <a:t>Markt (ca. 1,5 Min.): 16 Optionen, auch die Modernisierung von KVA-WARE, Herr Vogt – die haben wir ernsthaft geprüft. Sie scheitert an 5 von 8 K.o.-Kriterien. Die meisten Anbieter scheiden aus, weil sie keinen Partner in Tschechien haben. Übrig bleiben drei: Business Central, APplus und IFS.</a:t>
+            </a:r>
+          </a:p>
+        </p:txBody>
+      </p:sp>
+      <p:sp>
+        <p:nvSpPr>
+          <p:cNvPr id="4" name="Slide Number Placeholder 3"/>
+          <p:cNvSpPr>
+            <a:spLocks noGrp="1"/>
+          </p:cNvSpPr>
+          <p:nvPr>
+            <p:ph type="sldNum" idx="5" sz="quarter"/>
+          </p:nvPr>
+        </p:nvSpPr>
+        <p:spPr/>
+      </p:sp>
+    </p:spTree>
+  </p:cSld>
+  <p:clrMapOvr>
+    <a:masterClrMapping/>
+  </p:clrMapOvr>
+</p:notes>
+</file>
+
+<file path=ppt/notesSlides/notesSlide4.xml><?xml version="1.0" encoding="utf-8"?>
+<p:notes xmlns:a="http://schemas.openxmlformats.org/drawingml/2006/main" xmlns:p="http://schemas.openxmlformats.org/presentationml/2006/main" xmlns:r="http://schemas.openxmlformats.org/officeDocument/2006/relationships">
+  <p:cSld>
+    <p:spTree>
+      <p:nvGrpSpPr>
+        <p:cNvPr id="1" name=""/>
+        <p:cNvGrpSpPr/>
+        <p:nvPr/>
+      </p:nvGrpSpPr>
+      <p:grpSpPr>
+        <a:xfrm>
+          <a:off x="0" y="0"/>
+          <a:ext cx="0" cy="0"/>
+          <a:chOff x="0" y="0"/>
+          <a:chExt cx="0" cy="0"/>
+        </a:xfrm>
+      </p:grpSpPr>
+      <p:sp>
+        <p:nvSpPr>
+          <p:cNvPr id="2" name="Slide Image Placeholder 1"/>
+          <p:cNvSpPr>
+            <a:spLocks noGrp="1"/>
+          </p:cNvSpPr>
+          <p:nvPr>
+            <p:ph type="sldImg" idx="2"/>
+          </p:nvPr>
+        </p:nvSpPr>
+        <p:spPr/>
+      </p:sp>
+      <p:sp>
+        <p:nvSpPr>
+          <p:cNvPr id="3" name="Notes Placeholder 2"/>
+          <p:cNvSpPr>
+            <a:spLocks noGrp="1"/>
+          </p:cNvSpPr>
+          <p:nvPr>
+            <p:ph type="body" idx="3" sz="quarter"/>
+          </p:nvPr>
+        </p:nvSpPr>
+        <p:spPr/>
+        <p:txBody>
+          <a:bodyPr/>
+          <a:lstStyle/>
+          <a:p>
+            <a:r>
+              <a:t>Bewertung (ca. 2 Min.): IFS kann funktional am meisten, kostet aber 1,2 Mio. € mehr. Business Central hat das beste Verhältnis von Nutzen zu Kosten. Frau Haller, wir haben Ihre 5-Jahres-TCO-Methode übernommen – und müssen ehrlich sagen: Mit 1,5 Mio. € ist keine seriöse Lösung machbar. Selbst in der Logik des Projektauftrags (Einführung + 3 Jahre Lizenzen) kostet BC rund 1,9 Mio. €, weil die internen Kosten mit 120 T€ viel zu niedrig angesetzt waren.</a:t>
+            </a:r>
+          </a:p>
+        </p:txBody>
+      </p:sp>
+      <p:sp>
+        <p:nvSpPr>
+          <p:cNvPr id="4" name="Slide Number Placeholder 3"/>
+          <p:cNvSpPr>
+            <a:spLocks noGrp="1"/>
+          </p:cNvSpPr>
+          <p:nvPr>
+            <p:ph type="sldNum" idx="5" sz="quarter"/>
+          </p:nvPr>
+        </p:nvSpPr>
+        <p:spPr/>
+      </p:sp>
+    </p:spTree>
+  </p:cSld>
+  <p:clrMapOvr>
+    <a:masterClrMapping/>
+  </p:clrMapOvr>
+</p:notes>
+</file>
+
+<file path=ppt/notesSlides/notesSlide5.xml><?xml version="1.0" encoding="utf-8"?>
+<p:notes xmlns:a="http://schemas.openxmlformats.org/drawingml/2006/main" xmlns:p="http://schemas.openxmlformats.org/presentationml/2006/main" xmlns:r="http://schemas.openxmlformats.org/officeDocument/2006/relationships">
+  <p:cSld>
+    <p:spTree>
+      <p:nvGrpSpPr>
+        <p:cNvPr id="1" name=""/>
+        <p:cNvGrpSpPr/>
+        <p:nvPr/>
+      </p:nvGrpSpPr>
+      <p:grpSpPr>
+        <a:xfrm>
+          <a:off x="0" y="0"/>
+          <a:ext cx="0" cy="0"/>
+          <a:chOff x="0" y="0"/>
+          <a:chExt cx="0" cy="0"/>
+        </a:xfrm>
+      </p:grpSpPr>
+      <p:sp>
+        <p:nvSpPr>
+          <p:cNvPr id="2" name="Slide Image Placeholder 1"/>
+          <p:cNvSpPr>
+            <a:spLocks noGrp="1"/>
+          </p:cNvSpPr>
+          <p:nvPr>
+            <p:ph type="sldImg" idx="2"/>
+          </p:nvPr>
+        </p:nvSpPr>
+        <p:spPr/>
+      </p:sp>
+      <p:sp>
+        <p:nvSpPr>
+          <p:cNvPr id="3" name="Notes Placeholder 2"/>
+          <p:cNvSpPr>
+            <a:spLocks noGrp="1"/>
+          </p:cNvSpPr>
+          <p:nvPr>
+            <p:ph type="body" idx="3" sz="quarter"/>
+          </p:nvPr>
+        </p:nvSpPr>
+        <p:spPr/>
+        <p:txBody>
+          <a:bodyPr/>
+          <a:lstStyle/>
+          <a:p>
+            <a:r>
+              <a:t>Empfehlung (ca. 2,5 Min.): Business Central als Favorit – aber erst unterschreiben, wenn der Konfigurator im Test mit dem echten Baukasten funktioniert. Herr Vogt, Sie bewerten diesen Test. Pilsen geht zuerst live, Singen am 01.04.2028. Herr Brenner, Ihr Plan B: dieselbe Software kann beim deutschen Hoster laufen. Rechts stehen die acht Entscheidungen, die heute bei Ihnen liegen – allen voran Budget und Termin.</a:t>
+            </a:r>
+          </a:p>
+        </p:txBody>
+      </p:sp>
+      <p:sp>
+        <p:nvSpPr>
+          <p:cNvPr id="4" name="Slide Number Placeholder 3"/>
+          <p:cNvSpPr>
+            <a:spLocks noGrp="1"/>
+          </p:cNvSpPr>
+          <p:nvPr>
+            <p:ph type="sldNum" idx="5" sz="quarter"/>
+          </p:nvPr>
+        </p:nvSpPr>
+        <p:spPr/>
+      </p:sp>
+    </p:spTree>
+  </p:cSld>
+  <p:clrMapOvr>
+    <a:masterClrMapping/>
+  </p:clrMapOvr>
+</p:notes>
 </file>
 
 <file path=ppt/slideLayouts/slideLayout1.xml><?xml version="1.0" encoding="utf-8"?>
@@ -3763,35 +4467,37 @@
         </p:nvSpPr>
         <p:spPr>
           <a:xfrm>
-            <a:off x="8229600" y="109728"/>
-            <a:ext cx="3657600" cy="320040"/>
+            <a:off x="6766560" y="91440"/>
+            <a:ext cx="5029200" cy="310896"/>
           </a:xfrm>
           <a:prstGeom prst="rect">
             <a:avLst/>
           </a:prstGeom>
-          <a:noFill/>
+          <a:solidFill>
+            <a:srgbClr val="EEF3F8"/>
+          </a:solidFill>
           <a:ln>
             <a:noFill/>
           </a:ln>
           <a:effectLst/>
         </p:spPr>
         <p:txBody>
-          <a:bodyPr rtlCol="0" anchor="t" wrap="square" lIns="45720" rIns="45720"/>
+          <a:bodyPr rtlCol="0" anchor="ctr" wrap="square" lIns="45720" rIns="45720"/>
           <a:lstStyle/>
           <a:p>
-            <a:pPr algn="r">
+            <a:pPr algn="ctr">
               <a:spcAft>
                 <a:spcPts val="200"/>
               </a:spcAft>
             </a:pPr>
             <a:r>
-              <a:rPr sz="900" b="0">
+              <a:rPr sz="1000" b="1">
                 <a:solidFill>
-                  <a:srgbClr val="595959"/>
+                  <a:srgbClr val="1F4E79"/>
                 </a:solidFill>
                 <a:latin typeface="Calibri"/>
               </a:rPr>
-              <a:t>Gruppe: [Name 1 – Matr.-Nr.] · [Name 2 – Matr.-Nr.] · [Name 3 – Matr.-Nr.]</a:t>
+              <a:t>Gruppe: [Name 1, Matr.-Nr.] · [Name 2, Matr.-Nr.] · [Name 3, Matr.-Nr.]</a:t>
             </a:r>
           </a:p>
         </p:txBody>
@@ -4539,8 +5245,8 @@
         </p:nvSpPr>
         <p:spPr>
           <a:xfrm>
-            <a:off x="548640" y="3429000"/>
-            <a:ext cx="6949440" cy="685800"/>
+            <a:off x="548640" y="3291840"/>
+            <a:ext cx="3383280" cy="960120"/>
           </a:xfrm>
           <a:prstGeom prst="rect">
             <a:avLst/>
@@ -4554,7 +5260,7 @@
           <a:effectLst/>
         </p:spPr>
         <p:txBody>
-          <a:bodyPr rtlCol="0" anchor="t" wrap="square" tIns="91440" bIns="91440"/>
+          <a:bodyPr rtlCol="0" anchor="t" wrap="square" lIns="73152" rIns="73152" tIns="73152" bIns="73152"/>
           <a:lstStyle/>
           <a:p>
             <a:pPr algn="l">
@@ -4563,13 +5269,29 @@
               </a:spcAft>
             </a:pPr>
             <a:r>
-              <a:rPr sz="1100" b="0">
+              <a:rPr sz="1050" b="1">
+                <a:solidFill>
+                  <a:srgbClr val="1F4E79"/>
+                </a:solidFill>
+                <a:latin typeface="Calibri"/>
+              </a:rPr>
+              <a:t>Auftrag Beirat (Q3/2025)</a:t>
+            </a:r>
+          </a:p>
+          <a:p>
+            <a:pPr algn="l">
+              <a:spcAft>
+                <a:spcPts val="200"/>
+              </a:spcAft>
+            </a:pPr>
+            <a:r>
+              <a:rPr sz="950" b="0">
                 <a:solidFill>
                   <a:srgbClr val="1A1A1A"/>
                 </a:solidFill>
                 <a:latin typeface="Calibri"/>
               </a:rPr>
-              <a:t>Beiratsbeschluss Q3/2025: Abhängigkeit von KVA-WARE bis Ende 2027 auflösen, Entscheidungsvorlage mit ≥ 3 Alternativen bis Q4/2026. Der Meilenstein „Vertrag 30.09.2026“ aus dem Projektauftrag ist bereits verstrichen.</a:t>
+              <a:t>Abhängigkeit von KVA-WARE bis Ende 2027 lösen; Vorlage mit ≥ 3 Alternativen bis Q4/2026. Meilenstein „Vertrag 30.09.2026“ ist schon verstrichen.</a:t>
             </a:r>
           </a:p>
         </p:txBody>
@@ -4577,6 +5299,65 @@
       <p:sp>
         <p:nvSpPr>
           <p:cNvPr id="25" name="Rectangle 24"/>
+          <p:cNvSpPr/>
+          <p:nvPr/>
+        </p:nvSpPr>
+        <p:spPr>
+          <a:xfrm>
+            <a:off x="4069080" y="3291840"/>
+            <a:ext cx="3429000" cy="960120"/>
+          </a:xfrm>
+          <a:prstGeom prst="rect">
+            <a:avLst/>
+          </a:prstGeom>
+          <a:solidFill>
+            <a:srgbClr val="FCE4D6"/>
+          </a:solidFill>
+          <a:ln>
+            <a:noFill/>
+          </a:ln>
+          <a:effectLst/>
+        </p:spPr>
+        <p:txBody>
+          <a:bodyPr rtlCol="0" anchor="t" wrap="square" lIns="73152" rIns="73152" tIns="73152" bIns="73152"/>
+          <a:lstStyle/>
+          <a:p>
+            <a:pPr algn="l">
+              <a:spcAft>
+                <a:spcPts val="200"/>
+              </a:spcAft>
+            </a:pPr>
+            <a:r>
+              <a:rPr sz="1050" b="1">
+                <a:solidFill>
+                  <a:srgbClr val="C00000"/>
+                </a:solidFill>
+                <a:latin typeface="Calibri"/>
+              </a:rPr>
+              <a:t>Gescheitert: „KVA neu“ 2014–2016</a:t>
+            </a:r>
+          </a:p>
+          <a:p>
+            <a:pPr algn="l">
+              <a:spcAft>
+                <a:spcPts val="200"/>
+              </a:spcAft>
+            </a:pPr>
+            <a:r>
+              <a:rPr sz="950" b="0">
+                <a:solidFill>
+                  <a:srgbClr val="1A1A1A"/>
+                </a:solidFill>
+                <a:latin typeface="Calibri"/>
+              </a:rPr>
+              <a:t>SAP-Projekt nach 17 Monaten abgebrochen, 940 T€ ohne Ergebnis. Ursachen: kein Konfigurator-Konzept, Key User nicht frei, Stammdaten, revidierte Entscheidungen.</a:t>
+            </a:r>
+          </a:p>
+        </p:txBody>
+      </p:sp>
+      <p:sp>
+        <p:nvSpPr>
+          <p:cNvPr id="26" name="Rectangle 25"/>
           <p:cNvSpPr/>
           <p:nvPr/>
         </p:nvSpPr>
@@ -4617,7 +5398,7 @@
       </p:sp>
       <p:graphicFrame>
         <p:nvGraphicFramePr>
-          <p:cNvPr id="26" name="Table 25"/>
+          <p:cNvPr id="27" name="Table 26"/>
           <p:cNvGraphicFramePr>
             <a:graphicFrameLocks noGrp="1"/>
           </p:cNvGraphicFramePr>
@@ -5120,7 +5901,7 @@
       </p:graphicFrame>
       <p:sp>
         <p:nvSpPr>
-          <p:cNvPr id="27" name="Rectangle 26"/>
+          <p:cNvPr id="28" name="Rectangle 27"/>
           <p:cNvSpPr/>
           <p:nvPr/>
         </p:nvSpPr>
@@ -5161,7 +5942,7 @@
       </p:sp>
       <p:sp>
         <p:nvSpPr>
-          <p:cNvPr id="28" name="Rectangle 27"/>
+          <p:cNvPr id="29" name="Rectangle 28"/>
           <p:cNvSpPr/>
           <p:nvPr/>
         </p:nvSpPr>
@@ -5202,7 +5983,7 @@
       </p:sp>
       <p:sp>
         <p:nvSpPr>
-          <p:cNvPr id="29" name="Rectangle 28"/>
+          <p:cNvPr id="30" name="Rectangle 29"/>
           <p:cNvSpPr/>
           <p:nvPr/>
         </p:nvSpPr>
@@ -5261,7 +6042,7 @@
       </p:sp>
       <p:sp>
         <p:nvSpPr>
-          <p:cNvPr id="30" name="Rectangle 29"/>
+          <p:cNvPr id="31" name="Rectangle 30"/>
           <p:cNvSpPr/>
           <p:nvPr/>
         </p:nvSpPr>
@@ -5320,7 +6101,7 @@
       </p:sp>
       <p:sp>
         <p:nvSpPr>
-          <p:cNvPr id="31" name="Rectangle 30"/>
+          <p:cNvPr id="32" name="Rectangle 31"/>
           <p:cNvSpPr/>
           <p:nvPr/>
         </p:nvSpPr>
@@ -5379,7 +6160,7 @@
       </p:sp>
       <p:sp>
         <p:nvSpPr>
-          <p:cNvPr id="32" name="Rectangle 31"/>
+          <p:cNvPr id="33" name="Rectangle 32"/>
           <p:cNvSpPr/>
           <p:nvPr/>
         </p:nvSpPr>
@@ -5438,7 +6219,7 @@
       </p:sp>
       <p:sp>
         <p:nvSpPr>
-          <p:cNvPr id="33" name="Rectangle 32"/>
+          <p:cNvPr id="34" name="Rectangle 33"/>
           <p:cNvSpPr/>
           <p:nvPr/>
         </p:nvSpPr>
@@ -7568,7 +8349,7 @@
                 </a:solidFill>
                 <a:latin typeface="Calibri"/>
               </a:rPr>
-              <a:t>Anhang A7 – Quellen</a:t>
+              <a:t>Anhang A7 – Longlist komplett: wer warum ausscheidet (für Rückfragen)</a:t>
             </a:r>
           </a:p>
         </p:txBody>
@@ -7651,6 +8432,7230 @@
                 <a:latin typeface="Calibri"/>
               </a:rPr>
               <a:t>A7</a:t>
+            </a:r>
+          </a:p>
+        </p:txBody>
+      </p:sp>
+      <p:graphicFrame>
+        <p:nvGraphicFramePr>
+          <p:cNvPr id="7" name="Table 6"/>
+          <p:cNvGraphicFramePr>
+            <a:graphicFrameLocks noGrp="1"/>
+          </p:cNvGraphicFramePr>
+          <p:nvPr/>
+        </p:nvGraphicFramePr>
+        <p:xfrm>
+          <a:off x="320040" y="1097280"/>
+          <a:ext cx="11567160" cy="5257800"/>
+        </p:xfrm>
+        <a:graphic>
+          <a:graphicData uri="http://schemas.openxmlformats.org/drawingml/2006/table">
+            <a:tbl>
+              <a:tblPr firstRow="1" bandRow="1">
+                <a:tableStyleId>{5C22544A-7EE6-4342-B048-85BDC9FD1C3A}</a:tableStyleId>
+              </a:tblPr>
+              <a:tblGrid>
+                <a:gridCol w="320040"/>
+                <a:gridCol w="2377440"/>
+                <a:gridCol w="1737360"/>
+                <a:gridCol w="2194560"/>
+                <a:gridCol w="1097280"/>
+                <a:gridCol w="3840480"/>
+              </a:tblGrid>
+              <a:tr h="309282">
+                <a:tc>
+                  <a:txBody>
+                    <a:bodyPr/>
+                    <a:lstStyle/>
+                    <a:p>
+                      <a:r>
+                        <a:rPr sz="680" b="1">
+                          <a:solidFill>
+                            <a:srgbClr val="FFFFFF"/>
+                          </a:solidFill>
+                          <a:latin typeface="Calibri"/>
+                        </a:rPr>
+                        <a:t>Nr</a:t>
+                      </a:r>
+                    </a:p>
+                  </a:txBody>
+                  <a:tcPr marL="45720" marR="45720" marT="18288" marB="18288">
+                    <a:solidFill>
+                      <a:srgbClr val="1F4E79"/>
+                    </a:solidFill>
+                  </a:tcPr>
+                </a:tc>
+                <a:tc>
+                  <a:txBody>
+                    <a:bodyPr/>
+                    <a:lstStyle/>
+                    <a:p>
+                      <a:r>
+                        <a:rPr sz="680" b="1">
+                          <a:solidFill>
+                            <a:srgbClr val="FFFFFF"/>
+                          </a:solidFill>
+                          <a:latin typeface="Calibri"/>
+                        </a:rPr>
+                        <a:t>Produkt</a:t>
+                      </a:r>
+                    </a:p>
+                  </a:txBody>
+                  <a:tcPr marL="45720" marR="45720" marT="18288" marB="18288">
+                    <a:solidFill>
+                      <a:srgbClr val="1F4E79"/>
+                    </a:solidFill>
+                  </a:tcPr>
+                </a:tc>
+                <a:tc>
+                  <a:txBody>
+                    <a:bodyPr/>
+                    <a:lstStyle/>
+                    <a:p>
+                      <a:r>
+                        <a:rPr sz="680" b="1">
+                          <a:solidFill>
+                            <a:srgbClr val="FFFFFF"/>
+                          </a:solidFill>
+                          <a:latin typeface="Calibri"/>
+                        </a:rPr>
+                        <a:t>Betrieb</a:t>
+                      </a:r>
+                    </a:p>
+                  </a:txBody>
+                  <a:tcPr marL="45720" marR="45720" marT="18288" marB="18288">
+                    <a:solidFill>
+                      <a:srgbClr val="1F4E79"/>
+                    </a:solidFill>
+                  </a:tcPr>
+                </a:tc>
+                <a:tc>
+                  <a:txBody>
+                    <a:bodyPr/>
+                    <a:lstStyle/>
+                    <a:p>
+                      <a:r>
+                        <a:rPr sz="680" b="1">
+                          <a:solidFill>
+                            <a:srgbClr val="FFFFFF"/>
+                          </a:solidFill>
+                          <a:latin typeface="Calibri"/>
+                        </a:rPr>
+                        <a:t>Präsenz CZ</a:t>
+                      </a:r>
+                    </a:p>
+                  </a:txBody>
+                  <a:tcPr marL="45720" marR="45720" marT="18288" marB="18288">
+                    <a:solidFill>
+                      <a:srgbClr val="1F4E79"/>
+                    </a:solidFill>
+                  </a:tcPr>
+                </a:tc>
+                <a:tc>
+                  <a:txBody>
+                    <a:bodyPr/>
+                    <a:lstStyle/>
+                    <a:p>
+                      <a:r>
+                        <a:rPr sz="680" b="1">
+                          <a:solidFill>
+                            <a:srgbClr val="FFFFFF"/>
+                          </a:solidFill>
+                          <a:latin typeface="Calibri"/>
+                        </a:rPr>
+                        <a:t>Ergebnis</a:t>
+                      </a:r>
+                    </a:p>
+                  </a:txBody>
+                  <a:tcPr marL="45720" marR="45720" marT="18288" marB="18288">
+                    <a:solidFill>
+                      <a:srgbClr val="1F4E79"/>
+                    </a:solidFill>
+                  </a:tcPr>
+                </a:tc>
+                <a:tc>
+                  <a:txBody>
+                    <a:bodyPr/>
+                    <a:lstStyle/>
+                    <a:p>
+                      <a:r>
+                        <a:rPr sz="680" b="1">
+                          <a:solidFill>
+                            <a:srgbClr val="FFFFFF"/>
+                          </a:solidFill>
+                          <a:latin typeface="Calibri"/>
+                        </a:rPr>
+                        <a:t>Begründung</a:t>
+                      </a:r>
+                    </a:p>
+                  </a:txBody>
+                  <a:tcPr marL="45720" marR="45720" marT="18288" marB="18288">
+                    <a:solidFill>
+                      <a:srgbClr val="1F4E79"/>
+                    </a:solidFill>
+                  </a:tcPr>
+                </a:tc>
+              </a:tr>
+              <a:tr h="309282">
+                <a:tc>
+                  <a:txBody>
+                    <a:bodyPr/>
+                    <a:lstStyle/>
+                    <a:p>
+                      <a:r>
+                        <a:rPr sz="680" b="0">
+                          <a:solidFill>
+                            <a:srgbClr val="1A1A1A"/>
+                          </a:solidFill>
+                          <a:latin typeface="Calibri"/>
+                        </a:rPr>
+                        <a:t>1</a:t>
+                      </a:r>
+                    </a:p>
+                  </a:txBody>
+                  <a:tcPr marL="45720" marR="45720" marT="18288" marB="18288">
+                    <a:solidFill>
+                      <a:srgbClr val="FFFFFF"/>
+                    </a:solidFill>
+                  </a:tcPr>
+                </a:tc>
+                <a:tc>
+                  <a:txBody>
+                    <a:bodyPr/>
+                    <a:lstStyle/>
+                    <a:p>
+                      <a:r>
+                        <a:rPr sz="680" b="0">
+                          <a:solidFill>
+                            <a:srgbClr val="1A1A1A"/>
+                          </a:solidFill>
+                          <a:latin typeface="Calibri"/>
+                        </a:rPr>
+                        <a:t>Dynamics 365 Business Central (+ Fertigungs-/Konfigurator-Erweiterung)</a:t>
+                      </a:r>
+                    </a:p>
+                  </a:txBody>
+                  <a:tcPr marL="45720" marR="45720" marT="18288" marB="18288">
+                    <a:solidFill>
+                      <a:srgbClr val="FFFFFF"/>
+                    </a:solidFill>
+                  </a:tcPr>
+                </a:tc>
+                <a:tc>
+                  <a:txBody>
+                    <a:bodyPr/>
+                    <a:lstStyle/>
+                    <a:p>
+                      <a:r>
+                        <a:rPr sz="680" b="0">
+                          <a:solidFill>
+                            <a:srgbClr val="1A1A1A"/>
+                          </a:solidFill>
+                          <a:latin typeface="Calibri"/>
+                        </a:rPr>
+                        <a:t>SaaS (Azure EU); On-Prem/Partner-Hosting möglich</a:t>
+                      </a:r>
+                    </a:p>
+                  </a:txBody>
+                  <a:tcPr marL="45720" marR="45720" marT="18288" marB="18288">
+                    <a:solidFill>
+                      <a:srgbClr val="FFFFFF"/>
+                    </a:solidFill>
+                  </a:tcPr>
+                </a:tc>
+                <a:tc>
+                  <a:txBody>
+                    <a:bodyPr/>
+                    <a:lstStyle/>
+                    <a:p>
+                      <a:r>
+                        <a:rPr sz="680" b="0">
+                          <a:solidFill>
+                            <a:srgbClr val="1A1A1A"/>
+                          </a:solidFill>
+                          <a:latin typeface="Calibri"/>
+                        </a:rPr>
+                        <a:t>sehr hoch – CZ-Lokalisierung von Microsoft, viele Partner (u. a. DataSoft-Angebot)</a:t>
+                      </a:r>
+                    </a:p>
+                  </a:txBody>
+                  <a:tcPr marL="45720" marR="45720" marT="18288" marB="18288">
+                    <a:solidFill>
+                      <a:srgbClr val="FFFFFF"/>
+                    </a:solidFill>
+                  </a:tcPr>
+                </a:tc>
+                <a:tc>
+                  <a:txBody>
+                    <a:bodyPr/>
+                    <a:lstStyle/>
+                    <a:p>
+                      <a:r>
+                        <a:rPr sz="680" b="0">
+                          <a:solidFill>
+                            <a:srgbClr val="1A1A1A"/>
+                          </a:solidFill>
+                          <a:latin typeface="Calibri"/>
+                        </a:rPr>
+                        <a:t>Shortlist</a:t>
+                      </a:r>
+                    </a:p>
+                  </a:txBody>
+                  <a:tcPr marL="45720" marR="45720" marT="18288" marB="18288">
+                    <a:solidFill>
+                      <a:srgbClr val="C6EFCE"/>
+                    </a:solidFill>
+                  </a:tcPr>
+                </a:tc>
+                <a:tc>
+                  <a:txBody>
+                    <a:bodyPr/>
+                    <a:lstStyle/>
+                    <a:p>
+                      <a:r>
+                        <a:rPr sz="680" b="0">
+                          <a:solidFill>
+                            <a:srgbClr val="1A1A1A"/>
+                          </a:solidFill>
+                          <a:latin typeface="Calibri"/>
+                        </a:rPr>
+                        <a:t>Günstigste Variante, Pilsen schnell machbar, Plan B (Hosting) möglich; Risiko: Konfigurator/APS nur über Partnerlösungen</a:t>
+                      </a:r>
+                    </a:p>
+                  </a:txBody>
+                  <a:tcPr marL="45720" marR="45720" marT="18288" marB="18288">
+                    <a:solidFill>
+                      <a:srgbClr val="FFFFFF"/>
+                    </a:solidFill>
+                  </a:tcPr>
+                </a:tc>
+              </a:tr>
+              <a:tr h="309282">
+                <a:tc>
+                  <a:txBody>
+                    <a:bodyPr/>
+                    <a:lstStyle/>
+                    <a:p>
+                      <a:r>
+                        <a:rPr sz="680" b="0">
+                          <a:solidFill>
+                            <a:srgbClr val="1A1A1A"/>
+                          </a:solidFill>
+                          <a:latin typeface="Calibri"/>
+                        </a:rPr>
+                        <a:t>2</a:t>
+                      </a:r>
+                    </a:p>
+                  </a:txBody>
+                  <a:tcPr marL="45720" marR="45720" marT="18288" marB="18288">
+                    <a:solidFill>
+                      <a:srgbClr val="EEF3F8"/>
+                    </a:solidFill>
+                  </a:tcPr>
+                </a:tc>
+                <a:tc>
+                  <a:txBody>
+                    <a:bodyPr/>
+                    <a:lstStyle/>
+                    <a:p>
+                      <a:r>
+                        <a:rPr sz="680" b="0">
+                          <a:solidFill>
+                            <a:srgbClr val="1A1A1A"/>
+                          </a:solidFill>
+                          <a:latin typeface="Calibri"/>
+                        </a:rPr>
+                        <a:t>APplus</a:t>
+                      </a:r>
+                    </a:p>
+                  </a:txBody>
+                  <a:tcPr marL="45720" marR="45720" marT="18288" marB="18288">
+                    <a:solidFill>
+                      <a:srgbClr val="EEF3F8"/>
+                    </a:solidFill>
+                  </a:tcPr>
+                </a:tc>
+                <a:tc>
+                  <a:txBody>
+                    <a:bodyPr/>
+                    <a:lstStyle/>
+                    <a:p>
+                      <a:r>
+                        <a:rPr sz="680" b="0">
+                          <a:solidFill>
+                            <a:srgbClr val="1A1A1A"/>
+                          </a:solidFill>
+                          <a:latin typeface="Calibri"/>
+                        </a:rPr>
+                        <a:t>Cloud, Hybrid, On-Prem (lt. erp-software.org)</a:t>
+                      </a:r>
+                    </a:p>
+                  </a:txBody>
+                  <a:tcPr marL="45720" marR="45720" marT="18288" marB="18288">
+                    <a:solidFill>
+                      <a:srgbClr val="EEF3F8"/>
+                    </a:solidFill>
+                  </a:tcPr>
+                </a:tc>
+                <a:tc>
+                  <a:txBody>
+                    <a:bodyPr/>
+                    <a:lstStyle/>
+                    <a:p>
+                      <a:r>
+                        <a:rPr sz="680" b="0">
+                          <a:solidFill>
+                            <a:srgbClr val="1A1A1A"/>
+                          </a:solidFill>
+                          <a:latin typeface="Calibri"/>
+                        </a:rPr>
+                        <a:t>mittel – Asseco Solutions mit CZ-Organisation (HELIOS); APplus-CZ-Lokalisierung UNBESTÄTIGT</a:t>
+                      </a:r>
+                    </a:p>
+                  </a:txBody>
+                  <a:tcPr marL="45720" marR="45720" marT="18288" marB="18288">
+                    <a:solidFill>
+                      <a:srgbClr val="EEF3F8"/>
+                    </a:solidFill>
+                  </a:tcPr>
+                </a:tc>
+                <a:tc>
+                  <a:txBody>
+                    <a:bodyPr/>
+                    <a:lstStyle/>
+                    <a:p>
+                      <a:r>
+                        <a:rPr sz="680" b="0">
+                          <a:solidFill>
+                            <a:srgbClr val="1A1A1A"/>
+                          </a:solidFill>
+                          <a:latin typeface="Calibri"/>
+                        </a:rPr>
+                        <a:t>Shortlist (mit Vorbehalt K4/K6)</a:t>
+                      </a:r>
+                    </a:p>
+                  </a:txBody>
+                  <a:tcPr marL="45720" marR="45720" marT="18288" marB="18288">
+                    <a:solidFill>
+                      <a:srgbClr val="C6EFCE"/>
+                    </a:solidFill>
+                  </a:tcPr>
+                </a:tc>
+                <a:tc>
+                  <a:txBody>
+                    <a:bodyPr/>
+                    <a:lstStyle/>
+                    <a:p>
+                      <a:r>
+                        <a:rPr sz="680" b="0">
+                          <a:solidFill>
+                            <a:srgbClr val="1A1A1A"/>
+                          </a:solidFill>
+                          <a:latin typeface="Calibri"/>
+                        </a:rPr>
+                        <a:t>Deutscher Mittelstandsanbieter, starke Variantenfertigung; K.o.-Prüfung CZ im RFI zwingend</a:t>
+                      </a:r>
+                    </a:p>
+                  </a:txBody>
+                  <a:tcPr marL="45720" marR="45720" marT="18288" marB="18288">
+                    <a:solidFill>
+                      <a:srgbClr val="EEF3F8"/>
+                    </a:solidFill>
+                  </a:tcPr>
+                </a:tc>
+              </a:tr>
+              <a:tr h="309282">
+                <a:tc>
+                  <a:txBody>
+                    <a:bodyPr/>
+                    <a:lstStyle/>
+                    <a:p>
+                      <a:r>
+                        <a:rPr sz="680" b="0">
+                          <a:solidFill>
+                            <a:srgbClr val="1A1A1A"/>
+                          </a:solidFill>
+                          <a:latin typeface="Calibri"/>
+                        </a:rPr>
+                        <a:t>3</a:t>
+                      </a:r>
+                    </a:p>
+                  </a:txBody>
+                  <a:tcPr marL="45720" marR="45720" marT="18288" marB="18288">
+                    <a:solidFill>
+                      <a:srgbClr val="FFFFFF"/>
+                    </a:solidFill>
+                  </a:tcPr>
+                </a:tc>
+                <a:tc>
+                  <a:txBody>
+                    <a:bodyPr/>
+                    <a:lstStyle/>
+                    <a:p>
+                      <a:r>
+                        <a:rPr sz="680" b="0">
+                          <a:solidFill>
+                            <a:srgbClr val="1A1A1A"/>
+                          </a:solidFill>
+                          <a:latin typeface="Calibri"/>
+                        </a:rPr>
+                        <a:t>IFS Cloud</a:t>
+                      </a:r>
+                    </a:p>
+                  </a:txBody>
+                  <a:tcPr marL="45720" marR="45720" marT="18288" marB="18288">
+                    <a:solidFill>
+                      <a:srgbClr val="FFFFFF"/>
+                    </a:solidFill>
+                  </a:tcPr>
+                </a:tc>
+                <a:tc>
+                  <a:txBody>
+                    <a:bodyPr/>
+                    <a:lstStyle/>
+                    <a:p>
+                      <a:r>
+                        <a:rPr sz="680" b="0">
+                          <a:solidFill>
+                            <a:srgbClr val="1A1A1A"/>
+                          </a:solidFill>
+                          <a:latin typeface="Calibri"/>
+                        </a:rPr>
+                        <a:t>SaaS oder kundenbetrieben (On-Prem/Remote)</a:t>
+                      </a:r>
+                    </a:p>
+                  </a:txBody>
+                  <a:tcPr marL="45720" marR="45720" marT="18288" marB="18288">
+                    <a:solidFill>
+                      <a:srgbClr val="FFFFFF"/>
+                    </a:solidFill>
+                  </a:tcPr>
+                </a:tc>
+                <a:tc>
+                  <a:txBody>
+                    <a:bodyPr/>
+                    <a:lstStyle/>
+                    <a:p>
+                      <a:r>
+                        <a:rPr sz="680" b="0">
+                          <a:solidFill>
+                            <a:srgbClr val="1A1A1A"/>
+                          </a:solidFill>
+                          <a:latin typeface="Calibri"/>
+                        </a:rPr>
+                        <a:t>hoch – Präsenz CZ seit 2000, Partner CDC Data, InfoConsulting</a:t>
+                      </a:r>
+                    </a:p>
+                  </a:txBody>
+                  <a:tcPr marL="45720" marR="45720" marT="18288" marB="18288">
+                    <a:solidFill>
+                      <a:srgbClr val="FFFFFF"/>
+                    </a:solidFill>
+                  </a:tcPr>
+                </a:tc>
+                <a:tc>
+                  <a:txBody>
+                    <a:bodyPr/>
+                    <a:lstStyle/>
+                    <a:p>
+                      <a:r>
+                        <a:rPr sz="680" b="0">
+                          <a:solidFill>
+                            <a:srgbClr val="1A1A1A"/>
+                          </a:solidFill>
+                          <a:latin typeface="Calibri"/>
+                        </a:rPr>
+                        <a:t>Shortlist</a:t>
+                      </a:r>
+                    </a:p>
+                  </a:txBody>
+                  <a:tcPr marL="45720" marR="45720" marT="18288" marB="18288">
+                    <a:solidFill>
+                      <a:srgbClr val="C6EFCE"/>
+                    </a:solidFill>
+                  </a:tcPr>
+                </a:tc>
+                <a:tc>
+                  <a:txBody>
+                    <a:bodyPr/>
+                    <a:lstStyle/>
+                    <a:p>
+                      <a:r>
+                        <a:rPr sz="680" b="0">
+                          <a:solidFill>
+                            <a:srgbClr val="1A1A1A"/>
+                          </a:solidFill>
+                          <a:latin typeface="Calibri"/>
+                        </a:rPr>
+                        <a:t>Funktional breiteste Abdeckung (ETO + Service), EU-Anbieter, beide Betriebsmodelle; teuerste Option</a:t>
+                      </a:r>
+                    </a:p>
+                  </a:txBody>
+                  <a:tcPr marL="45720" marR="45720" marT="18288" marB="18288">
+                    <a:solidFill>
+                      <a:srgbClr val="FFFFFF"/>
+                    </a:solidFill>
+                  </a:tcPr>
+                </a:tc>
+              </a:tr>
+              <a:tr h="309282">
+                <a:tc>
+                  <a:txBody>
+                    <a:bodyPr/>
+                    <a:lstStyle/>
+                    <a:p>
+                      <a:r>
+                        <a:rPr sz="680" b="0">
+                          <a:solidFill>
+                            <a:srgbClr val="1A1A1A"/>
+                          </a:solidFill>
+                          <a:latin typeface="Calibri"/>
+                        </a:rPr>
+                        <a:t>4</a:t>
+                      </a:r>
+                    </a:p>
+                  </a:txBody>
+                  <a:tcPr marL="45720" marR="45720" marT="18288" marB="18288">
+                    <a:solidFill>
+                      <a:srgbClr val="EEF3F8"/>
+                    </a:solidFill>
+                  </a:tcPr>
+                </a:tc>
+                <a:tc>
+                  <a:txBody>
+                    <a:bodyPr/>
+                    <a:lstStyle/>
+                    <a:p>
+                      <a:r>
+                        <a:rPr sz="680" b="0">
+                          <a:solidFill>
+                            <a:srgbClr val="1A1A1A"/>
+                          </a:solidFill>
+                          <a:latin typeface="Calibri"/>
+                        </a:rPr>
+                        <a:t>proALPHA ERP</a:t>
+                      </a:r>
+                    </a:p>
+                  </a:txBody>
+                  <a:tcPr marL="45720" marR="45720" marT="18288" marB="18288">
+                    <a:solidFill>
+                      <a:srgbClr val="EEF3F8"/>
+                    </a:solidFill>
+                  </a:tcPr>
+                </a:tc>
+                <a:tc>
+                  <a:txBody>
+                    <a:bodyPr/>
+                    <a:lstStyle/>
+                    <a:p>
+                      <a:r>
+                        <a:rPr sz="680" b="0">
+                          <a:solidFill>
+                            <a:srgbClr val="1A1A1A"/>
+                          </a:solidFill>
+                          <a:latin typeface="Calibri"/>
+                        </a:rPr>
+                        <a:t>Business Cloud (managed), On-Prem, hybrid</a:t>
+                      </a:r>
+                    </a:p>
+                  </a:txBody>
+                  <a:tcPr marL="45720" marR="45720" marT="18288" marB="18288">
+                    <a:solidFill>
+                      <a:srgbClr val="EEF3F8"/>
+                    </a:solidFill>
+                  </a:tcPr>
+                </a:tc>
+                <a:tc>
+                  <a:txBody>
+                    <a:bodyPr/>
+                    <a:lstStyle/>
+                    <a:p>
+                      <a:r>
+                        <a:rPr sz="680" b="0">
+                          <a:solidFill>
+                            <a:srgbClr val="1A1A1A"/>
+                          </a:solidFill>
+                          <a:latin typeface="Calibri"/>
+                        </a:rPr>
+                        <a:t>nicht belegt</a:t>
+                      </a:r>
+                    </a:p>
+                  </a:txBody>
+                  <a:tcPr marL="45720" marR="45720" marT="18288" marB="18288">
+                    <a:solidFill>
+                      <a:srgbClr val="EEF3F8"/>
+                    </a:solidFill>
+                  </a:tcPr>
+                </a:tc>
+                <a:tc>
+                  <a:txBody>
+                    <a:bodyPr/>
+                    <a:lstStyle/>
+                    <a:p>
+                      <a:r>
+                        <a:rPr sz="680" b="0">
+                          <a:solidFill>
+                            <a:srgbClr val="1A1A1A"/>
+                          </a:solidFill>
+                          <a:latin typeface="Calibri"/>
+                        </a:rPr>
+                        <a:t>Nachrücker</a:t>
+                      </a:r>
+                    </a:p>
+                  </a:txBody>
+                  <a:tcPr marL="45720" marR="45720" marT="18288" marB="18288">
+                    <a:solidFill>
+                      <a:srgbClr val="FFEB9C"/>
+                    </a:solidFill>
+                  </a:tcPr>
+                </a:tc>
+                <a:tc>
+                  <a:txBody>
+                    <a:bodyPr/>
+                    <a:lstStyle/>
+                    <a:p>
+                      <a:r>
+                        <a:rPr sz="680" b="0">
+                          <a:solidFill>
+                            <a:srgbClr val="1A1A1A"/>
+                          </a:solidFill>
+                          <a:latin typeface="Calibri"/>
+                        </a:rPr>
+                        <a:t>Fachlich passend, aber keine belegte CZ-Präsenz/-Lokalisierung (K4/K6) – im RFI nachfragen</a:t>
+                      </a:r>
+                    </a:p>
+                  </a:txBody>
+                  <a:tcPr marL="45720" marR="45720" marT="18288" marB="18288">
+                    <a:solidFill>
+                      <a:srgbClr val="EEF3F8"/>
+                    </a:solidFill>
+                  </a:tcPr>
+                </a:tc>
+              </a:tr>
+              <a:tr h="309282">
+                <a:tc>
+                  <a:txBody>
+                    <a:bodyPr/>
+                    <a:lstStyle/>
+                    <a:p>
+                      <a:r>
+                        <a:rPr sz="680" b="0">
+                          <a:solidFill>
+                            <a:srgbClr val="1A1A1A"/>
+                          </a:solidFill>
+                          <a:latin typeface="Calibri"/>
+                        </a:rPr>
+                        <a:t>5</a:t>
+                      </a:r>
+                    </a:p>
+                  </a:txBody>
+                  <a:tcPr marL="45720" marR="45720" marT="18288" marB="18288">
+                    <a:solidFill>
+                      <a:srgbClr val="FFFFFF"/>
+                    </a:solidFill>
+                  </a:tcPr>
+                </a:tc>
+                <a:tc>
+                  <a:txBody>
+                    <a:bodyPr/>
+                    <a:lstStyle/>
+                    <a:p>
+                      <a:r>
+                        <a:rPr sz="680" b="0">
+                          <a:solidFill>
+                            <a:srgbClr val="1A1A1A"/>
+                          </a:solidFill>
+                          <a:latin typeface="Calibri"/>
+                        </a:rPr>
+                        <a:t>abas ERP</a:t>
+                      </a:r>
+                    </a:p>
+                  </a:txBody>
+                  <a:tcPr marL="45720" marR="45720" marT="18288" marB="18288">
+                    <a:solidFill>
+                      <a:srgbClr val="FFFFFF"/>
+                    </a:solidFill>
+                  </a:tcPr>
+                </a:tc>
+                <a:tc>
+                  <a:txBody>
+                    <a:bodyPr/>
+                    <a:lstStyle/>
+                    <a:p>
+                      <a:r>
+                        <a:rPr sz="680" b="0">
+                          <a:solidFill>
+                            <a:srgbClr val="1A1A1A"/>
+                          </a:solidFill>
+                          <a:latin typeface="Calibri"/>
+                        </a:rPr>
+                        <a:t>Cloud, On-Prem</a:t>
+                      </a:r>
+                    </a:p>
+                  </a:txBody>
+                  <a:tcPr marL="45720" marR="45720" marT="18288" marB="18288">
+                    <a:solidFill>
+                      <a:srgbClr val="FFFFFF"/>
+                    </a:solidFill>
+                  </a:tcPr>
+                </a:tc>
+                <a:tc>
+                  <a:txBody>
+                    <a:bodyPr/>
+                    <a:lstStyle/>
+                    <a:p>
+                      <a:r>
+                        <a:rPr sz="680" b="0">
+                          <a:solidFill>
+                            <a:srgbClr val="1A1A1A"/>
+                          </a:solidFill>
+                          <a:latin typeface="Calibri"/>
+                        </a:rPr>
+                        <a:t>nicht belegt</a:t>
+                      </a:r>
+                    </a:p>
+                  </a:txBody>
+                  <a:tcPr marL="45720" marR="45720" marT="18288" marB="18288">
+                    <a:solidFill>
+                      <a:srgbClr val="FFFFFF"/>
+                    </a:solidFill>
+                  </a:tcPr>
+                </a:tc>
+                <a:tc>
+                  <a:txBody>
+                    <a:bodyPr/>
+                    <a:lstStyle/>
+                    <a:p>
+                      <a:r>
+                        <a:rPr sz="680" b="0">
+                          <a:solidFill>
+                            <a:srgbClr val="1A1A1A"/>
+                          </a:solidFill>
+                          <a:latin typeface="Calibri"/>
+                        </a:rPr>
+                        <a:t>Nachrücker</a:t>
+                      </a:r>
+                    </a:p>
+                  </a:txBody>
+                  <a:tcPr marL="45720" marR="45720" marT="18288" marB="18288">
+                    <a:solidFill>
+                      <a:srgbClr val="FFEB9C"/>
+                    </a:solidFill>
+                  </a:tcPr>
+                </a:tc>
+                <a:tc>
+                  <a:txBody>
+                    <a:bodyPr/>
+                    <a:lstStyle/>
+                    <a:p>
+                      <a:r>
+                        <a:rPr sz="680" b="0">
+                          <a:solidFill>
+                            <a:srgbClr val="1A1A1A"/>
+                          </a:solidFill>
+                          <a:latin typeface="Calibri"/>
+                        </a:rPr>
+                        <a:t>Fachlich passend; CZ-Partner nicht belegt (K6)</a:t>
+                      </a:r>
+                    </a:p>
+                  </a:txBody>
+                  <a:tcPr marL="45720" marR="45720" marT="18288" marB="18288">
+                    <a:solidFill>
+                      <a:srgbClr val="FFFFFF"/>
+                    </a:solidFill>
+                  </a:tcPr>
+                </a:tc>
+              </a:tr>
+              <a:tr h="309282">
+                <a:tc>
+                  <a:txBody>
+                    <a:bodyPr/>
+                    <a:lstStyle/>
+                    <a:p>
+                      <a:r>
+                        <a:rPr sz="680" b="0">
+                          <a:solidFill>
+                            <a:srgbClr val="1A1A1A"/>
+                          </a:solidFill>
+                          <a:latin typeface="Calibri"/>
+                        </a:rPr>
+                        <a:t>6</a:t>
+                      </a:r>
+                    </a:p>
+                  </a:txBody>
+                  <a:tcPr marL="45720" marR="45720" marT="18288" marB="18288">
+                    <a:solidFill>
+                      <a:srgbClr val="EEF3F8"/>
+                    </a:solidFill>
+                  </a:tcPr>
+                </a:tc>
+                <a:tc>
+                  <a:txBody>
+                    <a:bodyPr/>
+                    <a:lstStyle/>
+                    <a:p>
+                      <a:r>
+                        <a:rPr sz="680" b="0">
+                          <a:solidFill>
+                            <a:srgbClr val="1A1A1A"/>
+                          </a:solidFill>
+                          <a:latin typeface="Calibri"/>
+                        </a:rPr>
+                        <a:t>S/4HANA Cloud Public Edition</a:t>
+                      </a:r>
+                    </a:p>
+                  </a:txBody>
+                  <a:tcPr marL="45720" marR="45720" marT="18288" marB="18288">
+                    <a:solidFill>
+                      <a:srgbClr val="EEF3F8"/>
+                    </a:solidFill>
+                  </a:tcPr>
+                </a:tc>
+                <a:tc>
+                  <a:txBody>
+                    <a:bodyPr/>
+                    <a:lstStyle/>
+                    <a:p>
+                      <a:r>
+                        <a:rPr sz="680" b="0">
+                          <a:solidFill>
+                            <a:srgbClr val="1A1A1A"/>
+                          </a:solidFill>
+                          <a:latin typeface="Calibri"/>
+                        </a:rPr>
+                        <a:t>nur SaaS</a:t>
+                      </a:r>
+                    </a:p>
+                  </a:txBody>
+                  <a:tcPr marL="45720" marR="45720" marT="18288" marB="18288">
+                    <a:solidFill>
+                      <a:srgbClr val="EEF3F8"/>
+                    </a:solidFill>
+                  </a:tcPr>
+                </a:tc>
+                <a:tc>
+                  <a:txBody>
+                    <a:bodyPr/>
+                    <a:lstStyle/>
+                    <a:p>
+                      <a:r>
+                        <a:rPr sz="680" b="0">
+                          <a:solidFill>
+                            <a:srgbClr val="1A1A1A"/>
+                          </a:solidFill>
+                          <a:latin typeface="Calibri"/>
+                        </a:rPr>
+                        <a:t>hoch (Länderversion CZ)</a:t>
+                      </a:r>
+                    </a:p>
+                  </a:txBody>
+                  <a:tcPr marL="45720" marR="45720" marT="18288" marB="18288">
+                    <a:solidFill>
+                      <a:srgbClr val="EEF3F8"/>
+                    </a:solidFill>
+                  </a:tcPr>
+                </a:tc>
+                <a:tc>
+                  <a:txBody>
+                    <a:bodyPr/>
+                    <a:lstStyle/>
+                    <a:p>
+                      <a:r>
+                        <a:rPr sz="680" b="0">
+                          <a:solidFill>
+                            <a:srgbClr val="1A1A1A"/>
+                          </a:solidFill>
+                          <a:latin typeface="Calibri"/>
+                        </a:rPr>
+                        <a:t>ausgeschieden</a:t>
+                      </a:r>
+                    </a:p>
+                  </a:txBody>
+                  <a:tcPr marL="45720" marR="45720" marT="18288" marB="18288">
+                    <a:solidFill>
+                      <a:srgbClr val="FFC7CE"/>
+                    </a:solidFill>
+                  </a:tcPr>
+                </a:tc>
+                <a:tc>
+                  <a:txBody>
+                    <a:bodyPr/>
+                    <a:lstStyle/>
+                    <a:p>
+                      <a:r>
+                        <a:rPr sz="680" b="0">
+                          <a:solidFill>
+                            <a:srgbClr val="1A1A1A"/>
+                          </a:solidFill>
+                          <a:latin typeface="Calibri"/>
+                        </a:rPr>
+                        <a:t>Nur SaaS ohne Plan B; laut SAP-KBA 3744200 kein Outbound-E-Invoicing CZ in DRC; Akzeptanzrisiko nach SAP-Abbruch 2016 („kein SAP“-Karte)</a:t>
+                      </a:r>
+                    </a:p>
+                  </a:txBody>
+                  <a:tcPr marL="45720" marR="45720" marT="18288" marB="18288">
+                    <a:solidFill>
+                      <a:srgbClr val="EEF3F8"/>
+                    </a:solidFill>
+                  </a:tcPr>
+                </a:tc>
+              </a:tr>
+              <a:tr h="309282">
+                <a:tc>
+                  <a:txBody>
+                    <a:bodyPr/>
+                    <a:lstStyle/>
+                    <a:p>
+                      <a:r>
+                        <a:rPr sz="680" b="0">
+                          <a:solidFill>
+                            <a:srgbClr val="1A1A1A"/>
+                          </a:solidFill>
+                          <a:latin typeface="Calibri"/>
+                        </a:rPr>
+                        <a:t>7</a:t>
+                      </a:r>
+                    </a:p>
+                  </a:txBody>
+                  <a:tcPr marL="45720" marR="45720" marT="18288" marB="18288">
+                    <a:solidFill>
+                      <a:srgbClr val="FFFFFF"/>
+                    </a:solidFill>
+                  </a:tcPr>
+                </a:tc>
+                <a:tc>
+                  <a:txBody>
+                    <a:bodyPr/>
+                    <a:lstStyle/>
+                    <a:p>
+                      <a:r>
+                        <a:rPr sz="680" b="0">
+                          <a:solidFill>
+                            <a:srgbClr val="1A1A1A"/>
+                          </a:solidFill>
+                          <a:latin typeface="Calibri"/>
+                        </a:rPr>
+                        <a:t>S/4HANA Cloud Private Edition (RISE)</a:t>
+                      </a:r>
+                    </a:p>
+                  </a:txBody>
+                  <a:tcPr marL="45720" marR="45720" marT="18288" marB="18288">
+                    <a:solidFill>
+                      <a:srgbClr val="FFFFFF"/>
+                    </a:solidFill>
+                  </a:tcPr>
+                </a:tc>
+                <a:tc>
+                  <a:txBody>
+                    <a:bodyPr/>
+                    <a:lstStyle/>
+                    <a:p>
+                      <a:r>
+                        <a:rPr sz="680" b="0">
+                          <a:solidFill>
+                            <a:srgbClr val="1A1A1A"/>
+                          </a:solidFill>
+                          <a:latin typeface="Calibri"/>
+                        </a:rPr>
+                        <a:t>Private Cloud</a:t>
+                      </a:r>
+                    </a:p>
+                  </a:txBody>
+                  <a:tcPr marL="45720" marR="45720" marT="18288" marB="18288">
+                    <a:solidFill>
+                      <a:srgbClr val="FFFFFF"/>
+                    </a:solidFill>
+                  </a:tcPr>
+                </a:tc>
+                <a:tc>
+                  <a:txBody>
+                    <a:bodyPr/>
+                    <a:lstStyle/>
+                    <a:p>
+                      <a:r>
+                        <a:rPr sz="680" b="0">
+                          <a:solidFill>
+                            <a:srgbClr val="1A1A1A"/>
+                          </a:solidFill>
+                          <a:latin typeface="Calibri"/>
+                        </a:rPr>
+                        <a:t>hoch</a:t>
+                      </a:r>
+                    </a:p>
+                  </a:txBody>
+                  <a:tcPr marL="45720" marR="45720" marT="18288" marB="18288">
+                    <a:solidFill>
+                      <a:srgbClr val="FFFFFF"/>
+                    </a:solidFill>
+                  </a:tcPr>
+                </a:tc>
+                <a:tc>
+                  <a:txBody>
+                    <a:bodyPr/>
+                    <a:lstStyle/>
+                    <a:p>
+                      <a:r>
+                        <a:rPr sz="680" b="0">
+                          <a:solidFill>
+                            <a:srgbClr val="1A1A1A"/>
+                          </a:solidFill>
+                          <a:latin typeface="Calibri"/>
+                        </a:rPr>
+                        <a:t>ausgeschieden</a:t>
+                      </a:r>
+                    </a:p>
+                  </a:txBody>
+                  <a:tcPr marL="45720" marR="45720" marT="18288" marB="18288">
+                    <a:solidFill>
+                      <a:srgbClr val="FFC7CE"/>
+                    </a:solidFill>
+                  </a:tcPr>
+                </a:tc>
+                <a:tc>
+                  <a:txBody>
+                    <a:bodyPr/>
+                    <a:lstStyle/>
+                    <a:p>
+                      <a:r>
+                        <a:rPr sz="680" b="0">
+                          <a:solidFill>
+                            <a:srgbClr val="1A1A1A"/>
+                          </a:solidFill>
+                          <a:latin typeface="Calibri"/>
+                        </a:rPr>
+                        <a:t>Für 420 MA / 230 Nutzer überdimensioniert, TCO deutlich über Rahmen, Komplexität wie 2016</a:t>
+                      </a:r>
+                    </a:p>
+                  </a:txBody>
+                  <a:tcPr marL="45720" marR="45720" marT="18288" marB="18288">
+                    <a:solidFill>
+                      <a:srgbClr val="FFFFFF"/>
+                    </a:solidFill>
+                  </a:tcPr>
+                </a:tc>
+              </a:tr>
+              <a:tr h="309282">
+                <a:tc>
+                  <a:txBody>
+                    <a:bodyPr/>
+                    <a:lstStyle/>
+                    <a:p>
+                      <a:r>
+                        <a:rPr sz="680" b="0">
+                          <a:solidFill>
+                            <a:srgbClr val="1A1A1A"/>
+                          </a:solidFill>
+                          <a:latin typeface="Calibri"/>
+                        </a:rPr>
+                        <a:t>8</a:t>
+                      </a:r>
+                    </a:p>
+                  </a:txBody>
+                  <a:tcPr marL="45720" marR="45720" marT="18288" marB="18288">
+                    <a:solidFill>
+                      <a:srgbClr val="EEF3F8"/>
+                    </a:solidFill>
+                  </a:tcPr>
+                </a:tc>
+                <a:tc>
+                  <a:txBody>
+                    <a:bodyPr/>
+                    <a:lstStyle/>
+                    <a:p>
+                      <a:r>
+                        <a:rPr sz="680" b="0">
+                          <a:solidFill>
+                            <a:srgbClr val="1A1A1A"/>
+                          </a:solidFill>
+                          <a:latin typeface="Calibri"/>
+                        </a:rPr>
+                        <a:t>Dynamics 365 Finance + Supply Chain Mgmt.</a:t>
+                      </a:r>
+                    </a:p>
+                  </a:txBody>
+                  <a:tcPr marL="45720" marR="45720" marT="18288" marB="18288">
+                    <a:solidFill>
+                      <a:srgbClr val="EEF3F8"/>
+                    </a:solidFill>
+                  </a:tcPr>
+                </a:tc>
+                <a:tc>
+                  <a:txBody>
+                    <a:bodyPr/>
+                    <a:lstStyle/>
+                    <a:p>
+                      <a:r>
+                        <a:rPr sz="680" b="0">
+                          <a:solidFill>
+                            <a:srgbClr val="1A1A1A"/>
+                          </a:solidFill>
+                          <a:latin typeface="Calibri"/>
+                        </a:rPr>
+                        <a:t>nur SaaS</a:t>
+                      </a:r>
+                    </a:p>
+                  </a:txBody>
+                  <a:tcPr marL="45720" marR="45720" marT="18288" marB="18288">
+                    <a:solidFill>
+                      <a:srgbClr val="EEF3F8"/>
+                    </a:solidFill>
+                  </a:tcPr>
+                </a:tc>
+                <a:tc>
+                  <a:txBody>
+                    <a:bodyPr/>
+                    <a:lstStyle/>
+                    <a:p>
+                      <a:r>
+                        <a:rPr sz="680" b="0">
+                          <a:solidFill>
+                            <a:srgbClr val="1A1A1A"/>
+                          </a:solidFill>
+                          <a:latin typeface="Calibri"/>
+                        </a:rPr>
+                        <a:t>hoch</a:t>
+                      </a:r>
+                    </a:p>
+                  </a:txBody>
+                  <a:tcPr marL="45720" marR="45720" marT="18288" marB="18288">
+                    <a:solidFill>
+                      <a:srgbClr val="EEF3F8"/>
+                    </a:solidFill>
+                  </a:tcPr>
+                </a:tc>
+                <a:tc>
+                  <a:txBody>
+                    <a:bodyPr/>
+                    <a:lstStyle/>
+                    <a:p>
+                      <a:r>
+                        <a:rPr sz="680" b="0">
+                          <a:solidFill>
+                            <a:srgbClr val="1A1A1A"/>
+                          </a:solidFill>
+                          <a:latin typeface="Calibri"/>
+                        </a:rPr>
+                        <a:t>ausgeschieden</a:t>
+                      </a:r>
+                    </a:p>
+                  </a:txBody>
+                  <a:tcPr marL="45720" marR="45720" marT="18288" marB="18288">
+                    <a:solidFill>
+                      <a:srgbClr val="FFC7CE"/>
+                    </a:solidFill>
+                  </a:tcPr>
+                </a:tc>
+                <a:tc>
+                  <a:txBody>
+                    <a:bodyPr/>
+                    <a:lstStyle/>
+                    <a:p>
+                      <a:r>
+                        <a:rPr sz="680" b="0">
+                          <a:solidFill>
+                            <a:srgbClr val="1A1A1A"/>
+                          </a:solidFill>
+                          <a:latin typeface="Calibri"/>
+                        </a:rPr>
+                        <a:t>Enterprise-Lizenzmodell (höhere Preise, Mindestmengen) und Projektaufwand über Rahmen; nur SaaS</a:t>
+                      </a:r>
+                    </a:p>
+                  </a:txBody>
+                  <a:tcPr marL="45720" marR="45720" marT="18288" marB="18288">
+                    <a:solidFill>
+                      <a:srgbClr val="EEF3F8"/>
+                    </a:solidFill>
+                  </a:tcPr>
+                </a:tc>
+              </a:tr>
+              <a:tr h="309282">
+                <a:tc>
+                  <a:txBody>
+                    <a:bodyPr/>
+                    <a:lstStyle/>
+                    <a:p>
+                      <a:r>
+                        <a:rPr sz="680" b="0">
+                          <a:solidFill>
+                            <a:srgbClr val="1A1A1A"/>
+                          </a:solidFill>
+                          <a:latin typeface="Calibri"/>
+                        </a:rPr>
+                        <a:t>9</a:t>
+                      </a:r>
+                    </a:p>
+                  </a:txBody>
+                  <a:tcPr marL="45720" marR="45720" marT="18288" marB="18288">
+                    <a:solidFill>
+                      <a:srgbClr val="FFFFFF"/>
+                    </a:solidFill>
+                  </a:tcPr>
+                </a:tc>
+                <a:tc>
+                  <a:txBody>
+                    <a:bodyPr/>
+                    <a:lstStyle/>
+                    <a:p>
+                      <a:r>
+                        <a:rPr sz="680" b="0">
+                          <a:solidFill>
+                            <a:srgbClr val="1A1A1A"/>
+                          </a:solidFill>
+                          <a:latin typeface="Calibri"/>
+                        </a:rPr>
+                        <a:t>CloudSuite Industrial (SyteLine)</a:t>
+                      </a:r>
+                    </a:p>
+                  </a:txBody>
+                  <a:tcPr marL="45720" marR="45720" marT="18288" marB="18288">
+                    <a:solidFill>
+                      <a:srgbClr val="FFFFFF"/>
+                    </a:solidFill>
+                  </a:tcPr>
+                </a:tc>
+                <a:tc>
+                  <a:txBody>
+                    <a:bodyPr/>
+                    <a:lstStyle/>
+                    <a:p>
+                      <a:r>
+                        <a:rPr sz="680" b="0">
+                          <a:solidFill>
+                            <a:srgbClr val="1A1A1A"/>
+                          </a:solidFill>
+                          <a:latin typeface="Calibri"/>
+                        </a:rPr>
+                        <a:t>überwiegend SaaS (AWS)</a:t>
+                      </a:r>
+                    </a:p>
+                  </a:txBody>
+                  <a:tcPr marL="45720" marR="45720" marT="18288" marB="18288">
+                    <a:solidFill>
+                      <a:srgbClr val="FFFFFF"/>
+                    </a:solidFill>
+                  </a:tcPr>
+                </a:tc>
+                <a:tc>
+                  <a:txBody>
+                    <a:bodyPr/>
+                    <a:lstStyle/>
+                    <a:p>
+                      <a:r>
+                        <a:rPr sz="680" b="0">
+                          <a:solidFill>
+                            <a:srgbClr val="1A1A1A"/>
+                          </a:solidFill>
+                          <a:latin typeface="Calibri"/>
+                        </a:rPr>
+                        <a:t>gering</a:t>
+                      </a:r>
+                    </a:p>
+                  </a:txBody>
+                  <a:tcPr marL="45720" marR="45720" marT="18288" marB="18288">
+                    <a:solidFill>
+                      <a:srgbClr val="FFFFFF"/>
+                    </a:solidFill>
+                  </a:tcPr>
+                </a:tc>
+                <a:tc>
+                  <a:txBody>
+                    <a:bodyPr/>
+                    <a:lstStyle/>
+                    <a:p>
+                      <a:r>
+                        <a:rPr sz="680" b="0">
+                          <a:solidFill>
+                            <a:srgbClr val="1A1A1A"/>
+                          </a:solidFill>
+                          <a:latin typeface="Calibri"/>
+                        </a:rPr>
+                        <a:t>ausgeschieden</a:t>
+                      </a:r>
+                    </a:p>
+                  </a:txBody>
+                  <a:tcPr marL="45720" marR="45720" marT="18288" marB="18288">
+                    <a:solidFill>
+                      <a:srgbClr val="FFC7CE"/>
+                    </a:solidFill>
+                  </a:tcPr>
+                </a:tc>
+                <a:tc>
+                  <a:txBody>
+                    <a:bodyPr/>
+                    <a:lstStyle/>
+                    <a:p>
+                      <a:r>
+                        <a:rPr sz="680" b="0">
+                          <a:solidFill>
+                            <a:srgbClr val="1A1A1A"/>
+                          </a:solidFill>
+                          <a:latin typeface="Calibri"/>
+                        </a:rPr>
+                        <a:t>Geringe Partnerdichte DE/CZ (K6), US-Cloud ohne Plan B</a:t>
+                      </a:r>
+                    </a:p>
+                  </a:txBody>
+                  <a:tcPr marL="45720" marR="45720" marT="18288" marB="18288">
+                    <a:solidFill>
+                      <a:srgbClr val="FFFFFF"/>
+                    </a:solidFill>
+                  </a:tcPr>
+                </a:tc>
+              </a:tr>
+              <a:tr h="309282">
+                <a:tc>
+                  <a:txBody>
+                    <a:bodyPr/>
+                    <a:lstStyle/>
+                    <a:p>
+                      <a:r>
+                        <a:rPr sz="680" b="0">
+                          <a:solidFill>
+                            <a:srgbClr val="1A1A1A"/>
+                          </a:solidFill>
+                          <a:latin typeface="Calibri"/>
+                        </a:rPr>
+                        <a:t>10</a:t>
+                      </a:r>
+                    </a:p>
+                  </a:txBody>
+                  <a:tcPr marL="45720" marR="45720" marT="18288" marB="18288">
+                    <a:solidFill>
+                      <a:srgbClr val="EEF3F8"/>
+                    </a:solidFill>
+                  </a:tcPr>
+                </a:tc>
+                <a:tc>
+                  <a:txBody>
+                    <a:bodyPr/>
+                    <a:lstStyle/>
+                    <a:p>
+                      <a:r>
+                        <a:rPr sz="680" b="0">
+                          <a:solidFill>
+                            <a:srgbClr val="1A1A1A"/>
+                          </a:solidFill>
+                          <a:latin typeface="Calibri"/>
+                        </a:rPr>
+                        <a:t>Infor LN</a:t>
+                      </a:r>
+                    </a:p>
+                  </a:txBody>
+                  <a:tcPr marL="45720" marR="45720" marT="18288" marB="18288">
+                    <a:solidFill>
+                      <a:srgbClr val="EEF3F8"/>
+                    </a:solidFill>
+                  </a:tcPr>
+                </a:tc>
+                <a:tc>
+                  <a:txBody>
+                    <a:bodyPr/>
+                    <a:lstStyle/>
+                    <a:p>
+                      <a:r>
+                        <a:rPr sz="680" b="0">
+                          <a:solidFill>
+                            <a:srgbClr val="1A1A1A"/>
+                          </a:solidFill>
+                          <a:latin typeface="Calibri"/>
+                        </a:rPr>
+                        <a:t>SaaS / On-Prem</a:t>
+                      </a:r>
+                    </a:p>
+                  </a:txBody>
+                  <a:tcPr marL="45720" marR="45720" marT="18288" marB="18288">
+                    <a:solidFill>
+                      <a:srgbClr val="EEF3F8"/>
+                    </a:solidFill>
+                  </a:tcPr>
+                </a:tc>
+                <a:tc>
+                  <a:txBody>
+                    <a:bodyPr/>
+                    <a:lstStyle/>
+                    <a:p>
+                      <a:r>
+                        <a:rPr sz="680" b="0">
+                          <a:solidFill>
+                            <a:srgbClr val="1A1A1A"/>
+                          </a:solidFill>
+                          <a:latin typeface="Calibri"/>
+                        </a:rPr>
+                        <a:t>gering</a:t>
+                      </a:r>
+                    </a:p>
+                  </a:txBody>
+                  <a:tcPr marL="45720" marR="45720" marT="18288" marB="18288">
+                    <a:solidFill>
+                      <a:srgbClr val="EEF3F8"/>
+                    </a:solidFill>
+                  </a:tcPr>
+                </a:tc>
+                <a:tc>
+                  <a:txBody>
+                    <a:bodyPr/>
+                    <a:lstStyle/>
+                    <a:p>
+                      <a:r>
+                        <a:rPr sz="680" b="0">
+                          <a:solidFill>
+                            <a:srgbClr val="1A1A1A"/>
+                          </a:solidFill>
+                          <a:latin typeface="Calibri"/>
+                        </a:rPr>
+                        <a:t>ausgeschieden</a:t>
+                      </a:r>
+                    </a:p>
+                  </a:txBody>
+                  <a:tcPr marL="45720" marR="45720" marT="18288" marB="18288">
+                    <a:solidFill>
+                      <a:srgbClr val="FFC7CE"/>
+                    </a:solidFill>
+                  </a:tcPr>
+                </a:tc>
+                <a:tc>
+                  <a:txBody>
+                    <a:bodyPr/>
+                    <a:lstStyle/>
+                    <a:p>
+                      <a:r>
+                        <a:rPr sz="680" b="0">
+                          <a:solidFill>
+                            <a:srgbClr val="1A1A1A"/>
+                          </a:solidFill>
+                          <a:latin typeface="Calibri"/>
+                        </a:rPr>
+                        <a:t>Eher Großunternehmen, Partner CZ (K6)</a:t>
+                      </a:r>
+                    </a:p>
+                  </a:txBody>
+                  <a:tcPr marL="45720" marR="45720" marT="18288" marB="18288">
+                    <a:solidFill>
+                      <a:srgbClr val="EEF3F8"/>
+                    </a:solidFill>
+                  </a:tcPr>
+                </a:tc>
+              </a:tr>
+              <a:tr h="309282">
+                <a:tc>
+                  <a:txBody>
+                    <a:bodyPr/>
+                    <a:lstStyle/>
+                    <a:p>
+                      <a:r>
+                        <a:rPr sz="680" b="0">
+                          <a:solidFill>
+                            <a:srgbClr val="1A1A1A"/>
+                          </a:solidFill>
+                          <a:latin typeface="Calibri"/>
+                        </a:rPr>
+                        <a:t>11</a:t>
+                      </a:r>
+                    </a:p>
+                  </a:txBody>
+                  <a:tcPr marL="45720" marR="45720" marT="18288" marB="18288">
+                    <a:solidFill>
+                      <a:srgbClr val="FFFFFF"/>
+                    </a:solidFill>
+                  </a:tcPr>
+                </a:tc>
+                <a:tc>
+                  <a:txBody>
+                    <a:bodyPr/>
+                    <a:lstStyle/>
+                    <a:p>
+                      <a:r>
+                        <a:rPr sz="680" b="0">
+                          <a:solidFill>
+                            <a:srgbClr val="1A1A1A"/>
+                          </a:solidFill>
+                          <a:latin typeface="Calibri"/>
+                        </a:rPr>
+                        <a:t>Kinetic</a:t>
+                      </a:r>
+                    </a:p>
+                  </a:txBody>
+                  <a:tcPr marL="45720" marR="45720" marT="18288" marB="18288">
+                    <a:solidFill>
+                      <a:srgbClr val="FFFFFF"/>
+                    </a:solidFill>
+                  </a:tcPr>
+                </a:tc>
+                <a:tc>
+                  <a:txBody>
+                    <a:bodyPr/>
+                    <a:lstStyle/>
+                    <a:p>
+                      <a:r>
+                        <a:rPr sz="680" b="0">
+                          <a:solidFill>
+                            <a:srgbClr val="1A1A1A"/>
+                          </a:solidFill>
+                          <a:latin typeface="Calibri"/>
+                        </a:rPr>
+                        <a:t>SaaS / On-Prem</a:t>
+                      </a:r>
+                    </a:p>
+                  </a:txBody>
+                  <a:tcPr marL="45720" marR="45720" marT="18288" marB="18288">
+                    <a:solidFill>
+                      <a:srgbClr val="FFFFFF"/>
+                    </a:solidFill>
+                  </a:tcPr>
+                </a:tc>
+                <a:tc>
+                  <a:txBody>
+                    <a:bodyPr/>
+                    <a:lstStyle/>
+                    <a:p>
+                      <a:r>
+                        <a:rPr sz="680" b="0">
+                          <a:solidFill>
+                            <a:srgbClr val="1A1A1A"/>
+                          </a:solidFill>
+                          <a:latin typeface="Calibri"/>
+                        </a:rPr>
+                        <a:t>gering</a:t>
+                      </a:r>
+                    </a:p>
+                  </a:txBody>
+                  <a:tcPr marL="45720" marR="45720" marT="18288" marB="18288">
+                    <a:solidFill>
+                      <a:srgbClr val="FFFFFF"/>
+                    </a:solidFill>
+                  </a:tcPr>
+                </a:tc>
+                <a:tc>
+                  <a:txBody>
+                    <a:bodyPr/>
+                    <a:lstStyle/>
+                    <a:p>
+                      <a:r>
+                        <a:rPr sz="680" b="0">
+                          <a:solidFill>
+                            <a:srgbClr val="1A1A1A"/>
+                          </a:solidFill>
+                          <a:latin typeface="Calibri"/>
+                        </a:rPr>
+                        <a:t>ausgeschieden</a:t>
+                      </a:r>
+                    </a:p>
+                  </a:txBody>
+                  <a:tcPr marL="45720" marR="45720" marT="18288" marB="18288">
+                    <a:solidFill>
+                      <a:srgbClr val="FFC7CE"/>
+                    </a:solidFill>
+                  </a:tcPr>
+                </a:tc>
+                <a:tc>
+                  <a:txBody>
+                    <a:bodyPr/>
+                    <a:lstStyle/>
+                    <a:p>
+                      <a:r>
+                        <a:rPr sz="680" b="0">
+                          <a:solidFill>
+                            <a:srgbClr val="1A1A1A"/>
+                          </a:solidFill>
+                          <a:latin typeface="Calibri"/>
+                        </a:rPr>
+                        <a:t>Schwache DACH-/CZ-Präsenz (K6)</a:t>
+                      </a:r>
+                    </a:p>
+                  </a:txBody>
+                  <a:tcPr marL="45720" marR="45720" marT="18288" marB="18288">
+                    <a:solidFill>
+                      <a:srgbClr val="FFFFFF"/>
+                    </a:solidFill>
+                  </a:tcPr>
+                </a:tc>
+              </a:tr>
+              <a:tr h="309282">
+                <a:tc>
+                  <a:txBody>
+                    <a:bodyPr/>
+                    <a:lstStyle/>
+                    <a:p>
+                      <a:r>
+                        <a:rPr sz="680" b="0">
+                          <a:solidFill>
+                            <a:srgbClr val="1A1A1A"/>
+                          </a:solidFill>
+                          <a:latin typeface="Calibri"/>
+                        </a:rPr>
+                        <a:t>12</a:t>
+                      </a:r>
+                    </a:p>
+                  </a:txBody>
+                  <a:tcPr marL="45720" marR="45720" marT="18288" marB="18288">
+                    <a:solidFill>
+                      <a:srgbClr val="EEF3F8"/>
+                    </a:solidFill>
+                  </a:tcPr>
+                </a:tc>
+                <a:tc>
+                  <a:txBody>
+                    <a:bodyPr/>
+                    <a:lstStyle/>
+                    <a:p>
+                      <a:r>
+                        <a:rPr sz="680" b="0">
+                          <a:solidFill>
+                            <a:srgbClr val="1A1A1A"/>
+                          </a:solidFill>
+                          <a:latin typeface="Calibri"/>
+                        </a:rPr>
+                        <a:t>PSIpenta</a:t>
+                      </a:r>
+                    </a:p>
+                  </a:txBody>
+                  <a:tcPr marL="45720" marR="45720" marT="18288" marB="18288">
+                    <a:solidFill>
+                      <a:srgbClr val="EEF3F8"/>
+                    </a:solidFill>
+                  </a:tcPr>
+                </a:tc>
+                <a:tc>
+                  <a:txBody>
+                    <a:bodyPr/>
+                    <a:lstStyle/>
+                    <a:p>
+                      <a:r>
+                        <a:rPr sz="680" b="0">
+                          <a:solidFill>
+                            <a:srgbClr val="1A1A1A"/>
+                          </a:solidFill>
+                          <a:latin typeface="Calibri"/>
+                        </a:rPr>
+                        <a:t>Cloud / On-Prem</a:t>
+                      </a:r>
+                    </a:p>
+                  </a:txBody>
+                  <a:tcPr marL="45720" marR="45720" marT="18288" marB="18288">
+                    <a:solidFill>
+                      <a:srgbClr val="EEF3F8"/>
+                    </a:solidFill>
+                  </a:tcPr>
+                </a:tc>
+                <a:tc>
+                  <a:txBody>
+                    <a:bodyPr/>
+                    <a:lstStyle/>
+                    <a:p>
+                      <a:r>
+                        <a:rPr sz="680" b="0">
+                          <a:solidFill>
+                            <a:srgbClr val="1A1A1A"/>
+                          </a:solidFill>
+                          <a:latin typeface="Calibri"/>
+                        </a:rPr>
+                        <a:t>gering</a:t>
+                      </a:r>
+                    </a:p>
+                  </a:txBody>
+                  <a:tcPr marL="45720" marR="45720" marT="18288" marB="18288">
+                    <a:solidFill>
+                      <a:srgbClr val="EEF3F8"/>
+                    </a:solidFill>
+                  </a:tcPr>
+                </a:tc>
+                <a:tc>
+                  <a:txBody>
+                    <a:bodyPr/>
+                    <a:lstStyle/>
+                    <a:p>
+                      <a:r>
+                        <a:rPr sz="680" b="0">
+                          <a:solidFill>
+                            <a:srgbClr val="1A1A1A"/>
+                          </a:solidFill>
+                          <a:latin typeface="Calibri"/>
+                        </a:rPr>
+                        <a:t>ausgeschieden</a:t>
+                      </a:r>
+                    </a:p>
+                  </a:txBody>
+                  <a:tcPr marL="45720" marR="45720" marT="18288" marB="18288">
+                    <a:solidFill>
+                      <a:srgbClr val="FFC7CE"/>
+                    </a:solidFill>
+                  </a:tcPr>
+                </a:tc>
+                <a:tc>
+                  <a:txBody>
+                    <a:bodyPr/>
+                    <a:lstStyle/>
+                    <a:p>
+                      <a:r>
+                        <a:rPr sz="680" b="0">
+                          <a:solidFill>
+                            <a:srgbClr val="1A1A1A"/>
+                          </a:solidFill>
+                          <a:latin typeface="Calibri"/>
+                        </a:rPr>
+                        <a:t>CZ-Präsenz nicht belegt (K6), Fokus Einzelfertigung statt Serienvarianten</a:t>
+                      </a:r>
+                    </a:p>
+                  </a:txBody>
+                  <a:tcPr marL="45720" marR="45720" marT="18288" marB="18288">
+                    <a:solidFill>
+                      <a:srgbClr val="EEF3F8"/>
+                    </a:solidFill>
+                  </a:tcPr>
+                </a:tc>
+              </a:tr>
+              <a:tr h="309282">
+                <a:tc>
+                  <a:txBody>
+                    <a:bodyPr/>
+                    <a:lstStyle/>
+                    <a:p>
+                      <a:r>
+                        <a:rPr sz="680" b="0">
+                          <a:solidFill>
+                            <a:srgbClr val="1A1A1A"/>
+                          </a:solidFill>
+                          <a:latin typeface="Calibri"/>
+                        </a:rPr>
+                        <a:t>13</a:t>
+                      </a:r>
+                    </a:p>
+                  </a:txBody>
+                  <a:tcPr marL="45720" marR="45720" marT="18288" marB="18288">
+                    <a:solidFill>
+                      <a:srgbClr val="FFFFFF"/>
+                    </a:solidFill>
+                  </a:tcPr>
+                </a:tc>
+                <a:tc>
+                  <a:txBody>
+                    <a:bodyPr/>
+                    <a:lstStyle/>
+                    <a:p>
+                      <a:r>
+                        <a:rPr sz="680" b="0">
+                          <a:solidFill>
+                            <a:srgbClr val="1A1A1A"/>
+                          </a:solidFill>
+                          <a:latin typeface="Calibri"/>
+                        </a:rPr>
+                        <a:t>ams.erp</a:t>
+                      </a:r>
+                    </a:p>
+                  </a:txBody>
+                  <a:tcPr marL="45720" marR="45720" marT="18288" marB="18288">
+                    <a:solidFill>
+                      <a:srgbClr val="FFFFFF"/>
+                    </a:solidFill>
+                  </a:tcPr>
+                </a:tc>
+                <a:tc>
+                  <a:txBody>
+                    <a:bodyPr/>
+                    <a:lstStyle/>
+                    <a:p>
+                      <a:r>
+                        <a:rPr sz="680" b="0">
+                          <a:solidFill>
+                            <a:srgbClr val="1A1A1A"/>
+                          </a:solidFill>
+                          <a:latin typeface="Calibri"/>
+                        </a:rPr>
+                        <a:t>Cloud / On-Prem</a:t>
+                      </a:r>
+                    </a:p>
+                  </a:txBody>
+                  <a:tcPr marL="45720" marR="45720" marT="18288" marB="18288">
+                    <a:solidFill>
+                      <a:srgbClr val="FFFFFF"/>
+                    </a:solidFill>
+                  </a:tcPr>
+                </a:tc>
+                <a:tc>
+                  <a:txBody>
+                    <a:bodyPr/>
+                    <a:lstStyle/>
+                    <a:p>
+                      <a:r>
+                        <a:rPr sz="680" b="0">
+                          <a:solidFill>
+                            <a:srgbClr val="1A1A1A"/>
+                          </a:solidFill>
+                          <a:latin typeface="Calibri"/>
+                        </a:rPr>
+                        <a:t>nicht belegt</a:t>
+                      </a:r>
+                    </a:p>
+                  </a:txBody>
+                  <a:tcPr marL="45720" marR="45720" marT="18288" marB="18288">
+                    <a:solidFill>
+                      <a:srgbClr val="FFFFFF"/>
+                    </a:solidFill>
+                  </a:tcPr>
+                </a:tc>
+                <a:tc>
+                  <a:txBody>
+                    <a:bodyPr/>
+                    <a:lstStyle/>
+                    <a:p>
+                      <a:r>
+                        <a:rPr sz="680" b="0">
+                          <a:solidFill>
+                            <a:srgbClr val="1A1A1A"/>
+                          </a:solidFill>
+                          <a:latin typeface="Calibri"/>
+                        </a:rPr>
+                        <a:t>ausgeschieden</a:t>
+                      </a:r>
+                    </a:p>
+                  </a:txBody>
+                  <a:tcPr marL="45720" marR="45720" marT="18288" marB="18288">
+                    <a:solidFill>
+                      <a:srgbClr val="FFC7CE"/>
+                    </a:solidFill>
+                  </a:tcPr>
+                </a:tc>
+                <a:tc>
+                  <a:txBody>
+                    <a:bodyPr/>
+                    <a:lstStyle/>
+                    <a:p>
+                      <a:r>
+                        <a:rPr sz="680" b="0">
+                          <a:solidFill>
+                            <a:srgbClr val="1A1A1A"/>
+                          </a:solidFill>
+                          <a:latin typeface="Calibri"/>
+                        </a:rPr>
+                        <a:t>Stärke Losgröße-1-Projektgeschäft, aber 60 % des Umsatzes sind CTO-Serienvarianten; CZ fehlt</a:t>
+                      </a:r>
+                    </a:p>
+                  </a:txBody>
+                  <a:tcPr marL="45720" marR="45720" marT="18288" marB="18288">
+                    <a:solidFill>
+                      <a:srgbClr val="FFFFFF"/>
+                    </a:solidFill>
+                  </a:tcPr>
+                </a:tc>
+              </a:tr>
+              <a:tr h="309282">
+                <a:tc>
+                  <a:txBody>
+                    <a:bodyPr/>
+                    <a:lstStyle/>
+                    <a:p>
+                      <a:r>
+                        <a:rPr sz="680" b="0">
+                          <a:solidFill>
+                            <a:srgbClr val="1A1A1A"/>
+                          </a:solidFill>
+                          <a:latin typeface="Calibri"/>
+                        </a:rPr>
+                        <a:t>14</a:t>
+                      </a:r>
+                    </a:p>
+                  </a:txBody>
+                  <a:tcPr marL="45720" marR="45720" marT="18288" marB="18288">
+                    <a:solidFill>
+                      <a:srgbClr val="EEF3F8"/>
+                    </a:solidFill>
+                  </a:tcPr>
+                </a:tc>
+                <a:tc>
+                  <a:txBody>
+                    <a:bodyPr/>
+                    <a:lstStyle/>
+                    <a:p>
+                      <a:r>
+                        <a:rPr sz="680" b="0">
+                          <a:solidFill>
+                            <a:srgbClr val="1A1A1A"/>
+                          </a:solidFill>
+                          <a:latin typeface="Calibri"/>
+                        </a:rPr>
+                        <a:t>HELIOS Nephrite/Green</a:t>
+                      </a:r>
+                    </a:p>
+                  </a:txBody>
+                  <a:tcPr marL="45720" marR="45720" marT="18288" marB="18288">
+                    <a:solidFill>
+                      <a:srgbClr val="EEF3F8"/>
+                    </a:solidFill>
+                  </a:tcPr>
+                </a:tc>
+                <a:tc>
+                  <a:txBody>
+                    <a:bodyPr/>
+                    <a:lstStyle/>
+                    <a:p>
+                      <a:r>
+                        <a:rPr sz="680" b="0">
+                          <a:solidFill>
+                            <a:srgbClr val="1A1A1A"/>
+                          </a:solidFill>
+                          <a:latin typeface="Calibri"/>
+                        </a:rPr>
+                        <a:t>Cloud / On-Prem</a:t>
+                      </a:r>
+                    </a:p>
+                  </a:txBody>
+                  <a:tcPr marL="45720" marR="45720" marT="18288" marB="18288">
+                    <a:solidFill>
+                      <a:srgbClr val="EEF3F8"/>
+                    </a:solidFill>
+                  </a:tcPr>
+                </a:tc>
+                <a:tc>
+                  <a:txBody>
+                    <a:bodyPr/>
+                    <a:lstStyle/>
+                    <a:p>
+                      <a:r>
+                        <a:rPr sz="680" b="0">
+                          <a:solidFill>
+                            <a:srgbClr val="1A1A1A"/>
+                          </a:solidFill>
+                          <a:latin typeface="Calibri"/>
+                        </a:rPr>
+                        <a:t>sehr hoch</a:t>
+                      </a:r>
+                    </a:p>
+                  </a:txBody>
+                  <a:tcPr marL="45720" marR="45720" marT="18288" marB="18288">
+                    <a:solidFill>
+                      <a:srgbClr val="EEF3F8"/>
+                    </a:solidFill>
+                  </a:tcPr>
+                </a:tc>
+                <a:tc>
+                  <a:txBody>
+                    <a:bodyPr/>
+                    <a:lstStyle/>
+                    <a:p>
+                      <a:r>
+                        <a:rPr sz="680" b="0">
+                          <a:solidFill>
+                            <a:srgbClr val="1A1A1A"/>
+                          </a:solidFill>
+                          <a:latin typeface="Calibri"/>
+                        </a:rPr>
+                        <a:t>ausgeschieden</a:t>
+                      </a:r>
+                    </a:p>
+                  </a:txBody>
+                  <a:tcPr marL="45720" marR="45720" marT="18288" marB="18288">
+                    <a:solidFill>
+                      <a:srgbClr val="FFC7CE"/>
+                    </a:solidFill>
+                  </a:tcPr>
+                </a:tc>
+                <a:tc>
+                  <a:txBody>
+                    <a:bodyPr/>
+                    <a:lstStyle/>
+                    <a:p>
+                      <a:r>
+                        <a:rPr sz="680" b="0">
+                          <a:solidFill>
+                            <a:srgbClr val="1A1A1A"/>
+                          </a:solidFill>
+                          <a:latin typeface="Calibri"/>
+                        </a:rPr>
+                        <a:t>Lokale CZ-Lösung, kein DE-Rollout (K4/K6) – höchstens Pilsen-Insel (widerspricht Ein-System-Ziel)</a:t>
+                      </a:r>
+                    </a:p>
+                  </a:txBody>
+                  <a:tcPr marL="45720" marR="45720" marT="18288" marB="18288">
+                    <a:solidFill>
+                      <a:srgbClr val="EEF3F8"/>
+                    </a:solidFill>
+                  </a:tcPr>
+                </a:tc>
+              </a:tr>
+              <a:tr h="309282">
+                <a:tc>
+                  <a:txBody>
+                    <a:bodyPr/>
+                    <a:lstStyle/>
+                    <a:p>
+                      <a:r>
+                        <a:rPr sz="680" b="0">
+                          <a:solidFill>
+                            <a:srgbClr val="1A1A1A"/>
+                          </a:solidFill>
+                          <a:latin typeface="Calibri"/>
+                        </a:rPr>
+                        <a:t>15</a:t>
+                      </a:r>
+                    </a:p>
+                  </a:txBody>
+                  <a:tcPr marL="45720" marR="45720" marT="18288" marB="18288">
+                    <a:solidFill>
+                      <a:srgbClr val="FFFFFF"/>
+                    </a:solidFill>
+                  </a:tcPr>
+                </a:tc>
+                <a:tc>
+                  <a:txBody>
+                    <a:bodyPr/>
+                    <a:lstStyle/>
+                    <a:p>
+                      <a:r>
+                        <a:rPr sz="680" b="0">
+                          <a:solidFill>
+                            <a:srgbClr val="1A1A1A"/>
+                          </a:solidFill>
+                          <a:latin typeface="Calibri"/>
+                        </a:rPr>
+                        <a:t>Odoo Enterprise</a:t>
+                      </a:r>
+                    </a:p>
+                  </a:txBody>
+                  <a:tcPr marL="45720" marR="45720" marT="18288" marB="18288">
+                    <a:solidFill>
+                      <a:srgbClr val="FFFFFF"/>
+                    </a:solidFill>
+                  </a:tcPr>
+                </a:tc>
+                <a:tc>
+                  <a:txBody>
+                    <a:bodyPr/>
+                    <a:lstStyle/>
+                    <a:p>
+                      <a:r>
+                        <a:rPr sz="680" b="0">
+                          <a:solidFill>
+                            <a:srgbClr val="1A1A1A"/>
+                          </a:solidFill>
+                          <a:latin typeface="Calibri"/>
+                        </a:rPr>
+                        <a:t>SaaS / On-Prem</a:t>
+                      </a:r>
+                    </a:p>
+                  </a:txBody>
+                  <a:tcPr marL="45720" marR="45720" marT="18288" marB="18288">
+                    <a:solidFill>
+                      <a:srgbClr val="FFFFFF"/>
+                    </a:solidFill>
+                  </a:tcPr>
+                </a:tc>
+                <a:tc>
+                  <a:txBody>
+                    <a:bodyPr/>
+                    <a:lstStyle/>
+                    <a:p>
+                      <a:r>
+                        <a:rPr sz="680" b="0">
+                          <a:solidFill>
+                            <a:srgbClr val="1A1A1A"/>
+                          </a:solidFill>
+                          <a:latin typeface="Calibri"/>
+                        </a:rPr>
+                        <a:t>mittel</a:t>
+                      </a:r>
+                    </a:p>
+                  </a:txBody>
+                  <a:tcPr marL="45720" marR="45720" marT="18288" marB="18288">
+                    <a:solidFill>
+                      <a:srgbClr val="FFFFFF"/>
+                    </a:solidFill>
+                  </a:tcPr>
+                </a:tc>
+                <a:tc>
+                  <a:txBody>
+                    <a:bodyPr/>
+                    <a:lstStyle/>
+                    <a:p>
+                      <a:r>
+                        <a:rPr sz="680" b="0">
+                          <a:solidFill>
+                            <a:srgbClr val="1A1A1A"/>
+                          </a:solidFill>
+                          <a:latin typeface="Calibri"/>
+                        </a:rPr>
+                        <a:t>ausgeschieden</a:t>
+                      </a:r>
+                    </a:p>
+                  </a:txBody>
+                  <a:tcPr marL="45720" marR="45720" marT="18288" marB="18288">
+                    <a:solidFill>
+                      <a:srgbClr val="FFC7CE"/>
+                    </a:solidFill>
+                  </a:tcPr>
+                </a:tc>
+                <a:tc>
+                  <a:txBody>
+                    <a:bodyPr/>
+                    <a:lstStyle/>
+                    <a:p>
+                      <a:r>
+                        <a:rPr sz="680" b="0">
+                          <a:solidFill>
+                            <a:srgbClr val="1A1A1A"/>
+                          </a:solidFill>
+                          <a:latin typeface="Calibri"/>
+                        </a:rPr>
+                        <a:t>K1 (Konfigurator) und Branchentiefe nicht belegt; Partnerqualität stark schwankend</a:t>
+                      </a:r>
+                    </a:p>
+                  </a:txBody>
+                  <a:tcPr marL="45720" marR="45720" marT="18288" marB="18288">
+                    <a:solidFill>
+                      <a:srgbClr val="FFFFFF"/>
+                    </a:solidFill>
+                  </a:tcPr>
+                </a:tc>
+              </a:tr>
+              <a:tr h="309288">
+                <a:tc>
+                  <a:txBody>
+                    <a:bodyPr/>
+                    <a:lstStyle/>
+                    <a:p>
+                      <a:r>
+                        <a:rPr sz="680" b="0">
+                          <a:solidFill>
+                            <a:srgbClr val="1A1A1A"/>
+                          </a:solidFill>
+                          <a:latin typeface="Calibri"/>
+                        </a:rPr>
+                        <a:t>16</a:t>
+                      </a:r>
+                    </a:p>
+                  </a:txBody>
+                  <a:tcPr marL="45720" marR="45720" marT="18288" marB="18288">
+                    <a:solidFill>
+                      <a:srgbClr val="EEF3F8"/>
+                    </a:solidFill>
+                  </a:tcPr>
+                </a:tc>
+                <a:tc>
+                  <a:txBody>
+                    <a:bodyPr/>
+                    <a:lstStyle/>
+                    <a:p>
+                      <a:r>
+                        <a:rPr sz="680" b="0">
+                          <a:solidFill>
+                            <a:srgbClr val="1A1A1A"/>
+                          </a:solidFill>
+                          <a:latin typeface="Calibri"/>
+                        </a:rPr>
+                        <a:t>Option 0: Modernisierung KVA-WARE (RPG → Java)</a:t>
+                      </a:r>
+                    </a:p>
+                  </a:txBody>
+                  <a:tcPr marL="45720" marR="45720" marT="18288" marB="18288">
+                    <a:solidFill>
+                      <a:srgbClr val="EEF3F8"/>
+                    </a:solidFill>
+                  </a:tcPr>
+                </a:tc>
+                <a:tc>
+                  <a:txBody>
+                    <a:bodyPr/>
+                    <a:lstStyle/>
+                    <a:p>
+                      <a:r>
+                        <a:rPr sz="680" b="0">
+                          <a:solidFill>
+                            <a:srgbClr val="1A1A1A"/>
+                          </a:solidFill>
+                          <a:latin typeface="Calibri"/>
+                        </a:rPr>
+                        <a:t>On-Prem</a:t>
+                      </a:r>
+                    </a:p>
+                  </a:txBody>
+                  <a:tcPr marL="45720" marR="45720" marT="18288" marB="18288">
+                    <a:solidFill>
+                      <a:srgbClr val="EEF3F8"/>
+                    </a:solidFill>
+                  </a:tcPr>
+                </a:tc>
+                <a:tc>
+                  <a:txBody>
+                    <a:bodyPr/>
+                    <a:lstStyle/>
+                    <a:p>
+                      <a:r>
+                        <a:rPr sz="680" b="0">
+                          <a:solidFill>
+                            <a:srgbClr val="1A1A1A"/>
+                          </a:solidFill>
+                          <a:latin typeface="Calibri"/>
+                        </a:rPr>
+                        <a:t>keine</a:t>
+                      </a:r>
+                    </a:p>
+                  </a:txBody>
+                  <a:tcPr marL="45720" marR="45720" marT="18288" marB="18288">
+                    <a:solidFill>
+                      <a:srgbClr val="EEF3F8"/>
+                    </a:solidFill>
+                  </a:tcPr>
+                </a:tc>
+                <a:tc>
+                  <a:txBody>
+                    <a:bodyPr/>
+                    <a:lstStyle/>
+                    <a:p>
+                      <a:r>
+                        <a:rPr sz="680" b="0">
+                          <a:solidFill>
+                            <a:srgbClr val="1A1A1A"/>
+                          </a:solidFill>
+                          <a:latin typeface="Calibri"/>
+                        </a:rPr>
+                        <a:t>ausgeschieden (K.o.)</a:t>
+                      </a:r>
+                    </a:p>
+                  </a:txBody>
+                  <a:tcPr marL="45720" marR="45720" marT="18288" marB="18288">
+                    <a:solidFill>
+                      <a:srgbClr val="FFC7CE"/>
+                    </a:solidFill>
+                  </a:tcPr>
+                </a:tc>
+                <a:tc>
+                  <a:txBody>
+                    <a:bodyPr/>
+                    <a:lstStyle/>
+                    <a:p>
+                      <a:r>
+                        <a:rPr sz="680" b="0">
+                          <a:solidFill>
+                            <a:srgbClr val="1A1A1A"/>
+                          </a:solidFill>
+                          <a:latin typeface="Calibri"/>
+                        </a:rPr>
+                        <a:t>Erfüllt K1, K3, K4, K5, K6 nicht; Abhängigkeit verlagert sich nur auf Dienstleister; Beiratsbeschluss „zukunftsfähig“ nicht erfüllt</a:t>
+                      </a:r>
+                    </a:p>
+                  </a:txBody>
+                  <a:tcPr marL="45720" marR="45720" marT="18288" marB="18288">
+                    <a:solidFill>
+                      <a:srgbClr val="EEF3F8"/>
+                    </a:solidFill>
+                  </a:tcPr>
+                </a:tc>
+              </a:tr>
+            </a:tbl>
+          </a:graphicData>
+        </a:graphic>
+      </p:graphicFrame>
+    </p:spTree>
+  </p:cSld>
+  <p:clrMapOvr>
+    <a:masterClrMapping/>
+  </p:clrMapOvr>
+</p:sld>
+</file>
+
+<file path=ppt/slides/slide13.xml><?xml version="1.0" encoding="utf-8"?>
+<p:sld xmlns:a="http://schemas.openxmlformats.org/drawingml/2006/main" xmlns:p="http://schemas.openxmlformats.org/presentationml/2006/main" xmlns:r="http://schemas.openxmlformats.org/officeDocument/2006/relationships">
+  <p:cSld>
+    <p:spTree>
+      <p:nvGrpSpPr>
+        <p:cNvPr id="1" name=""/>
+        <p:cNvGrpSpPr/>
+        <p:nvPr/>
+      </p:nvGrpSpPr>
+      <p:grpSpPr/>
+      <p:sp>
+        <p:nvSpPr>
+          <p:cNvPr id="2" name="Rectangle 1"/>
+          <p:cNvSpPr/>
+          <p:nvPr/>
+        </p:nvSpPr>
+        <p:spPr>
+          <a:xfrm>
+            <a:off x="0" y="0"/>
+            <a:ext cx="12191695" cy="73152"/>
+          </a:xfrm>
+          <a:prstGeom prst="rect">
+            <a:avLst/>
+          </a:prstGeom>
+          <a:solidFill>
+            <a:srgbClr val="1F4E79"/>
+          </a:solidFill>
+          <a:ln>
+            <a:noFill/>
+          </a:ln>
+          <a:effectLst/>
+        </p:spPr>
+        <p:txBody>
+          <a:bodyPr rtlCol="0" anchor="ctr"/>
+          <a:lstStyle/>
+          <a:p>
+            <a:pPr algn="ctr"/>
+          </a:p>
+        </p:txBody>
+      </p:sp>
+      <p:sp>
+        <p:nvSpPr>
+          <p:cNvPr id="3" name="Rectangle 2"/>
+          <p:cNvSpPr/>
+          <p:nvPr/>
+        </p:nvSpPr>
+        <p:spPr>
+          <a:xfrm>
+            <a:off x="457200" y="182880"/>
+            <a:ext cx="10972800" cy="274320"/>
+          </a:xfrm>
+          <a:prstGeom prst="rect">
+            <a:avLst/>
+          </a:prstGeom>
+          <a:noFill/>
+          <a:ln>
+            <a:noFill/>
+          </a:ln>
+          <a:effectLst/>
+        </p:spPr>
+        <p:txBody>
+          <a:bodyPr rtlCol="0" anchor="t" wrap="square" lIns="45720" rIns="45720"/>
+          <a:lstStyle/>
+          <a:p>
+            <a:pPr algn="l">
+              <a:spcAft>
+                <a:spcPts val="200"/>
+              </a:spcAft>
+            </a:pPr>
+            <a:r>
+              <a:rPr sz="1100" b="1">
+                <a:solidFill>
+                  <a:srgbClr val="C55A11"/>
+                </a:solidFill>
+                <a:latin typeface="Calibri"/>
+              </a:rPr>
+              <a:t>ANHANG</a:t>
+            </a:r>
+          </a:p>
+        </p:txBody>
+      </p:sp>
+      <p:sp>
+        <p:nvSpPr>
+          <p:cNvPr id="4" name="Rectangle 3"/>
+          <p:cNvSpPr/>
+          <p:nvPr/>
+        </p:nvSpPr>
+        <p:spPr>
+          <a:xfrm>
+            <a:off x="457200" y="411480"/>
+            <a:ext cx="11247120" cy="822960"/>
+          </a:xfrm>
+          <a:prstGeom prst="rect">
+            <a:avLst/>
+          </a:prstGeom>
+          <a:noFill/>
+          <a:ln>
+            <a:noFill/>
+          </a:ln>
+          <a:effectLst/>
+        </p:spPr>
+        <p:txBody>
+          <a:bodyPr rtlCol="0" anchor="t" wrap="square" lIns="45720" rIns="45720"/>
+          <a:lstStyle/>
+          <a:p>
+            <a:pPr algn="l">
+              <a:spcAft>
+                <a:spcPts val="200"/>
+              </a:spcAft>
+            </a:pPr>
+            <a:r>
+              <a:rPr sz="2400" b="1">
+                <a:solidFill>
+                  <a:srgbClr val="1F4E79"/>
+                </a:solidFill>
+                <a:latin typeface="Calibri"/>
+              </a:rPr>
+              <a:t>Anhang A8 – Lizenzmodelle: was wird eigentlich bezahlt?</a:t>
+            </a:r>
+          </a:p>
+        </p:txBody>
+      </p:sp>
+      <p:sp>
+        <p:nvSpPr>
+          <p:cNvPr id="5" name="Rectangle 4"/>
+          <p:cNvSpPr/>
+          <p:nvPr/>
+        </p:nvSpPr>
+        <p:spPr>
+          <a:xfrm>
+            <a:off x="457200" y="6473952"/>
+            <a:ext cx="8229600" cy="274320"/>
+          </a:xfrm>
+          <a:prstGeom prst="rect">
+            <a:avLst/>
+          </a:prstGeom>
+          <a:noFill/>
+          <a:ln>
+            <a:noFill/>
+          </a:ln>
+          <a:effectLst/>
+        </p:spPr>
+        <p:txBody>
+          <a:bodyPr rtlCol="0" anchor="t" wrap="square" lIns="45720" rIns="45720"/>
+          <a:lstStyle/>
+          <a:p>
+            <a:pPr algn="l">
+              <a:spcAft>
+                <a:spcPts val="200"/>
+              </a:spcAft>
+            </a:pPr>
+            <a:r>
+              <a:rPr sz="900" b="0">
+                <a:solidFill>
+                  <a:srgbClr val="595959"/>
+                </a:solidFill>
+                <a:latin typeface="Calibri"/>
+              </a:rPr>
+              <a:t>HTWG Konstanz · ERP-Systeme · Fallstudie KVA · Entscheidungsvorlage ERP 2028</a:t>
+            </a:r>
+          </a:p>
+        </p:txBody>
+      </p:sp>
+      <p:sp>
+        <p:nvSpPr>
+          <p:cNvPr id="6" name="Rectangle 5"/>
+          <p:cNvSpPr/>
+          <p:nvPr/>
+        </p:nvSpPr>
+        <p:spPr>
+          <a:xfrm>
+            <a:off x="11155680" y="6473952"/>
+            <a:ext cx="640080" cy="274320"/>
+          </a:xfrm>
+          <a:prstGeom prst="rect">
+            <a:avLst/>
+          </a:prstGeom>
+          <a:noFill/>
+          <a:ln>
+            <a:noFill/>
+          </a:ln>
+          <a:effectLst/>
+        </p:spPr>
+        <p:txBody>
+          <a:bodyPr rtlCol="0" anchor="t" wrap="square" lIns="45720" rIns="45720"/>
+          <a:lstStyle/>
+          <a:p>
+            <a:pPr algn="r">
+              <a:spcAft>
+                <a:spcPts val="200"/>
+              </a:spcAft>
+            </a:pPr>
+            <a:r>
+              <a:rPr sz="900" b="0">
+                <a:solidFill>
+                  <a:srgbClr val="595959"/>
+                </a:solidFill>
+                <a:latin typeface="Calibri"/>
+              </a:rPr>
+              <a:t>A8</a:t>
+            </a:r>
+          </a:p>
+        </p:txBody>
+      </p:sp>
+      <p:graphicFrame>
+        <p:nvGraphicFramePr>
+          <p:cNvPr id="7" name="Table 6"/>
+          <p:cNvGraphicFramePr>
+            <a:graphicFrameLocks noGrp="1"/>
+          </p:cNvGraphicFramePr>
+          <p:nvPr/>
+        </p:nvGraphicFramePr>
+        <p:xfrm>
+          <a:off x="320040" y="1143000"/>
+          <a:ext cx="11567160" cy="3931920"/>
+        </p:xfrm>
+        <a:graphic>
+          <a:graphicData uri="http://schemas.openxmlformats.org/drawingml/2006/table">
+            <a:tbl>
+              <a:tblPr firstRow="1" bandRow="1">
+                <a:tableStyleId>{5C22544A-7EE6-4342-B048-85BDC9FD1C3A}</a:tableStyleId>
+              </a:tblPr>
+              <a:tblGrid>
+                <a:gridCol w="1463040"/>
+                <a:gridCol w="2103120"/>
+                <a:gridCol w="1920240"/>
+                <a:gridCol w="1463040"/>
+                <a:gridCol w="1097280"/>
+                <a:gridCol w="2240280"/>
+                <a:gridCol w="1280160"/>
+              </a:tblGrid>
+              <a:tr h="561702">
+                <a:tc>
+                  <a:txBody>
+                    <a:bodyPr/>
+                    <a:lstStyle/>
+                    <a:p>
+                      <a:r>
+                        <a:rPr sz="800" b="1">
+                          <a:solidFill>
+                            <a:srgbClr val="FFFFFF"/>
+                          </a:solidFill>
+                          <a:latin typeface="Calibri"/>
+                        </a:rPr>
+                        <a:t>System</a:t>
+                      </a:r>
+                    </a:p>
+                  </a:txBody>
+                  <a:tcPr marL="45720" marR="45720" marT="18288" marB="18288">
+                    <a:solidFill>
+                      <a:srgbClr val="1F4E79"/>
+                    </a:solidFill>
+                  </a:tcPr>
+                </a:tc>
+                <a:tc>
+                  <a:txBody>
+                    <a:bodyPr/>
+                    <a:lstStyle/>
+                    <a:p>
+                      <a:r>
+                        <a:rPr sz="800" b="1">
+                          <a:solidFill>
+                            <a:srgbClr val="FFFFFF"/>
+                          </a:solidFill>
+                          <a:latin typeface="Calibri"/>
+                        </a:rPr>
+                        <a:t>Lizenzmodell</a:t>
+                      </a:r>
+                    </a:p>
+                  </a:txBody>
+                  <a:tcPr marL="45720" marR="45720" marT="18288" marB="18288">
+                    <a:solidFill>
+                      <a:srgbClr val="1F4E79"/>
+                    </a:solidFill>
+                  </a:tcPr>
+                </a:tc>
+                <a:tc>
+                  <a:txBody>
+                    <a:bodyPr/>
+                    <a:lstStyle/>
+                    <a:p>
+                      <a:r>
+                        <a:rPr sz="800" b="1">
+                          <a:solidFill>
+                            <a:srgbClr val="FFFFFF"/>
+                          </a:solidFill>
+                          <a:latin typeface="Calibri"/>
+                        </a:rPr>
+                        <a:t>Nutzerarten</a:t>
+                      </a:r>
+                    </a:p>
+                  </a:txBody>
+                  <a:tcPr marL="45720" marR="45720" marT="18288" marB="18288">
+                    <a:solidFill>
+                      <a:srgbClr val="1F4E79"/>
+                    </a:solidFill>
+                  </a:tcPr>
+                </a:tc>
+                <a:tc>
+                  <a:txBody>
+                    <a:bodyPr/>
+                    <a:lstStyle/>
+                    <a:p>
+                      <a:r>
+                        <a:rPr sz="800" b="1">
+                          <a:solidFill>
+                            <a:srgbClr val="FFFFFF"/>
+                          </a:solidFill>
+                          <a:latin typeface="Calibri"/>
+                        </a:rPr>
+                        <a:t>Shopfloor/Lager</a:t>
+                      </a:r>
+                    </a:p>
+                  </a:txBody>
+                  <a:tcPr marL="45720" marR="45720" marT="18288" marB="18288">
+                    <a:solidFill>
+                      <a:srgbClr val="1F4E79"/>
+                    </a:solidFill>
+                  </a:tcPr>
+                </a:tc>
+                <a:tc>
+                  <a:txBody>
+                    <a:bodyPr/>
+                    <a:lstStyle/>
+                    <a:p>
+                      <a:r>
+                        <a:rPr sz="800" b="1">
+                          <a:solidFill>
+                            <a:srgbClr val="FFFFFF"/>
+                          </a:solidFill>
+                          <a:latin typeface="Calibri"/>
+                        </a:rPr>
+                        <a:t>Kauf möglich?</a:t>
+                      </a:r>
+                    </a:p>
+                  </a:txBody>
+                  <a:tcPr marL="45720" marR="45720" marT="18288" marB="18288">
+                    <a:solidFill>
+                      <a:srgbClr val="1F4E79"/>
+                    </a:solidFill>
+                  </a:tcPr>
+                </a:tc>
+                <a:tc>
+                  <a:txBody>
+                    <a:bodyPr/>
+                    <a:lstStyle/>
+                    <a:p>
+                      <a:r>
+                        <a:rPr sz="800" b="1">
+                          <a:solidFill>
+                            <a:srgbClr val="FFFFFF"/>
+                          </a:solidFill>
+                          <a:latin typeface="Calibri"/>
+                        </a:rPr>
+                        <a:t>Konsequenz für KVA</a:t>
+                      </a:r>
+                    </a:p>
+                  </a:txBody>
+                  <a:tcPr marL="45720" marR="45720" marT="18288" marB="18288">
+                    <a:solidFill>
+                      <a:srgbClr val="1F4E79"/>
+                    </a:solidFill>
+                  </a:tcPr>
+                </a:tc>
+                <a:tc>
+                  <a:txBody>
+                    <a:bodyPr/>
+                    <a:lstStyle/>
+                    <a:p>
+                      <a:r>
+                        <a:rPr sz="800" b="1">
+                          <a:solidFill>
+                            <a:srgbClr val="FFFFFF"/>
+                          </a:solidFill>
+                          <a:latin typeface="Calibri"/>
+                        </a:rPr>
+                        <a:t>Prüfstatus</a:t>
+                      </a:r>
+                    </a:p>
+                  </a:txBody>
+                  <a:tcPr marL="45720" marR="45720" marT="18288" marB="18288">
+                    <a:solidFill>
+                      <a:srgbClr val="1F4E79"/>
+                    </a:solidFill>
+                  </a:tcPr>
+                </a:tc>
+              </a:tr>
+              <a:tr h="561702">
+                <a:tc>
+                  <a:txBody>
+                    <a:bodyPr/>
+                    <a:lstStyle/>
+                    <a:p>
+                      <a:r>
+                        <a:rPr sz="800" b="0">
+                          <a:solidFill>
+                            <a:srgbClr val="1A1A1A"/>
+                          </a:solidFill>
+                          <a:latin typeface="Calibri"/>
+                        </a:rPr>
+                        <a:t>Business Central</a:t>
+                      </a:r>
+                    </a:p>
+                  </a:txBody>
+                  <a:tcPr marL="45720" marR="45720" marT="18288" marB="18288">
+                    <a:solidFill>
+                      <a:srgbClr val="FFFFFF"/>
+                    </a:solidFill>
+                  </a:tcPr>
+                </a:tc>
+                <a:tc>
+                  <a:txBody>
+                    <a:bodyPr/>
+                    <a:lstStyle/>
+                    <a:p>
+                      <a:r>
+                        <a:rPr sz="800" b="0">
+                          <a:solidFill>
+                            <a:srgbClr val="1A1A1A"/>
+                          </a:solidFill>
+                          <a:latin typeface="Calibri"/>
+                        </a:rPr>
+                        <a:t>Subskription pro Named User/Monat (SaaS); On-Prem/Hosting über Partner</a:t>
+                      </a:r>
+                    </a:p>
+                  </a:txBody>
+                  <a:tcPr marL="45720" marR="45720" marT="18288" marB="18288">
+                    <a:solidFill>
+                      <a:srgbClr val="FFFFFF"/>
+                    </a:solidFill>
+                  </a:tcPr>
+                </a:tc>
+                <a:tc>
+                  <a:txBody>
+                    <a:bodyPr/>
+                    <a:lstStyle/>
+                    <a:p>
+                      <a:r>
+                        <a:rPr sz="800" b="0">
+                          <a:solidFill>
+                            <a:srgbClr val="1A1A1A"/>
+                          </a:solidFill>
+                          <a:latin typeface="Calibri"/>
+                        </a:rPr>
+                        <a:t>Essentials, Premium (nötig für Fertigung + Service), Team Member (lesen/leicht ändern)</a:t>
+                      </a:r>
+                    </a:p>
+                  </a:txBody>
+                  <a:tcPr marL="45720" marR="45720" marT="18288" marB="18288">
+                    <a:solidFill>
+                      <a:srgbClr val="FFFFFF"/>
+                    </a:solidFill>
+                  </a:tcPr>
+                </a:tc>
+                <a:tc>
+                  <a:txBody>
+                    <a:bodyPr/>
+                    <a:lstStyle/>
+                    <a:p>
+                      <a:r>
+                        <a:rPr sz="800" b="0">
+                          <a:solidFill>
+                            <a:srgbClr val="1A1A1A"/>
+                          </a:solidFill>
+                          <a:latin typeface="Calibri"/>
+                        </a:rPr>
+                        <a:t>Device-Lizenz für geteilte Geräte (Tablets, Terminals)</a:t>
+                      </a:r>
+                    </a:p>
+                  </a:txBody>
+                  <a:tcPr marL="45720" marR="45720" marT="18288" marB="18288">
+                    <a:solidFill>
+                      <a:srgbClr val="FFFFFF"/>
+                    </a:solidFill>
+                  </a:tcPr>
+                </a:tc>
+                <a:tc>
+                  <a:txBody>
+                    <a:bodyPr/>
+                    <a:lstStyle/>
+                    <a:p>
+                      <a:r>
+                        <a:rPr sz="800" b="0">
+                          <a:solidFill>
+                            <a:srgbClr val="1A1A1A"/>
+                          </a:solidFill>
+                          <a:latin typeface="Calibri"/>
+                        </a:rPr>
+                        <a:t>On-Prem-Lizenzierung über Partner – Konditionen prüfen</a:t>
+                      </a:r>
+                    </a:p>
+                  </a:txBody>
+                  <a:tcPr marL="45720" marR="45720" marT="18288" marB="18288">
+                    <a:solidFill>
+                      <a:srgbClr val="FFFFFF"/>
+                    </a:solidFill>
+                  </a:tcPr>
+                </a:tc>
+                <a:tc>
+                  <a:txBody>
+                    <a:bodyPr/>
+                    <a:lstStyle/>
+                    <a:p>
+                      <a:r>
+                        <a:rPr sz="800" b="0">
+                          <a:solidFill>
+                            <a:srgbClr val="1A1A1A"/>
+                          </a:solidFill>
+                          <a:latin typeface="Calibri"/>
+                        </a:rPr>
+                        <a:t>120 Premium + 110 Team Member + 30 Devices; Branchen-Apps meist zusätzlich pro User/Monat</a:t>
+                      </a:r>
+                    </a:p>
+                  </a:txBody>
+                  <a:tcPr marL="45720" marR="45720" marT="18288" marB="18288">
+                    <a:solidFill>
+                      <a:srgbClr val="FFFFFF"/>
+                    </a:solidFill>
+                  </a:tcPr>
+                </a:tc>
+                <a:tc>
+                  <a:txBody>
+                    <a:bodyPr/>
+                    <a:lstStyle/>
+                    <a:p>
+                      <a:r>
+                        <a:rPr sz="800" b="0">
+                          <a:solidFill>
+                            <a:srgbClr val="1A1A1A"/>
+                          </a:solidFill>
+                          <a:latin typeface="Calibri"/>
+                        </a:rPr>
+                        <a:t>BC-Preise USD verifiziert; Add-ons im RFP</a:t>
+                      </a:r>
+                    </a:p>
+                  </a:txBody>
+                  <a:tcPr marL="45720" marR="45720" marT="18288" marB="18288">
+                    <a:solidFill>
+                      <a:srgbClr val="FFFFFF"/>
+                    </a:solidFill>
+                  </a:tcPr>
+                </a:tc>
+              </a:tr>
+              <a:tr h="561702">
+                <a:tc>
+                  <a:txBody>
+                    <a:bodyPr/>
+                    <a:lstStyle/>
+                    <a:p>
+                      <a:r>
+                        <a:rPr sz="800" b="0">
+                          <a:solidFill>
+                            <a:srgbClr val="1A1A1A"/>
+                          </a:solidFill>
+                          <a:latin typeface="Calibri"/>
+                        </a:rPr>
+                        <a:t>Asseco APplus</a:t>
+                      </a:r>
+                    </a:p>
+                  </a:txBody>
+                  <a:tcPr marL="45720" marR="45720" marT="18288" marB="18288">
+                    <a:solidFill>
+                      <a:srgbClr val="EEF3F8"/>
+                    </a:solidFill>
+                  </a:tcPr>
+                </a:tc>
+                <a:tc>
+                  <a:txBody>
+                    <a:bodyPr/>
+                    <a:lstStyle/>
+                    <a:p>
+                      <a:r>
+                        <a:rPr sz="800" b="0">
+                          <a:solidFill>
+                            <a:srgbClr val="1A1A1A"/>
+                          </a:solidFill>
+                          <a:latin typeface="Calibri"/>
+                        </a:rPr>
+                        <a:t>Kauflizenz + jährliche Wartung ODER Subskription (Cloud/Hybrid)</a:t>
+                      </a:r>
+                    </a:p>
+                  </a:txBody>
+                  <a:tcPr marL="45720" marR="45720" marT="18288" marB="18288">
+                    <a:solidFill>
+                      <a:srgbClr val="EEF3F8"/>
+                    </a:solidFill>
+                  </a:tcPr>
+                </a:tc>
+                <a:tc>
+                  <a:txBody>
+                    <a:bodyPr/>
+                    <a:lstStyle/>
+                    <a:p>
+                      <a:r>
+                        <a:rPr sz="800" b="0">
+                          <a:solidFill>
+                            <a:srgbClr val="1A1A1A"/>
+                          </a:solidFill>
+                          <a:latin typeface="Calibri"/>
+                        </a:rPr>
+                        <a:t>projektspezifisch</a:t>
+                      </a:r>
+                    </a:p>
+                  </a:txBody>
+                  <a:tcPr marL="45720" marR="45720" marT="18288" marB="18288">
+                    <a:solidFill>
+                      <a:srgbClr val="EEF3F8"/>
+                    </a:solidFill>
+                  </a:tcPr>
+                </a:tc>
+                <a:tc>
+                  <a:txBody>
+                    <a:bodyPr/>
+                    <a:lstStyle/>
+                    <a:p>
+                      <a:r>
+                        <a:rPr sz="800" b="0">
+                          <a:solidFill>
+                            <a:srgbClr val="1A1A1A"/>
+                          </a:solidFill>
+                          <a:latin typeface="Calibri"/>
+                        </a:rPr>
+                        <a:t>im RFP abfragen</a:t>
+                      </a:r>
+                    </a:p>
+                  </a:txBody>
+                  <a:tcPr marL="45720" marR="45720" marT="18288" marB="18288">
+                    <a:solidFill>
+                      <a:srgbClr val="EEF3F8"/>
+                    </a:solidFill>
+                  </a:tcPr>
+                </a:tc>
+                <a:tc>
+                  <a:txBody>
+                    <a:bodyPr/>
+                    <a:lstStyle/>
+                    <a:p>
+                      <a:r>
+                        <a:rPr sz="800" b="0">
+                          <a:solidFill>
+                            <a:srgbClr val="1A1A1A"/>
+                          </a:solidFill>
+                          <a:latin typeface="Calibri"/>
+                        </a:rPr>
+                        <a:t>ja</a:t>
+                      </a:r>
+                    </a:p>
+                  </a:txBody>
+                  <a:tcPr marL="45720" marR="45720" marT="18288" marB="18288">
+                    <a:solidFill>
+                      <a:srgbClr val="EEF3F8"/>
+                    </a:solidFill>
+                  </a:tcPr>
+                </a:tc>
+                <a:tc>
+                  <a:txBody>
+                    <a:bodyPr/>
+                    <a:lstStyle/>
+                    <a:p>
+                      <a:r>
+                        <a:rPr sz="800" b="0">
+                          <a:solidFill>
+                            <a:srgbClr val="1A1A1A"/>
+                          </a:solidFill>
+                          <a:latin typeface="Calibri"/>
+                        </a:rPr>
+                        <a:t>Passt zu Vogt („keine Miete auf Lebenszeit“) und zur Cloud-Präferenz der CFO</a:t>
+                      </a:r>
+                    </a:p>
+                  </a:txBody>
+                  <a:tcPr marL="45720" marR="45720" marT="18288" marB="18288">
+                    <a:solidFill>
+                      <a:srgbClr val="EEF3F8"/>
+                    </a:solidFill>
+                  </a:tcPr>
+                </a:tc>
+                <a:tc>
+                  <a:txBody>
+                    <a:bodyPr/>
+                    <a:lstStyle/>
+                    <a:p>
+                      <a:r>
+                        <a:rPr sz="800" b="0">
+                          <a:solidFill>
+                            <a:srgbClr val="1A1A1A"/>
+                          </a:solidFill>
+                          <a:latin typeface="Calibri"/>
+                        </a:rPr>
+                        <a:t>lt. erp-software.org; keine öffentliche Preisliste</a:t>
+                      </a:r>
+                    </a:p>
+                  </a:txBody>
+                  <a:tcPr marL="45720" marR="45720" marT="18288" marB="18288">
+                    <a:solidFill>
+                      <a:srgbClr val="EEF3F8"/>
+                    </a:solidFill>
+                  </a:tcPr>
+                </a:tc>
+              </a:tr>
+              <a:tr h="561702">
+                <a:tc>
+                  <a:txBody>
+                    <a:bodyPr/>
+                    <a:lstStyle/>
+                    <a:p>
+                      <a:r>
+                        <a:rPr sz="800" b="0">
+                          <a:solidFill>
+                            <a:srgbClr val="1A1A1A"/>
+                          </a:solidFill>
+                          <a:latin typeface="Calibri"/>
+                        </a:rPr>
+                        <a:t>IFS Cloud</a:t>
+                      </a:r>
+                    </a:p>
+                  </a:txBody>
+                  <a:tcPr marL="45720" marR="45720" marT="18288" marB="18288">
+                    <a:solidFill>
+                      <a:srgbClr val="FFFFFF"/>
+                    </a:solidFill>
+                  </a:tcPr>
+                </a:tc>
+                <a:tc>
+                  <a:txBody>
+                    <a:bodyPr/>
+                    <a:lstStyle/>
+                    <a:p>
+                      <a:r>
+                        <a:rPr sz="800" b="0">
+                          <a:solidFill>
+                            <a:srgbClr val="1A1A1A"/>
+                          </a:solidFill>
+                          <a:latin typeface="Calibri"/>
+                        </a:rPr>
+                        <a:t>Subskription (auch bei kundenbetriebenem Betrieb)</a:t>
+                      </a:r>
+                    </a:p>
+                  </a:txBody>
+                  <a:tcPr marL="45720" marR="45720" marT="18288" marB="18288">
+                    <a:solidFill>
+                      <a:srgbClr val="FFFFFF"/>
+                    </a:solidFill>
+                  </a:tcPr>
+                </a:tc>
+                <a:tc>
+                  <a:txBody>
+                    <a:bodyPr/>
+                    <a:lstStyle/>
+                    <a:p>
+                      <a:r>
+                        <a:rPr sz="800" b="0">
+                          <a:solidFill>
+                            <a:srgbClr val="1A1A1A"/>
+                          </a:solidFill>
+                          <a:latin typeface="Calibri"/>
+                        </a:rPr>
+                        <a:t>Vollnutzer / eingeschränkte Nutzer</a:t>
+                      </a:r>
+                    </a:p>
+                  </a:txBody>
+                  <a:tcPr marL="45720" marR="45720" marT="18288" marB="18288">
+                    <a:solidFill>
+                      <a:srgbClr val="FFFFFF"/>
+                    </a:solidFill>
+                  </a:tcPr>
+                </a:tc>
+                <a:tc>
+                  <a:txBody>
+                    <a:bodyPr/>
+                    <a:lstStyle/>
+                    <a:p>
+                      <a:r>
+                        <a:rPr sz="800" b="0">
+                          <a:solidFill>
+                            <a:srgbClr val="1A1A1A"/>
+                          </a:solidFill>
+                          <a:latin typeface="Calibri"/>
+                        </a:rPr>
+                        <a:t>im RFP abfragen</a:t>
+                      </a:r>
+                    </a:p>
+                  </a:txBody>
+                  <a:tcPr marL="45720" marR="45720" marT="18288" marB="18288">
+                    <a:solidFill>
+                      <a:srgbClr val="FFFFFF"/>
+                    </a:solidFill>
+                  </a:tcPr>
+                </a:tc>
+                <a:tc>
+                  <a:txBody>
+                    <a:bodyPr/>
+                    <a:lstStyle/>
+                    <a:p>
+                      <a:r>
+                        <a:rPr sz="800" b="0">
+                          <a:solidFill>
+                            <a:srgbClr val="1A1A1A"/>
+                          </a:solidFill>
+                          <a:latin typeface="Calibri"/>
+                        </a:rPr>
+                        <a:t>im RFP klären</a:t>
+                      </a:r>
+                    </a:p>
+                  </a:txBody>
+                  <a:tcPr marL="45720" marR="45720" marT="18288" marB="18288">
+                    <a:solidFill>
+                      <a:srgbClr val="FFFFFF"/>
+                    </a:solidFill>
+                  </a:tcPr>
+                </a:tc>
+                <a:tc>
+                  <a:txBody>
+                    <a:bodyPr/>
+                    <a:lstStyle/>
+                    <a:p>
+                      <a:r>
+                        <a:rPr sz="800" b="0">
+                          <a:solidFill>
+                            <a:srgbClr val="1A1A1A"/>
+                          </a:solidFill>
+                          <a:latin typeface="Calibri"/>
+                        </a:rPr>
+                        <a:t>Höchste laufende Kosten; Mindestabnahmen prüfen</a:t>
+                      </a:r>
+                    </a:p>
+                  </a:txBody>
+                  <a:tcPr marL="45720" marR="45720" marT="18288" marB="18288">
+                    <a:solidFill>
+                      <a:srgbClr val="FFFFFF"/>
+                    </a:solidFill>
+                  </a:tcPr>
+                </a:tc>
+                <a:tc>
+                  <a:txBody>
+                    <a:bodyPr/>
+                    <a:lstStyle/>
+                    <a:p>
+                      <a:r>
+                        <a:rPr sz="800" b="0">
+                          <a:solidFill>
+                            <a:srgbClr val="1A1A1A"/>
+                          </a:solidFill>
+                          <a:latin typeface="Calibri"/>
+                        </a:rPr>
+                        <a:t>ANNAHME – im RFP validieren</a:t>
+                      </a:r>
+                    </a:p>
+                  </a:txBody>
+                  <a:tcPr marL="45720" marR="45720" marT="18288" marB="18288">
+                    <a:solidFill>
+                      <a:srgbClr val="FFFFFF"/>
+                    </a:solidFill>
+                  </a:tcPr>
+                </a:tc>
+              </a:tr>
+              <a:tr h="561702">
+                <a:tc>
+                  <a:txBody>
+                    <a:bodyPr/>
+                    <a:lstStyle/>
+                    <a:p>
+                      <a:r>
+                        <a:rPr sz="800" b="0">
+                          <a:solidFill>
+                            <a:srgbClr val="1A1A1A"/>
+                          </a:solidFill>
+                          <a:latin typeface="Calibri"/>
+                        </a:rPr>
+                        <a:t>SAP S/4HANA Cloud Public</a:t>
+                      </a:r>
+                    </a:p>
+                  </a:txBody>
+                  <a:tcPr marL="45720" marR="45720" marT="18288" marB="18288">
+                    <a:solidFill>
+                      <a:srgbClr val="EEF3F8"/>
+                    </a:solidFill>
+                  </a:tcPr>
+                </a:tc>
+                <a:tc>
+                  <a:txBody>
+                    <a:bodyPr/>
+                    <a:lstStyle/>
+                    <a:p>
+                      <a:r>
+                        <a:rPr sz="800" b="0">
+                          <a:solidFill>
+                            <a:srgbClr val="1A1A1A"/>
+                          </a:solidFill>
+                          <a:latin typeface="Calibri"/>
+                        </a:rPr>
+                        <a:t>Subskription nach Full Usage Equivalents (FUE)</a:t>
+                      </a:r>
+                    </a:p>
+                  </a:txBody>
+                  <a:tcPr marL="45720" marR="45720" marT="18288" marB="18288">
+                    <a:solidFill>
+                      <a:srgbClr val="EEF3F8"/>
+                    </a:solidFill>
+                  </a:tcPr>
+                </a:tc>
+                <a:tc>
+                  <a:txBody>
+                    <a:bodyPr/>
+                    <a:lstStyle/>
+                    <a:p>
+                      <a:r>
+                        <a:rPr sz="800" b="0">
+                          <a:solidFill>
+                            <a:srgbClr val="1A1A1A"/>
+                          </a:solidFill>
+                          <a:latin typeface="Calibri"/>
+                        </a:rPr>
+                        <a:t>FUE-gewichtet nach Nutzungsart</a:t>
+                      </a:r>
+                    </a:p>
+                  </a:txBody>
+                  <a:tcPr marL="45720" marR="45720" marT="18288" marB="18288">
+                    <a:solidFill>
+                      <a:srgbClr val="EEF3F8"/>
+                    </a:solidFill>
+                  </a:tcPr>
+                </a:tc>
+                <a:tc>
+                  <a:txBody>
+                    <a:bodyPr/>
+                    <a:lstStyle/>
+                    <a:p>
+                      <a:r>
+                        <a:rPr sz="800" b="0">
+                          <a:solidFill>
+                            <a:srgbClr val="1A1A1A"/>
+                          </a:solidFill>
+                          <a:latin typeface="Calibri"/>
+                        </a:rPr>
+                        <a:t>über FUE-Gewichtung</a:t>
+                      </a:r>
+                    </a:p>
+                  </a:txBody>
+                  <a:tcPr marL="45720" marR="45720" marT="18288" marB="18288">
+                    <a:solidFill>
+                      <a:srgbClr val="EEF3F8"/>
+                    </a:solidFill>
+                  </a:tcPr>
+                </a:tc>
+                <a:tc>
+                  <a:txBody>
+                    <a:bodyPr/>
+                    <a:lstStyle/>
+                    <a:p>
+                      <a:r>
+                        <a:rPr sz="800" b="0">
+                          <a:solidFill>
+                            <a:srgbClr val="1A1A1A"/>
+                          </a:solidFill>
+                          <a:latin typeface="Calibri"/>
+                        </a:rPr>
+                        <a:t>nein</a:t>
+                      </a:r>
+                    </a:p>
+                  </a:txBody>
+                  <a:tcPr marL="45720" marR="45720" marT="18288" marB="18288">
+                    <a:solidFill>
+                      <a:srgbClr val="EEF3F8"/>
+                    </a:solidFill>
+                  </a:tcPr>
+                </a:tc>
+                <a:tc>
+                  <a:txBody>
+                    <a:bodyPr/>
+                    <a:lstStyle/>
+                    <a:p>
+                      <a:r>
+                        <a:rPr sz="800" b="0">
+                          <a:solidFill>
+                            <a:srgbClr val="1A1A1A"/>
+                          </a:solidFill>
+                          <a:latin typeface="Calibri"/>
+                        </a:rPr>
+                        <a:t>nur SaaS → kein Plan B</a:t>
+                      </a:r>
+                    </a:p>
+                  </a:txBody>
+                  <a:tcPr marL="45720" marR="45720" marT="18288" marB="18288">
+                    <a:solidFill>
+                      <a:srgbClr val="EEF3F8"/>
+                    </a:solidFill>
+                  </a:tcPr>
+                </a:tc>
+                <a:tc>
+                  <a:txBody>
+                    <a:bodyPr/>
+                    <a:lstStyle/>
+                    <a:p>
+                      <a:r>
+                        <a:rPr sz="800" b="0">
+                          <a:solidFill>
+                            <a:srgbClr val="1A1A1A"/>
+                          </a:solidFill>
+                          <a:latin typeface="Calibri"/>
+                        </a:rPr>
+                        <a:t>Einschätzung</a:t>
+                      </a:r>
+                    </a:p>
+                  </a:txBody>
+                  <a:tcPr marL="45720" marR="45720" marT="18288" marB="18288">
+                    <a:solidFill>
+                      <a:srgbClr val="EEF3F8"/>
+                    </a:solidFill>
+                  </a:tcPr>
+                </a:tc>
+              </a:tr>
+              <a:tr h="561702">
+                <a:tc>
+                  <a:txBody>
+                    <a:bodyPr/>
+                    <a:lstStyle/>
+                    <a:p>
+                      <a:r>
+                        <a:rPr sz="800" b="0">
+                          <a:solidFill>
+                            <a:srgbClr val="1A1A1A"/>
+                          </a:solidFill>
+                          <a:latin typeface="Calibri"/>
+                        </a:rPr>
+                        <a:t>D365 Finance + SCM</a:t>
+                      </a:r>
+                    </a:p>
+                  </a:txBody>
+                  <a:tcPr marL="45720" marR="45720" marT="18288" marB="18288">
+                    <a:solidFill>
+                      <a:srgbClr val="FFFFFF"/>
+                    </a:solidFill>
+                  </a:tcPr>
+                </a:tc>
+                <a:tc>
+                  <a:txBody>
+                    <a:bodyPr/>
+                    <a:lstStyle/>
+                    <a:p>
+                      <a:r>
+                        <a:rPr sz="800" b="0">
+                          <a:solidFill>
+                            <a:srgbClr val="1A1A1A"/>
+                          </a:solidFill>
+                          <a:latin typeface="Calibri"/>
+                        </a:rPr>
+                        <a:t>Subskription pro User, Mindestmenge Volllizenzen</a:t>
+                      </a:r>
+                    </a:p>
+                  </a:txBody>
+                  <a:tcPr marL="45720" marR="45720" marT="18288" marB="18288">
+                    <a:solidFill>
+                      <a:srgbClr val="FFFFFF"/>
+                    </a:solidFill>
+                  </a:tcPr>
+                </a:tc>
+                <a:tc>
+                  <a:txBody>
+                    <a:bodyPr/>
+                    <a:lstStyle/>
+                    <a:p>
+                      <a:r>
+                        <a:rPr sz="800" b="0">
+                          <a:solidFill>
+                            <a:srgbClr val="1A1A1A"/>
+                          </a:solidFill>
+                          <a:latin typeface="Calibri"/>
+                        </a:rPr>
+                        <a:t>Full, Activity, Team Member</a:t>
+                      </a:r>
+                    </a:p>
+                  </a:txBody>
+                  <a:tcPr marL="45720" marR="45720" marT="18288" marB="18288">
+                    <a:solidFill>
+                      <a:srgbClr val="FFFFFF"/>
+                    </a:solidFill>
+                  </a:tcPr>
+                </a:tc>
+                <a:tc>
+                  <a:txBody>
+                    <a:bodyPr/>
+                    <a:lstStyle/>
+                    <a:p>
+                      <a:r>
+                        <a:rPr sz="800" b="0">
+                          <a:solidFill>
+                            <a:srgbClr val="1A1A1A"/>
+                          </a:solidFill>
+                          <a:latin typeface="Calibri"/>
+                        </a:rPr>
+                        <a:t>Device-Lizenzen</a:t>
+                      </a:r>
+                    </a:p>
+                  </a:txBody>
+                  <a:tcPr marL="45720" marR="45720" marT="18288" marB="18288">
+                    <a:solidFill>
+                      <a:srgbClr val="FFFFFF"/>
+                    </a:solidFill>
+                  </a:tcPr>
+                </a:tc>
+                <a:tc>
+                  <a:txBody>
+                    <a:bodyPr/>
+                    <a:lstStyle/>
+                    <a:p>
+                      <a:r>
+                        <a:rPr sz="800" b="0">
+                          <a:solidFill>
+                            <a:srgbClr val="1A1A1A"/>
+                          </a:solidFill>
+                          <a:latin typeface="Calibri"/>
+                        </a:rPr>
+                        <a:t>nein</a:t>
+                      </a:r>
+                    </a:p>
+                  </a:txBody>
+                  <a:tcPr marL="45720" marR="45720" marT="18288" marB="18288">
+                    <a:solidFill>
+                      <a:srgbClr val="FFFFFF"/>
+                    </a:solidFill>
+                  </a:tcPr>
+                </a:tc>
+                <a:tc>
+                  <a:txBody>
+                    <a:bodyPr/>
+                    <a:lstStyle/>
+                    <a:p>
+                      <a:r>
+                        <a:rPr sz="800" b="0">
+                          <a:solidFill>
+                            <a:srgbClr val="1A1A1A"/>
+                          </a:solidFill>
+                          <a:latin typeface="Calibri"/>
+                        </a:rPr>
+                        <a:t>Mindestmengen/Preisniveau über Rahmen</a:t>
+                      </a:r>
+                    </a:p>
+                  </a:txBody>
+                  <a:tcPr marL="45720" marR="45720" marT="18288" marB="18288">
+                    <a:solidFill>
+                      <a:srgbClr val="FFFFFF"/>
+                    </a:solidFill>
+                  </a:tcPr>
+                </a:tc>
+                <a:tc>
+                  <a:txBody>
+                    <a:bodyPr/>
+                    <a:lstStyle/>
+                    <a:p>
+                      <a:r>
+                        <a:rPr sz="800" b="0">
+                          <a:solidFill>
+                            <a:srgbClr val="1A1A1A"/>
+                          </a:solidFill>
+                          <a:latin typeface="Calibri"/>
+                        </a:rPr>
+                        <a:t>Einschätzung</a:t>
+                      </a:r>
+                    </a:p>
+                  </a:txBody>
+                  <a:tcPr marL="45720" marR="45720" marT="18288" marB="18288">
+                    <a:solidFill>
+                      <a:srgbClr val="FFFFFF"/>
+                    </a:solidFill>
+                  </a:tcPr>
+                </a:tc>
+              </a:tr>
+              <a:tr h="561708">
+                <a:tc>
+                  <a:txBody>
+                    <a:bodyPr/>
+                    <a:lstStyle/>
+                    <a:p>
+                      <a:r>
+                        <a:rPr sz="800" b="0">
+                          <a:solidFill>
+                            <a:srgbClr val="1A1A1A"/>
+                          </a:solidFill>
+                          <a:latin typeface="Calibri"/>
+                        </a:rPr>
+                        <a:t>Option 0 KVA-WARE</a:t>
+                      </a:r>
+                    </a:p>
+                  </a:txBody>
+                  <a:tcPr marL="45720" marR="45720" marT="18288" marB="18288">
+                    <a:solidFill>
+                      <a:srgbClr val="EEF3F8"/>
+                    </a:solidFill>
+                  </a:tcPr>
+                </a:tc>
+                <a:tc>
+                  <a:txBody>
+                    <a:bodyPr/>
+                    <a:lstStyle/>
+                    <a:p>
+                      <a:r>
+                        <a:rPr sz="800" b="0">
+                          <a:solidFill>
+                            <a:srgbClr val="1A1A1A"/>
+                          </a:solidFill>
+                          <a:latin typeface="Calibri"/>
+                        </a:rPr>
+                        <a:t>keine Lizenz, aber Dienstleistervertrag + IBM-Leasing bis 06/2029</a:t>
+                      </a:r>
+                    </a:p>
+                  </a:txBody>
+                  <a:tcPr marL="45720" marR="45720" marT="18288" marB="18288">
+                    <a:solidFill>
+                      <a:srgbClr val="EEF3F8"/>
+                    </a:solidFill>
+                  </a:tcPr>
+                </a:tc>
+                <a:tc>
+                  <a:txBody>
+                    <a:bodyPr/>
+                    <a:lstStyle/>
+                    <a:p>
+                      <a:r>
+                        <a:rPr sz="800" b="0">
+                          <a:solidFill>
+                            <a:srgbClr val="1A1A1A"/>
+                          </a:solidFill>
+                          <a:latin typeface="Calibri"/>
+                        </a:rPr>
+                        <a:t>–</a:t>
+                      </a:r>
+                    </a:p>
+                  </a:txBody>
+                  <a:tcPr marL="45720" marR="45720" marT="18288" marB="18288">
+                    <a:solidFill>
+                      <a:srgbClr val="EEF3F8"/>
+                    </a:solidFill>
+                  </a:tcPr>
+                </a:tc>
+                <a:tc>
+                  <a:txBody>
+                    <a:bodyPr/>
+                    <a:lstStyle/>
+                    <a:p>
+                      <a:r>
+                        <a:rPr sz="800" b="0">
+                          <a:solidFill>
+                            <a:srgbClr val="1A1A1A"/>
+                          </a:solidFill>
+                          <a:latin typeface="Calibri"/>
+                        </a:rPr>
+                        <a:t>Kaba-BDE (Ersatz nötig)</a:t>
+                      </a:r>
+                    </a:p>
+                  </a:txBody>
+                  <a:tcPr marL="45720" marR="45720" marT="18288" marB="18288">
+                    <a:solidFill>
+                      <a:srgbClr val="EEF3F8"/>
+                    </a:solidFill>
+                  </a:tcPr>
+                </a:tc>
+                <a:tc>
+                  <a:txBody>
+                    <a:bodyPr/>
+                    <a:lstStyle/>
+                    <a:p>
+                      <a:r>
+                        <a:rPr sz="800" b="0">
+                          <a:solidFill>
+                            <a:srgbClr val="1A1A1A"/>
+                          </a:solidFill>
+                          <a:latin typeface="Calibri"/>
+                        </a:rPr>
+                        <a:t>–</a:t>
+                      </a:r>
+                    </a:p>
+                  </a:txBody>
+                  <a:tcPr marL="45720" marR="45720" marT="18288" marB="18288">
+                    <a:solidFill>
+                      <a:srgbClr val="EEF3F8"/>
+                    </a:solidFill>
+                  </a:tcPr>
+                </a:tc>
+                <a:tc>
+                  <a:txBody>
+                    <a:bodyPr/>
+                    <a:lstStyle/>
+                    <a:p>
+                      <a:r>
+                        <a:rPr sz="800" b="0">
+                          <a:solidFill>
+                            <a:srgbClr val="1A1A1A"/>
+                          </a:solidFill>
+                          <a:latin typeface="Calibri"/>
+                        </a:rPr>
+                        <a:t>Kosten verlagern sich auf Dienstleister</a:t>
+                      </a:r>
+                    </a:p>
+                  </a:txBody>
+                  <a:tcPr marL="45720" marR="45720" marT="18288" marB="18288">
+                    <a:solidFill>
+                      <a:srgbClr val="EEF3F8"/>
+                    </a:solidFill>
+                  </a:tcPr>
+                </a:tc>
+                <a:tc>
+                  <a:txBody>
+                    <a:bodyPr/>
+                    <a:lstStyle/>
+                    <a:p>
+                      <a:r>
+                        <a:rPr sz="800" b="0">
+                          <a:solidFill>
+                            <a:srgbClr val="1A1A1A"/>
+                          </a:solidFill>
+                          <a:latin typeface="Calibri"/>
+                        </a:rPr>
+                        <a:t>Fallpaket</a:t>
+                      </a:r>
+                    </a:p>
+                  </a:txBody>
+                  <a:tcPr marL="45720" marR="45720" marT="18288" marB="18288">
+                    <a:solidFill>
+                      <a:srgbClr val="EEF3F8"/>
+                    </a:solidFill>
+                  </a:tcPr>
+                </a:tc>
+              </a:tr>
+            </a:tbl>
+          </a:graphicData>
+        </a:graphic>
+      </p:graphicFrame>
+      <p:sp>
+        <p:nvSpPr>
+          <p:cNvPr id="8" name="Rectangle 7"/>
+          <p:cNvSpPr/>
+          <p:nvPr/>
+        </p:nvSpPr>
+        <p:spPr>
+          <a:xfrm>
+            <a:off x="320040" y="5257800"/>
+            <a:ext cx="11567160" cy="868680"/>
+          </a:xfrm>
+          <a:prstGeom prst="rect">
+            <a:avLst/>
+          </a:prstGeom>
+          <a:solidFill>
+            <a:srgbClr val="EEF3F8"/>
+          </a:solidFill>
+          <a:ln>
+            <a:noFill/>
+          </a:ln>
+          <a:effectLst/>
+        </p:spPr>
+        <p:txBody>
+          <a:bodyPr rtlCol="0" anchor="t" wrap="square" tIns="91440" bIns="91440"/>
+          <a:lstStyle/>
+          <a:p>
+            <a:pPr algn="l">
+              <a:spcAft>
+                <a:spcPts val="200"/>
+              </a:spcAft>
+            </a:pPr>
+            <a:r>
+              <a:rPr sz="1050" b="0">
+                <a:solidFill>
+                  <a:srgbClr val="1A1A1A"/>
+                </a:solidFill>
+                <a:latin typeface="Calibri"/>
+              </a:rPr>
+              <a:t>Warum das wichtig ist: 210 Mitarbeitende melden in der Fertigung zurück. Würde jede Person eine Volllizenz brauchen, stiege die Subskription um ein Vielfaches. Deshalb rechnen wir mit 120 Voll- und 110 Light-Usern plus 30 Geräte-Lizenzen und fragen das Lizenzmodell für alle drei Nutzerarten im RFP verbindlich ab (inkl. Preisbindung über 5 Jahre).</a:t>
+            </a:r>
+          </a:p>
+        </p:txBody>
+      </p:sp>
+    </p:spTree>
+  </p:cSld>
+  <p:clrMapOvr>
+    <a:masterClrMapping/>
+  </p:clrMapOvr>
+</p:sld>
+</file>
+
+<file path=ppt/slides/slide14.xml><?xml version="1.0" encoding="utf-8"?>
+<p:sld xmlns:a="http://schemas.openxmlformats.org/drawingml/2006/main" xmlns:p="http://schemas.openxmlformats.org/presentationml/2006/main" xmlns:r="http://schemas.openxmlformats.org/officeDocument/2006/relationships">
+  <p:cSld>
+    <p:spTree>
+      <p:nvGrpSpPr>
+        <p:cNvPr id="1" name=""/>
+        <p:cNvGrpSpPr/>
+        <p:nvPr/>
+      </p:nvGrpSpPr>
+      <p:grpSpPr/>
+      <p:sp>
+        <p:nvSpPr>
+          <p:cNvPr id="2" name="Rectangle 1"/>
+          <p:cNvSpPr/>
+          <p:nvPr/>
+        </p:nvSpPr>
+        <p:spPr>
+          <a:xfrm>
+            <a:off x="0" y="0"/>
+            <a:ext cx="12191695" cy="73152"/>
+          </a:xfrm>
+          <a:prstGeom prst="rect">
+            <a:avLst/>
+          </a:prstGeom>
+          <a:solidFill>
+            <a:srgbClr val="1F4E79"/>
+          </a:solidFill>
+          <a:ln>
+            <a:noFill/>
+          </a:ln>
+          <a:effectLst/>
+        </p:spPr>
+        <p:txBody>
+          <a:bodyPr rtlCol="0" anchor="ctr"/>
+          <a:lstStyle/>
+          <a:p>
+            <a:pPr algn="ctr"/>
+          </a:p>
+        </p:txBody>
+      </p:sp>
+      <p:sp>
+        <p:nvSpPr>
+          <p:cNvPr id="3" name="Rectangle 2"/>
+          <p:cNvSpPr/>
+          <p:nvPr/>
+        </p:nvSpPr>
+        <p:spPr>
+          <a:xfrm>
+            <a:off x="457200" y="182880"/>
+            <a:ext cx="10972800" cy="274320"/>
+          </a:xfrm>
+          <a:prstGeom prst="rect">
+            <a:avLst/>
+          </a:prstGeom>
+          <a:noFill/>
+          <a:ln>
+            <a:noFill/>
+          </a:ln>
+          <a:effectLst/>
+        </p:spPr>
+        <p:txBody>
+          <a:bodyPr rtlCol="0" anchor="t" wrap="square" lIns="45720" rIns="45720"/>
+          <a:lstStyle/>
+          <a:p>
+            <a:pPr algn="l">
+              <a:spcAft>
+                <a:spcPts val="200"/>
+              </a:spcAft>
+            </a:pPr>
+            <a:r>
+              <a:rPr sz="1100" b="1">
+                <a:solidFill>
+                  <a:srgbClr val="C55A11"/>
+                </a:solidFill>
+                <a:latin typeface="Calibri"/>
+              </a:rPr>
+              <a:t>ANHANG</a:t>
+            </a:r>
+          </a:p>
+        </p:txBody>
+      </p:sp>
+      <p:sp>
+        <p:nvSpPr>
+          <p:cNvPr id="4" name="Rectangle 3"/>
+          <p:cNvSpPr/>
+          <p:nvPr/>
+        </p:nvSpPr>
+        <p:spPr>
+          <a:xfrm>
+            <a:off x="457200" y="411480"/>
+            <a:ext cx="11247120" cy="822960"/>
+          </a:xfrm>
+          <a:prstGeom prst="rect">
+            <a:avLst/>
+          </a:prstGeom>
+          <a:noFill/>
+          <a:ln>
+            <a:noFill/>
+          </a:ln>
+          <a:effectLst/>
+        </p:spPr>
+        <p:txBody>
+          <a:bodyPr rtlCol="0" anchor="t" wrap="square" lIns="45720" rIns="45720"/>
+          <a:lstStyle/>
+          <a:p>
+            <a:pPr algn="l">
+              <a:spcAft>
+                <a:spcPts val="200"/>
+              </a:spcAft>
+            </a:pPr>
+            <a:r>
+              <a:rPr sz="2400" b="1">
+                <a:solidFill>
+                  <a:srgbClr val="1F4E79"/>
+                </a:solidFill>
+                <a:latin typeface="Calibri"/>
+              </a:rPr>
+              <a:t>Anhang A9 – Störinformationen: was wir bewusst nicht verwendet haben</a:t>
+            </a:r>
+          </a:p>
+        </p:txBody>
+      </p:sp>
+      <p:sp>
+        <p:nvSpPr>
+          <p:cNvPr id="5" name="Rectangle 4"/>
+          <p:cNvSpPr/>
+          <p:nvPr/>
+        </p:nvSpPr>
+        <p:spPr>
+          <a:xfrm>
+            <a:off x="457200" y="6473952"/>
+            <a:ext cx="8229600" cy="274320"/>
+          </a:xfrm>
+          <a:prstGeom prst="rect">
+            <a:avLst/>
+          </a:prstGeom>
+          <a:noFill/>
+          <a:ln>
+            <a:noFill/>
+          </a:ln>
+          <a:effectLst/>
+        </p:spPr>
+        <p:txBody>
+          <a:bodyPr rtlCol="0" anchor="t" wrap="square" lIns="45720" rIns="45720"/>
+          <a:lstStyle/>
+          <a:p>
+            <a:pPr algn="l">
+              <a:spcAft>
+                <a:spcPts val="200"/>
+              </a:spcAft>
+            </a:pPr>
+            <a:r>
+              <a:rPr sz="900" b="0">
+                <a:solidFill>
+                  <a:srgbClr val="595959"/>
+                </a:solidFill>
+                <a:latin typeface="Calibri"/>
+              </a:rPr>
+              <a:t>HTWG Konstanz · ERP-Systeme · Fallstudie KVA · Entscheidungsvorlage ERP 2028</a:t>
+            </a:r>
+          </a:p>
+        </p:txBody>
+      </p:sp>
+      <p:sp>
+        <p:nvSpPr>
+          <p:cNvPr id="6" name="Rectangle 5"/>
+          <p:cNvSpPr/>
+          <p:nvPr/>
+        </p:nvSpPr>
+        <p:spPr>
+          <a:xfrm>
+            <a:off x="11155680" y="6473952"/>
+            <a:ext cx="640080" cy="274320"/>
+          </a:xfrm>
+          <a:prstGeom prst="rect">
+            <a:avLst/>
+          </a:prstGeom>
+          <a:noFill/>
+          <a:ln>
+            <a:noFill/>
+          </a:ln>
+          <a:effectLst/>
+        </p:spPr>
+        <p:txBody>
+          <a:bodyPr rtlCol="0" anchor="t" wrap="square" lIns="45720" rIns="45720"/>
+          <a:lstStyle/>
+          <a:p>
+            <a:pPr algn="r">
+              <a:spcAft>
+                <a:spcPts val="200"/>
+              </a:spcAft>
+            </a:pPr>
+            <a:r>
+              <a:rPr sz="900" b="0">
+                <a:solidFill>
+                  <a:srgbClr val="595959"/>
+                </a:solidFill>
+                <a:latin typeface="Calibri"/>
+              </a:rPr>
+              <a:t>A9</a:t>
+            </a:r>
+          </a:p>
+        </p:txBody>
+      </p:sp>
+      <p:graphicFrame>
+        <p:nvGraphicFramePr>
+          <p:cNvPr id="7" name="Table 6"/>
+          <p:cNvGraphicFramePr>
+            <a:graphicFrameLocks noGrp="1"/>
+          </p:cNvGraphicFramePr>
+          <p:nvPr/>
+        </p:nvGraphicFramePr>
+        <p:xfrm>
+          <a:off x="320040" y="1097280"/>
+          <a:ext cx="11567160" cy="5257800"/>
+        </p:xfrm>
+        <a:graphic>
+          <a:graphicData uri="http://schemas.openxmlformats.org/drawingml/2006/table">
+            <a:tbl>
+              <a:tblPr firstRow="1" bandRow="1">
+                <a:tableStyleId>{5C22544A-7EE6-4342-B048-85BDC9FD1C3A}</a:tableStyleId>
+              </a:tblPr>
+              <a:tblGrid>
+                <a:gridCol w="320040"/>
+                <a:gridCol w="3566160"/>
+                <a:gridCol w="1645920"/>
+                <a:gridCol w="3017520"/>
+                <a:gridCol w="3017520"/>
+              </a:tblGrid>
+              <a:tr h="250371">
+                <a:tc>
+                  <a:txBody>
+                    <a:bodyPr/>
+                    <a:lstStyle/>
+                    <a:p>
+                      <a:r>
+                        <a:rPr sz="680" b="1">
+                          <a:solidFill>
+                            <a:srgbClr val="FFFFFF"/>
+                          </a:solidFill>
+                          <a:latin typeface="Calibri"/>
+                        </a:rPr>
+                        <a:t>Nr</a:t>
+                      </a:r>
+                    </a:p>
+                  </a:txBody>
+                  <a:tcPr marL="45720" marR="45720" marT="18288" marB="18288">
+                    <a:solidFill>
+                      <a:srgbClr val="1F4E79"/>
+                    </a:solidFill>
+                  </a:tcPr>
+                </a:tc>
+                <a:tc>
+                  <a:txBody>
+                    <a:bodyPr/>
+                    <a:lstStyle/>
+                    <a:p>
+                      <a:r>
+                        <a:rPr sz="680" b="1">
+                          <a:solidFill>
+                            <a:srgbClr val="FFFFFF"/>
+                          </a:solidFill>
+                          <a:latin typeface="Calibri"/>
+                        </a:rPr>
+                        <a:t>Information</a:t>
+                      </a:r>
+                    </a:p>
+                  </a:txBody>
+                  <a:tcPr marL="45720" marR="45720" marT="18288" marB="18288">
+                    <a:solidFill>
+                      <a:srgbClr val="1F4E79"/>
+                    </a:solidFill>
+                  </a:tcPr>
+                </a:tc>
+                <a:tc>
+                  <a:txBody>
+                    <a:bodyPr/>
+                    <a:lstStyle/>
+                    <a:p>
+                      <a:r>
+                        <a:rPr sz="680" b="1">
+                          <a:solidFill>
+                            <a:srgbClr val="FFFFFF"/>
+                          </a:solidFill>
+                          <a:latin typeface="Calibri"/>
+                        </a:rPr>
+                        <a:t>Fundstelle</a:t>
+                      </a:r>
+                    </a:p>
+                  </a:txBody>
+                  <a:tcPr marL="45720" marR="45720" marT="18288" marB="18288">
+                    <a:solidFill>
+                      <a:srgbClr val="1F4E79"/>
+                    </a:solidFill>
+                  </a:tcPr>
+                </a:tc>
+                <a:tc>
+                  <a:txBody>
+                    <a:bodyPr/>
+                    <a:lstStyle/>
+                    <a:p>
+                      <a:r>
+                        <a:rPr sz="680" b="1">
+                          <a:solidFill>
+                            <a:srgbClr val="FFFFFF"/>
+                          </a:solidFill>
+                          <a:latin typeface="Calibri"/>
+                        </a:rPr>
+                        <a:t>Warum irreführend</a:t>
+                      </a:r>
+                    </a:p>
+                  </a:txBody>
+                  <a:tcPr marL="45720" marR="45720" marT="18288" marB="18288">
+                    <a:solidFill>
+                      <a:srgbClr val="1F4E79"/>
+                    </a:solidFill>
+                  </a:tcPr>
+                </a:tc>
+                <a:tc>
+                  <a:txBody>
+                    <a:bodyPr/>
+                    <a:lstStyle/>
+                    <a:p>
+                      <a:r>
+                        <a:rPr sz="680" b="1">
+                          <a:solidFill>
+                            <a:srgbClr val="FFFFFF"/>
+                          </a:solidFill>
+                          <a:latin typeface="Calibri"/>
+                        </a:rPr>
+                        <a:t>Umgang</a:t>
+                      </a:r>
+                    </a:p>
+                  </a:txBody>
+                  <a:tcPr marL="45720" marR="45720" marT="18288" marB="18288">
+                    <a:solidFill>
+                      <a:srgbClr val="1F4E79"/>
+                    </a:solidFill>
+                  </a:tcPr>
+                </a:tc>
+              </a:tr>
+              <a:tr h="250371">
+                <a:tc>
+                  <a:txBody>
+                    <a:bodyPr/>
+                    <a:lstStyle/>
+                    <a:p>
+                      <a:r>
+                        <a:rPr sz="680" b="0">
+                          <a:solidFill>
+                            <a:srgbClr val="1A1A1A"/>
+                          </a:solidFill>
+                          <a:latin typeface="Calibri"/>
+                        </a:rPr>
+                        <a:t>1</a:t>
+                      </a:r>
+                    </a:p>
+                  </a:txBody>
+                  <a:tcPr marL="45720" marR="45720" marT="18288" marB="18288">
+                    <a:solidFill>
+                      <a:srgbClr val="FFFFFF"/>
+                    </a:solidFill>
+                  </a:tcPr>
+                </a:tc>
+                <a:tc>
+                  <a:txBody>
+                    <a:bodyPr/>
+                    <a:lstStyle/>
+                    <a:p>
+                      <a:r>
+                        <a:rPr sz="680" b="0">
+                          <a:solidFill>
+                            <a:srgbClr val="1A1A1A"/>
+                          </a:solidFill>
+                          <a:latin typeface="Calibri"/>
+                        </a:rPr>
+                        <a:t>Lastenheft 2015: Zahlen (220 MA, 31.000 Artikel, Pilsen 25 MA), Ziel SAP ERP 6.0</a:t>
+                      </a:r>
+                    </a:p>
+                  </a:txBody>
+                  <a:tcPr marL="45720" marR="45720" marT="18288" marB="18288">
+                    <a:solidFill>
+                      <a:srgbClr val="FFFFFF"/>
+                    </a:solidFill>
+                  </a:tcPr>
+                </a:tc>
+                <a:tc>
+                  <a:txBody>
+                    <a:bodyPr/>
+                    <a:lstStyle/>
+                    <a:p>
+                      <a:r>
+                        <a:rPr sz="680" b="0">
+                          <a:solidFill>
+                            <a:srgbClr val="1A1A1A"/>
+                          </a:solidFill>
+                          <a:latin typeface="Calibri"/>
+                        </a:rPr>
+                        <a:t>02_Projekt/Lastenheft v0.7</a:t>
+                      </a:r>
+                    </a:p>
+                  </a:txBody>
+                  <a:tcPr marL="45720" marR="45720" marT="18288" marB="18288">
+                    <a:solidFill>
+                      <a:srgbClr val="FFFFFF"/>
+                    </a:solidFill>
+                  </a:tcPr>
+                </a:tc>
+                <a:tc>
+                  <a:txBody>
+                    <a:bodyPr/>
+                    <a:lstStyle/>
+                    <a:p>
+                      <a:r>
+                        <a:rPr sz="680" b="0">
+                          <a:solidFill>
+                            <a:srgbClr val="1A1A1A"/>
+                          </a:solidFill>
+                          <a:latin typeface="Calibri"/>
+                        </a:rPr>
+                        <a:t>11 Jahre alt, nie freigegeben, Mengengerüst und Organisation überholt</a:t>
+                      </a:r>
+                    </a:p>
+                  </a:txBody>
+                  <a:tcPr marL="45720" marR="45720" marT="18288" marB="18288">
+                    <a:solidFill>
+                      <a:srgbClr val="FFFFFF"/>
+                    </a:solidFill>
+                  </a:tcPr>
+                </a:tc>
+                <a:tc>
+                  <a:txBody>
+                    <a:bodyPr/>
+                    <a:lstStyle/>
+                    <a:p>
+                      <a:r>
+                        <a:rPr sz="680" b="0">
+                          <a:solidFill>
+                            <a:srgbClr val="1A1A1A"/>
+                          </a:solidFill>
+                          <a:latin typeface="Calibri"/>
+                        </a:rPr>
+                        <a:t>Nur fachliche Ideen übernommen (Phantombaugruppen, Meilensteinfaktura); keine Zahl verwendet</a:t>
+                      </a:r>
+                    </a:p>
+                  </a:txBody>
+                  <a:tcPr marL="45720" marR="45720" marT="18288" marB="18288">
+                    <a:solidFill>
+                      <a:srgbClr val="FFFFFF"/>
+                    </a:solidFill>
+                  </a:tcPr>
+                </a:tc>
+              </a:tr>
+              <a:tr h="250371">
+                <a:tc>
+                  <a:txBody>
+                    <a:bodyPr/>
+                    <a:lstStyle/>
+                    <a:p>
+                      <a:r>
+                        <a:rPr sz="680" b="0">
+                          <a:solidFill>
+                            <a:srgbClr val="1A1A1A"/>
+                          </a:solidFill>
+                          <a:latin typeface="Calibri"/>
+                        </a:rPr>
+                        <a:t>2</a:t>
+                      </a:r>
+                    </a:p>
+                  </a:txBody>
+                  <a:tcPr marL="45720" marR="45720" marT="18288" marB="18288">
+                    <a:solidFill>
+                      <a:srgbClr val="EEF3F8"/>
+                    </a:solidFill>
+                  </a:tcPr>
+                </a:tc>
+                <a:tc>
+                  <a:txBody>
+                    <a:bodyPr/>
+                    <a:lstStyle/>
+                    <a:p>
+                      <a:r>
+                        <a:rPr sz="680" b="0">
+                          <a:solidFill>
+                            <a:srgbClr val="1A1A1A"/>
+                          </a:solidFill>
+                          <a:latin typeface="Calibri"/>
+                        </a:rPr>
+                        <a:t>Anekdoten: Freund „mit Business Central super zufrieden“, anderer „schlecht mit S/4 Cloud“</a:t>
+                      </a:r>
+                    </a:p>
+                  </a:txBody>
+                  <a:tcPr marL="45720" marR="45720" marT="18288" marB="18288">
+                    <a:solidFill>
+                      <a:srgbClr val="EEF3F8"/>
+                    </a:solidFill>
+                  </a:tcPr>
+                </a:tc>
+                <a:tc>
+                  <a:txBody>
+                    <a:bodyPr/>
+                    <a:lstStyle/>
+                    <a:p>
+                      <a:r>
+                        <a:rPr sz="680" b="0">
+                          <a:solidFill>
+                            <a:srgbClr val="1A1A1A"/>
+                          </a:solidFill>
+                          <a:latin typeface="Calibri"/>
+                        </a:rPr>
+                        <a:t>Interview 01 Kessler</a:t>
+                      </a:r>
+                    </a:p>
+                  </a:txBody>
+                  <a:tcPr marL="45720" marR="45720" marT="18288" marB="18288">
+                    <a:solidFill>
+                      <a:srgbClr val="EEF3F8"/>
+                    </a:solidFill>
+                  </a:tcPr>
+                </a:tc>
+                <a:tc>
+                  <a:txBody>
+                    <a:bodyPr/>
+                    <a:lstStyle/>
+                    <a:p>
+                      <a:r>
+                        <a:rPr sz="680" b="0">
+                          <a:solidFill>
+                            <a:srgbClr val="1A1A1A"/>
+                          </a:solidFill>
+                          <a:latin typeface="Calibri"/>
+                        </a:rPr>
+                        <a:t>Einzelmeinungen ohne Bezug zu KVA-Prozessen</a:t>
+                      </a:r>
+                    </a:p>
+                  </a:txBody>
+                  <a:tcPr marL="45720" marR="45720" marT="18288" marB="18288">
+                    <a:solidFill>
+                      <a:srgbClr val="EEF3F8"/>
+                    </a:solidFill>
+                  </a:tcPr>
+                </a:tc>
+                <a:tc>
+                  <a:txBody>
+                    <a:bodyPr/>
+                    <a:lstStyle/>
+                    <a:p>
+                      <a:r>
+                        <a:rPr sz="680" b="0">
+                          <a:solidFill>
+                            <a:srgbClr val="1A1A1A"/>
+                          </a:solidFill>
+                          <a:latin typeface="Calibri"/>
+                        </a:rPr>
+                        <a:t>Nicht in Bewertung; stattdessen Referenzbesuche bei vergleichbaren Variantenfertigern</a:t>
+                      </a:r>
+                    </a:p>
+                  </a:txBody>
+                  <a:tcPr marL="45720" marR="45720" marT="18288" marB="18288">
+                    <a:solidFill>
+                      <a:srgbClr val="EEF3F8"/>
+                    </a:solidFill>
+                  </a:tcPr>
+                </a:tc>
+              </a:tr>
+              <a:tr h="250371">
+                <a:tc>
+                  <a:txBody>
+                    <a:bodyPr/>
+                    <a:lstStyle/>
+                    <a:p>
+                      <a:r>
+                        <a:rPr sz="680" b="0">
+                          <a:solidFill>
+                            <a:srgbClr val="1A1A1A"/>
+                          </a:solidFill>
+                          <a:latin typeface="Calibri"/>
+                        </a:rPr>
+                        <a:t>3</a:t>
+                      </a:r>
+                    </a:p>
+                  </a:txBody>
+                  <a:tcPr marL="45720" marR="45720" marT="18288" marB="18288">
+                    <a:solidFill>
+                      <a:srgbClr val="FFFFFF"/>
+                    </a:solidFill>
+                  </a:tcPr>
+                </a:tc>
+                <a:tc>
+                  <a:txBody>
+                    <a:bodyPr/>
+                    <a:lstStyle/>
+                    <a:p>
+                      <a:r>
+                        <a:rPr sz="680" b="0">
+                          <a:solidFill>
+                            <a:srgbClr val="1A1A1A"/>
+                          </a:solidFill>
+                          <a:latin typeface="Calibri"/>
+                        </a:rPr>
+                        <a:t>Anbieter „von der Messe, nur Mittelstand, Süddeutschland“ – Name unbekannt</a:t>
+                      </a:r>
+                    </a:p>
+                  </a:txBody>
+                  <a:tcPr marL="45720" marR="45720" marT="18288" marB="18288">
+                    <a:solidFill>
+                      <a:srgbClr val="FFFFFF"/>
+                    </a:solidFill>
+                  </a:tcPr>
+                </a:tc>
+                <a:tc>
+                  <a:txBody>
+                    <a:bodyPr/>
+                    <a:lstStyle/>
+                    <a:p>
+                      <a:r>
+                        <a:rPr sz="680" b="0">
+                          <a:solidFill>
+                            <a:srgbClr val="1A1A1A"/>
+                          </a:solidFill>
+                          <a:latin typeface="Calibri"/>
+                        </a:rPr>
+                        <a:t>Interview 02 Vogt</a:t>
+                      </a:r>
+                    </a:p>
+                  </a:txBody>
+                  <a:tcPr marL="45720" marR="45720" marT="18288" marB="18288">
+                    <a:solidFill>
+                      <a:srgbClr val="FFFFFF"/>
+                    </a:solidFill>
+                  </a:tcPr>
+                </a:tc>
+                <a:tc>
+                  <a:txBody>
+                    <a:bodyPr/>
+                    <a:lstStyle/>
+                    <a:p>
+                      <a:r>
+                        <a:rPr sz="680" b="0">
+                          <a:solidFill>
+                            <a:srgbClr val="1A1A1A"/>
+                          </a:solidFill>
+                          <a:latin typeface="Calibri"/>
+                        </a:rPr>
+                        <a:t>Nicht prüfbar, persönliche Präferenz (T-011)</a:t>
+                      </a:r>
+                    </a:p>
+                  </a:txBody>
+                  <a:tcPr marL="45720" marR="45720" marT="18288" marB="18288">
+                    <a:solidFill>
+                      <a:srgbClr val="FFFFFF"/>
+                    </a:solidFill>
+                  </a:tcPr>
+                </a:tc>
+                <a:tc>
+                  <a:txBody>
+                    <a:bodyPr/>
+                    <a:lstStyle/>
+                    <a:p>
+                      <a:r>
+                        <a:rPr sz="680" b="0">
+                          <a:solidFill>
+                            <a:srgbClr val="1A1A1A"/>
+                          </a:solidFill>
+                          <a:latin typeface="Calibri"/>
+                        </a:rPr>
+                        <a:t>Gestrichen; regionale Partnernähe steckt im Kriterium Partner DE</a:t>
+                      </a:r>
+                    </a:p>
+                  </a:txBody>
+                  <a:tcPr marL="45720" marR="45720" marT="18288" marB="18288">
+                    <a:solidFill>
+                      <a:srgbClr val="FFFFFF"/>
+                    </a:solidFill>
+                  </a:tcPr>
+                </a:tc>
+              </a:tr>
+              <a:tr h="250371">
+                <a:tc>
+                  <a:txBody>
+                    <a:bodyPr/>
+                    <a:lstStyle/>
+                    <a:p>
+                      <a:r>
+                        <a:rPr sz="680" b="0">
+                          <a:solidFill>
+                            <a:srgbClr val="1A1A1A"/>
+                          </a:solidFill>
+                          <a:latin typeface="Calibri"/>
+                        </a:rPr>
+                        <a:t>4</a:t>
+                      </a:r>
+                    </a:p>
+                  </a:txBody>
+                  <a:tcPr marL="45720" marR="45720" marT="18288" marB="18288">
+                    <a:solidFill>
+                      <a:srgbClr val="EEF3F8"/>
+                    </a:solidFill>
+                  </a:tcPr>
+                </a:tc>
+                <a:tc>
+                  <a:txBody>
+                    <a:bodyPr/>
+                    <a:lstStyle/>
+                    <a:p>
+                      <a:r>
+                        <a:rPr sz="680" b="0">
+                          <a:solidFill>
+                            <a:srgbClr val="1A1A1A"/>
+                          </a:solidFill>
+                          <a:latin typeface="Calibri"/>
+                        </a:rPr>
+                        <a:t>Anonyme Karte „kein SAP“</a:t>
+                      </a:r>
+                    </a:p>
+                  </a:txBody>
+                  <a:tcPr marL="45720" marR="45720" marT="18288" marB="18288">
+                    <a:solidFill>
+                      <a:srgbClr val="EEF3F8"/>
+                    </a:solidFill>
+                  </a:tcPr>
+                </a:tc>
+                <a:tc>
+                  <a:txBody>
+                    <a:bodyPr/>
+                    <a:lstStyle/>
+                    <a:p>
+                      <a:r>
+                        <a:rPr sz="680" b="0">
+                          <a:solidFill>
+                            <a:srgbClr val="1A1A1A"/>
+                          </a:solidFill>
+                          <a:latin typeface="Calibri"/>
+                        </a:rPr>
+                        <a:t>Flipchart 2</a:t>
+                      </a:r>
+                    </a:p>
+                  </a:txBody>
+                  <a:tcPr marL="45720" marR="45720" marT="18288" marB="18288">
+                    <a:solidFill>
+                      <a:srgbClr val="EEF3F8"/>
+                    </a:solidFill>
+                  </a:tcPr>
+                </a:tc>
+                <a:tc>
+                  <a:txBody>
+                    <a:bodyPr/>
+                    <a:lstStyle/>
+                    <a:p>
+                      <a:r>
+                        <a:rPr sz="680" b="0">
+                          <a:solidFill>
+                            <a:srgbClr val="1A1A1A"/>
+                          </a:solidFill>
+                          <a:latin typeface="Calibri"/>
+                        </a:rPr>
+                        <a:t>Stimmungsbild, keine Anforderung</a:t>
+                      </a:r>
+                    </a:p>
+                  </a:txBody>
+                  <a:tcPr marL="45720" marR="45720" marT="18288" marB="18288">
+                    <a:solidFill>
+                      <a:srgbClr val="EEF3F8"/>
+                    </a:solidFill>
+                  </a:tcPr>
+                </a:tc>
+                <a:tc>
+                  <a:txBody>
+                    <a:bodyPr/>
+                    <a:lstStyle/>
+                    <a:p>
+                      <a:r>
+                        <a:rPr sz="680" b="0">
+                          <a:solidFill>
+                            <a:srgbClr val="1A1A1A"/>
+                          </a:solidFill>
+                          <a:latin typeface="Calibri"/>
+                        </a:rPr>
+                        <a:t>Nur als Akzeptanzrisiko gewertet, nicht als Ausschlussgrund allein</a:t>
+                      </a:r>
+                    </a:p>
+                  </a:txBody>
+                  <a:tcPr marL="45720" marR="45720" marT="18288" marB="18288">
+                    <a:solidFill>
+                      <a:srgbClr val="EEF3F8"/>
+                    </a:solidFill>
+                  </a:tcPr>
+                </a:tc>
+              </a:tr>
+              <a:tr h="250371">
+                <a:tc>
+                  <a:txBody>
+                    <a:bodyPr/>
+                    <a:lstStyle/>
+                    <a:p>
+                      <a:r>
+                        <a:rPr sz="680" b="0">
+                          <a:solidFill>
+                            <a:srgbClr val="1A1A1A"/>
+                          </a:solidFill>
+                          <a:latin typeface="Calibri"/>
+                        </a:rPr>
+                        <a:t>5</a:t>
+                      </a:r>
+                    </a:p>
+                  </a:txBody>
+                  <a:tcPr marL="45720" marR="45720" marT="18288" marB="18288">
+                    <a:solidFill>
+                      <a:srgbClr val="FFFFFF"/>
+                    </a:solidFill>
+                  </a:tcPr>
+                </a:tc>
+                <a:tc>
+                  <a:txBody>
+                    <a:bodyPr/>
+                    <a:lstStyle/>
+                    <a:p>
+                      <a:r>
+                        <a:rPr sz="680" b="0">
+                          <a:solidFill>
+                            <a:srgbClr val="1A1A1A"/>
+                          </a:solidFill>
+                          <a:latin typeface="Calibri"/>
+                        </a:rPr>
+                        <a:t>„ERP mit integrierter KI, die Anfragen automatisch beantwortet“</a:t>
+                      </a:r>
+                    </a:p>
+                  </a:txBody>
+                  <a:tcPr marL="45720" marR="45720" marT="18288" marB="18288">
+                    <a:solidFill>
+                      <a:srgbClr val="FFFFFF"/>
+                    </a:solidFill>
+                  </a:tcPr>
+                </a:tc>
+                <a:tc>
+                  <a:txBody>
+                    <a:bodyPr/>
+                    <a:lstStyle/>
+                    <a:p>
+                      <a:r>
+                        <a:rPr sz="680" b="0">
+                          <a:solidFill>
+                            <a:srgbClr val="1A1A1A"/>
+                          </a:solidFill>
+                          <a:latin typeface="Calibri"/>
+                        </a:rPr>
+                        <a:t>Interview 01 / A-007</a:t>
+                      </a:r>
+                    </a:p>
+                  </a:txBody>
+                  <a:tcPr marL="45720" marR="45720" marT="18288" marB="18288">
+                    <a:solidFill>
+                      <a:srgbClr val="FFFFFF"/>
+                    </a:solidFill>
+                  </a:tcPr>
+                </a:tc>
+                <a:tc>
+                  <a:txBody>
+                    <a:bodyPr/>
+                    <a:lstStyle/>
+                    <a:p>
+                      <a:r>
+                        <a:rPr sz="680" b="0">
+                          <a:solidFill>
+                            <a:srgbClr val="1A1A1A"/>
+                          </a:solidFill>
+                          <a:latin typeface="Calibri"/>
+                        </a:rPr>
+                        <a:t>Unkonkret, löst kein Kernproblem</a:t>
+                      </a:r>
+                    </a:p>
+                  </a:txBody>
+                  <a:tcPr marL="45720" marR="45720" marT="18288" marB="18288">
+                    <a:solidFill>
+                      <a:srgbClr val="FFFFFF"/>
+                    </a:solidFill>
+                  </a:tcPr>
+                </a:tc>
+                <a:tc>
+                  <a:txBody>
+                    <a:bodyPr/>
+                    <a:lstStyle/>
+                    <a:p>
+                      <a:r>
+                        <a:rPr sz="680" b="0">
+                          <a:solidFill>
+                            <a:srgbClr val="1A1A1A"/>
+                          </a:solidFill>
+                          <a:latin typeface="Calibri"/>
+                        </a:rPr>
+                        <a:t>Kann; nur als Roadmap-Aspekt</a:t>
+                      </a:r>
+                    </a:p>
+                  </a:txBody>
+                  <a:tcPr marL="45720" marR="45720" marT="18288" marB="18288">
+                    <a:solidFill>
+                      <a:srgbClr val="FFFFFF"/>
+                    </a:solidFill>
+                  </a:tcPr>
+                </a:tc>
+              </a:tr>
+              <a:tr h="250371">
+                <a:tc>
+                  <a:txBody>
+                    <a:bodyPr/>
+                    <a:lstStyle/>
+                    <a:p>
+                      <a:r>
+                        <a:rPr sz="680" b="0">
+                          <a:solidFill>
+                            <a:srgbClr val="1A1A1A"/>
+                          </a:solidFill>
+                          <a:latin typeface="Calibri"/>
+                        </a:rPr>
+                        <a:t>6</a:t>
+                      </a:r>
+                    </a:p>
+                  </a:txBody>
+                  <a:tcPr marL="45720" marR="45720" marT="18288" marB="18288">
+                    <a:solidFill>
+                      <a:srgbClr val="EEF3F8"/>
+                    </a:solidFill>
+                  </a:tcPr>
+                </a:tc>
+                <a:tc>
+                  <a:txBody>
+                    <a:bodyPr/>
+                    <a:lstStyle/>
+                    <a:p>
+                      <a:r>
+                        <a:rPr sz="680" b="0">
+                          <a:solidFill>
+                            <a:srgbClr val="1A1A1A"/>
+                          </a:solidFill>
+                          <a:latin typeface="Calibri"/>
+                        </a:rPr>
+                        <a:t>Konfigurator offline auf dem iPad mit 3D-Modell beim Kunden</a:t>
+                      </a:r>
+                    </a:p>
+                  </a:txBody>
+                  <a:tcPr marL="45720" marR="45720" marT="18288" marB="18288">
+                    <a:solidFill>
+                      <a:srgbClr val="EEF3F8"/>
+                    </a:solidFill>
+                  </a:tcPr>
+                </a:tc>
+                <a:tc>
+                  <a:txBody>
+                    <a:bodyPr/>
+                    <a:lstStyle/>
+                    <a:p>
+                      <a:r>
+                        <a:rPr sz="680" b="0">
+                          <a:solidFill>
+                            <a:srgbClr val="1A1A1A"/>
+                          </a:solidFill>
+                          <a:latin typeface="Calibri"/>
+                        </a:rPr>
+                        <a:t>Interview 05 Moser / V-002</a:t>
+                      </a:r>
+                    </a:p>
+                  </a:txBody>
+                  <a:tcPr marL="45720" marR="45720" marT="18288" marB="18288">
+                    <a:solidFill>
+                      <a:srgbClr val="EEF3F8"/>
+                    </a:solidFill>
+                  </a:tcPr>
+                </a:tc>
+                <a:tc>
+                  <a:txBody>
+                    <a:bodyPr/>
+                    <a:lstStyle/>
+                    <a:p>
+                      <a:r>
+                        <a:rPr sz="680" b="0">
+                          <a:solidFill>
+                            <a:srgbClr val="1A1A1A"/>
+                          </a:solidFill>
+                          <a:latin typeface="Calibri"/>
+                        </a:rPr>
+                        <a:t>Lösungswunsch; 3D liegt im CAD; erhöht K.o.-Risiko</a:t>
+                      </a:r>
+                    </a:p>
+                  </a:txBody>
+                  <a:tcPr marL="45720" marR="45720" marT="18288" marB="18288">
+                    <a:solidFill>
+                      <a:srgbClr val="EEF3F8"/>
+                    </a:solidFill>
+                  </a:tcPr>
+                </a:tc>
+                <a:tc>
+                  <a:txBody>
+                    <a:bodyPr/>
+                    <a:lstStyle/>
+                    <a:p>
+                      <a:r>
+                        <a:rPr sz="680" b="0">
+                          <a:solidFill>
+                            <a:srgbClr val="1A1A1A"/>
+                          </a:solidFill>
+                          <a:latin typeface="Calibri"/>
+                        </a:rPr>
+                        <a:t>Phase 2; Muss ist nur ein integriertes Regelwerk</a:t>
+                      </a:r>
+                    </a:p>
+                  </a:txBody>
+                  <a:tcPr marL="45720" marR="45720" marT="18288" marB="18288">
+                    <a:solidFill>
+                      <a:srgbClr val="EEF3F8"/>
+                    </a:solidFill>
+                  </a:tcPr>
+                </a:tc>
+              </a:tr>
+              <a:tr h="250371">
+                <a:tc>
+                  <a:txBody>
+                    <a:bodyPr/>
+                    <a:lstStyle/>
+                    <a:p>
+                      <a:r>
+                        <a:rPr sz="680" b="0">
+                          <a:solidFill>
+                            <a:srgbClr val="1A1A1A"/>
+                          </a:solidFill>
+                          <a:latin typeface="Calibri"/>
+                        </a:rPr>
+                        <a:t>7</a:t>
+                      </a:r>
+                    </a:p>
+                  </a:txBody>
+                  <a:tcPr marL="45720" marR="45720" marT="18288" marB="18288">
+                    <a:solidFill>
+                      <a:srgbClr val="FFFFFF"/>
+                    </a:solidFill>
+                  </a:tcPr>
+                </a:tc>
+                <a:tc>
+                  <a:txBody>
+                    <a:bodyPr/>
+                    <a:lstStyle/>
+                    <a:p>
+                      <a:r>
+                        <a:rPr sz="680" b="0">
+                          <a:solidFill>
+                            <a:srgbClr val="1A1A1A"/>
+                          </a:solidFill>
+                          <a:latin typeface="Calibri"/>
+                        </a:rPr>
+                        <a:t>Oberfläche Rumänisch/Türkisch für 2 Lagermitarbeiter</a:t>
+                      </a:r>
+                    </a:p>
+                  </a:txBody>
+                  <a:tcPr marL="45720" marR="45720" marT="18288" marB="18288">
+                    <a:solidFill>
+                      <a:srgbClr val="FFFFFF"/>
+                    </a:solidFill>
+                  </a:tcPr>
+                </a:tc>
+                <a:tc>
+                  <a:txBody>
+                    <a:bodyPr/>
+                    <a:lstStyle/>
+                    <a:p>
+                      <a:r>
+                        <a:rPr sz="680" b="0">
+                          <a:solidFill>
+                            <a:srgbClr val="1A1A1A"/>
+                          </a:solidFill>
+                          <a:latin typeface="Calibri"/>
+                        </a:rPr>
+                        <a:t>Interview 08 Hummel</a:t>
+                      </a:r>
+                    </a:p>
+                  </a:txBody>
+                  <a:tcPr marL="45720" marR="45720" marT="18288" marB="18288">
+                    <a:solidFill>
+                      <a:srgbClr val="FFFFFF"/>
+                    </a:solidFill>
+                  </a:tcPr>
+                </a:tc>
+                <a:tc>
+                  <a:txBody>
+                    <a:bodyPr/>
+                    <a:lstStyle/>
+                    <a:p>
+                      <a:r>
+                        <a:rPr sz="680" b="0">
+                          <a:solidFill>
+                            <a:srgbClr val="1A1A1A"/>
+                          </a:solidFill>
+                          <a:latin typeface="Calibri"/>
+                        </a:rPr>
+                        <a:t>Randfall</a:t>
+                      </a:r>
+                    </a:p>
+                  </a:txBody>
+                  <a:tcPr marL="45720" marR="45720" marT="18288" marB="18288">
+                    <a:solidFill>
+                      <a:srgbClr val="FFFFFF"/>
+                    </a:solidFill>
+                  </a:tcPr>
+                </a:tc>
+                <a:tc>
+                  <a:txBody>
+                    <a:bodyPr/>
+                    <a:lstStyle/>
+                    <a:p>
+                      <a:r>
+                        <a:rPr sz="680" b="0">
+                          <a:solidFill>
+                            <a:srgbClr val="1A1A1A"/>
+                          </a:solidFill>
+                          <a:latin typeface="Calibri"/>
+                        </a:rPr>
+                        <a:t>Kann; Piktogramm-/Scanner-Apps</a:t>
+                      </a:r>
+                    </a:p>
+                  </a:txBody>
+                  <a:tcPr marL="45720" marR="45720" marT="18288" marB="18288">
+                    <a:solidFill>
+                      <a:srgbClr val="FFFFFF"/>
+                    </a:solidFill>
+                  </a:tcPr>
+                </a:tc>
+              </a:tr>
+              <a:tr h="250371">
+                <a:tc>
+                  <a:txBody>
+                    <a:bodyPr/>
+                    <a:lstStyle/>
+                    <a:p>
+                      <a:r>
+                        <a:rPr sz="680" b="0">
+                          <a:solidFill>
+                            <a:srgbClr val="1A1A1A"/>
+                          </a:solidFill>
+                          <a:latin typeface="Calibri"/>
+                        </a:rPr>
+                        <a:t>8</a:t>
+                      </a:r>
+                    </a:p>
+                  </a:txBody>
+                  <a:tcPr marL="45720" marR="45720" marT="18288" marB="18288">
+                    <a:solidFill>
+                      <a:srgbClr val="EEF3F8"/>
+                    </a:solidFill>
+                  </a:tcPr>
+                </a:tc>
+                <a:tc>
+                  <a:txBody>
+                    <a:bodyPr/>
+                    <a:lstStyle/>
+                    <a:p>
+                      <a:r>
+                        <a:rPr sz="680" b="0">
+                          <a:solidFill>
+                            <a:srgbClr val="1A1A1A"/>
+                          </a:solidFill>
+                          <a:latin typeface="Calibri"/>
+                        </a:rPr>
+                        <a:t>„30.000 Standardgetriebe pro Jahr“</a:t>
+                      </a:r>
+                    </a:p>
+                  </a:txBody>
+                  <a:tcPr marL="45720" marR="45720" marT="18288" marB="18288">
+                    <a:solidFill>
+                      <a:srgbClr val="EEF3F8"/>
+                    </a:solidFill>
+                  </a:tcPr>
+                </a:tc>
+                <a:tc>
+                  <a:txBody>
+                    <a:bodyPr/>
+                    <a:lstStyle/>
+                    <a:p>
+                      <a:r>
+                        <a:rPr sz="680" b="0">
+                          <a:solidFill>
+                            <a:srgbClr val="1A1A1A"/>
+                          </a:solidFill>
+                          <a:latin typeface="Calibri"/>
+                        </a:rPr>
+                        <a:t>Interview 08 Hummel</a:t>
+                      </a:r>
+                    </a:p>
+                  </a:txBody>
+                  <a:tcPr marL="45720" marR="45720" marT="18288" marB="18288">
+                    <a:solidFill>
+                      <a:srgbClr val="EEF3F8"/>
+                    </a:solidFill>
+                  </a:tcPr>
+                </a:tc>
+                <a:tc>
+                  <a:txBody>
+                    <a:bodyPr/>
+                    <a:lstStyle/>
+                    <a:p>
+                      <a:r>
+                        <a:rPr sz="680" b="0">
+                          <a:solidFill>
+                            <a:srgbClr val="1A1A1A"/>
+                          </a:solidFill>
+                          <a:latin typeface="Calibri"/>
+                        </a:rPr>
+                        <a:t>Zahl unplausibel (Produktion: 22.000)</a:t>
+                      </a:r>
+                    </a:p>
+                  </a:txBody>
+                  <a:tcPr marL="45720" marR="45720" marT="18288" marB="18288">
+                    <a:solidFill>
+                      <a:srgbClr val="EEF3F8"/>
+                    </a:solidFill>
+                  </a:tcPr>
+                </a:tc>
+                <a:tc>
+                  <a:txBody>
+                    <a:bodyPr/>
+                    <a:lstStyle/>
+                    <a:p>
+                      <a:r>
+                        <a:rPr sz="680" b="0">
+                          <a:solidFill>
+                            <a:srgbClr val="1A1A1A"/>
+                          </a:solidFill>
+                          <a:latin typeface="Calibri"/>
+                        </a:rPr>
+                        <a:t>Planwert 22.000</a:t>
+                      </a:r>
+                    </a:p>
+                  </a:txBody>
+                  <a:tcPr marL="45720" marR="45720" marT="18288" marB="18288">
+                    <a:solidFill>
+                      <a:srgbClr val="EEF3F8"/>
+                    </a:solidFill>
+                  </a:tcPr>
+                </a:tc>
+              </a:tr>
+              <a:tr h="250371">
+                <a:tc>
+                  <a:txBody>
+                    <a:bodyPr/>
+                    <a:lstStyle/>
+                    <a:p>
+                      <a:r>
+                        <a:rPr sz="680" b="0">
+                          <a:solidFill>
+                            <a:srgbClr val="1A1A1A"/>
+                          </a:solidFill>
+                          <a:latin typeface="Calibri"/>
+                        </a:rPr>
+                        <a:t>9</a:t>
+                      </a:r>
+                    </a:p>
+                  </a:txBody>
+                  <a:tcPr marL="45720" marR="45720" marT="18288" marB="18288">
+                    <a:solidFill>
+                      <a:srgbClr val="FFFFFF"/>
+                    </a:solidFill>
+                  </a:tcPr>
+                </a:tc>
+                <a:tc>
+                  <a:txBody>
+                    <a:bodyPr/>
+                    <a:lstStyle/>
+                    <a:p>
+                      <a:r>
+                        <a:rPr sz="680" b="0">
+                          <a:solidFill>
+                            <a:srgbClr val="1A1A1A"/>
+                          </a:solidFill>
+                          <a:latin typeface="Calibri"/>
+                        </a:rPr>
+                        <a:t>Wehrtechnik-Kunde: „Daten bei Amazon = Problem“ – „von einem Kunden gehört“</a:t>
+                      </a:r>
+                    </a:p>
+                  </a:txBody>
+                  <a:tcPr marL="45720" marR="45720" marT="18288" marB="18288">
+                    <a:solidFill>
+                      <a:srgbClr val="FFFFFF"/>
+                    </a:solidFill>
+                  </a:tcPr>
+                </a:tc>
+                <a:tc>
+                  <a:txBody>
+                    <a:bodyPr/>
+                    <a:lstStyle/>
+                    <a:p>
+                      <a:r>
+                        <a:rPr sz="680" b="0">
+                          <a:solidFill>
+                            <a:srgbClr val="1A1A1A"/>
+                          </a:solidFill>
+                          <a:latin typeface="Calibri"/>
+                        </a:rPr>
+                        <a:t>Interview 02 Vogt</a:t>
+                      </a:r>
+                    </a:p>
+                  </a:txBody>
+                  <a:tcPr marL="45720" marR="45720" marT="18288" marB="18288">
+                    <a:solidFill>
+                      <a:srgbClr val="FFFFFF"/>
+                    </a:solidFill>
+                  </a:tcPr>
+                </a:tc>
+                <a:tc>
+                  <a:txBody>
+                    <a:bodyPr/>
+                    <a:lstStyle/>
+                    <a:p>
+                      <a:r>
+                        <a:rPr sz="680" b="0">
+                          <a:solidFill>
+                            <a:srgbClr val="1A1A1A"/>
+                          </a:solidFill>
+                          <a:latin typeface="Calibri"/>
+                        </a:rPr>
+                        <a:t>Kein Dokument; Mail Brenner 21.01.: aktuell keine Vorgabe</a:t>
+                      </a:r>
+                    </a:p>
+                  </a:txBody>
+                  <a:tcPr marL="45720" marR="45720" marT="18288" marB="18288">
+                    <a:solidFill>
+                      <a:srgbClr val="FFFFFF"/>
+                    </a:solidFill>
+                  </a:tcPr>
+                </a:tc>
+                <a:tc>
+                  <a:txBody>
+                    <a:bodyPr/>
+                    <a:lstStyle/>
+                    <a:p>
+                      <a:r>
+                        <a:rPr sz="680" b="0">
+                          <a:solidFill>
+                            <a:srgbClr val="1A1A1A"/>
+                          </a:solidFill>
+                          <a:latin typeface="Calibri"/>
+                        </a:rPr>
+                        <a:t>Mögliche künftige Anforderung (Kann), nicht K.o.</a:t>
+                      </a:r>
+                    </a:p>
+                  </a:txBody>
+                  <a:tcPr marL="45720" marR="45720" marT="18288" marB="18288">
+                    <a:solidFill>
+                      <a:srgbClr val="FFFFFF"/>
+                    </a:solidFill>
+                  </a:tcPr>
+                </a:tc>
+              </a:tr>
+              <a:tr h="250371">
+                <a:tc>
+                  <a:txBody>
+                    <a:bodyPr/>
+                    <a:lstStyle/>
+                    <a:p>
+                      <a:r>
+                        <a:rPr sz="680" b="0">
+                          <a:solidFill>
+                            <a:srgbClr val="1A1A1A"/>
+                          </a:solidFill>
+                          <a:latin typeface="Calibri"/>
+                        </a:rPr>
+                        <a:t>10</a:t>
+                      </a:r>
+                    </a:p>
+                  </a:txBody>
+                  <a:tcPr marL="45720" marR="45720" marT="18288" marB="18288">
+                    <a:solidFill>
+                      <a:srgbClr val="EEF3F8"/>
+                    </a:solidFill>
+                  </a:tcPr>
+                </a:tc>
+                <a:tc>
+                  <a:txBody>
+                    <a:bodyPr/>
+                    <a:lstStyle/>
+                    <a:p>
+                      <a:r>
+                        <a:rPr sz="680" b="0">
+                          <a:solidFill>
+                            <a:srgbClr val="1A1A1A"/>
+                          </a:solidFill>
+                          <a:latin typeface="Calibri"/>
+                        </a:rPr>
+                        <a:t>„Sehr günstiges tschechisches ERP“ einer Schwesterfirma</a:t>
+                      </a:r>
+                    </a:p>
+                  </a:txBody>
+                  <a:tcPr marL="45720" marR="45720" marT="18288" marB="18288">
+                    <a:solidFill>
+                      <a:srgbClr val="EEF3F8"/>
+                    </a:solidFill>
+                  </a:tcPr>
+                </a:tc>
+                <a:tc>
+                  <a:txBody>
+                    <a:bodyPr/>
+                    <a:lstStyle/>
+                    <a:p>
+                      <a:r>
+                        <a:rPr sz="680" b="0">
+                          <a:solidFill>
+                            <a:srgbClr val="1A1A1A"/>
+                          </a:solidFill>
+                          <a:latin typeface="Calibri"/>
+                        </a:rPr>
+                        <a:t>Interview 11</a:t>
+                      </a:r>
+                    </a:p>
+                  </a:txBody>
+                  <a:tcPr marL="45720" marR="45720" marT="18288" marB="18288">
+                    <a:solidFill>
+                      <a:srgbClr val="EEF3F8"/>
+                    </a:solidFill>
+                  </a:tcPr>
+                </a:tc>
+                <a:tc>
+                  <a:txBody>
+                    <a:bodyPr/>
+                    <a:lstStyle/>
+                    <a:p>
+                      <a:r>
+                        <a:rPr sz="680" b="0">
+                          <a:solidFill>
+                            <a:srgbClr val="1A1A1A"/>
+                          </a:solidFill>
+                          <a:latin typeface="Calibri"/>
+                        </a:rPr>
+                        <a:t>Nováková empfiehlt es selbst nicht für die Gruppe</a:t>
+                      </a:r>
+                    </a:p>
+                  </a:txBody>
+                  <a:tcPr marL="45720" marR="45720" marT="18288" marB="18288">
+                    <a:solidFill>
+                      <a:srgbClr val="EEF3F8"/>
+                    </a:solidFill>
+                  </a:tcPr>
+                </a:tc>
+                <a:tc>
+                  <a:txBody>
+                    <a:bodyPr/>
+                    <a:lstStyle/>
+                    <a:p>
+                      <a:r>
+                        <a:rPr sz="680" b="0">
+                          <a:solidFill>
+                            <a:srgbClr val="1A1A1A"/>
+                          </a:solidFill>
+                          <a:latin typeface="Calibri"/>
+                        </a:rPr>
+                        <a:t>Nicht berücksichtigt (HELIOS als Vertreter in Longlist)</a:t>
+                      </a:r>
+                    </a:p>
+                  </a:txBody>
+                  <a:tcPr marL="45720" marR="45720" marT="18288" marB="18288">
+                    <a:solidFill>
+                      <a:srgbClr val="EEF3F8"/>
+                    </a:solidFill>
+                  </a:tcPr>
+                </a:tc>
+              </a:tr>
+              <a:tr h="250371">
+                <a:tc>
+                  <a:txBody>
+                    <a:bodyPr/>
+                    <a:lstStyle/>
+                    <a:p>
+                      <a:r>
+                        <a:rPr sz="680" b="0">
+                          <a:solidFill>
+                            <a:srgbClr val="1A1A1A"/>
+                          </a:solidFill>
+                          <a:latin typeface="Calibri"/>
+                        </a:rPr>
+                        <a:t>11</a:t>
+                      </a:r>
+                    </a:p>
+                  </a:txBody>
+                  <a:tcPr marL="45720" marR="45720" marT="18288" marB="18288">
+                    <a:solidFill>
+                      <a:srgbClr val="FFFFFF"/>
+                    </a:solidFill>
+                  </a:tcPr>
+                </a:tc>
+                <a:tc>
+                  <a:txBody>
+                    <a:bodyPr/>
+                    <a:lstStyle/>
+                    <a:p>
+                      <a:r>
+                        <a:rPr sz="680" b="0">
+                          <a:solidFill>
+                            <a:srgbClr val="1A1A1A"/>
+                          </a:solidFill>
+                          <a:latin typeface="Calibri"/>
+                        </a:rPr>
+                        <a:t>Schnelles separates Cloud-ERP für Pilsen als 6-Monats-Brücke</a:t>
+                      </a:r>
+                    </a:p>
+                  </a:txBody>
+                  <a:tcPr marL="45720" marR="45720" marT="18288" marB="18288">
+                    <a:solidFill>
+                      <a:srgbClr val="FFFFFF"/>
+                    </a:solidFill>
+                  </a:tcPr>
+                </a:tc>
+                <a:tc>
+                  <a:txBody>
+                    <a:bodyPr/>
+                    <a:lstStyle/>
+                    <a:p>
+                      <a:r>
+                        <a:rPr sz="680" b="0">
+                          <a:solidFill>
+                            <a:srgbClr val="1A1A1A"/>
+                          </a:solidFill>
+                          <a:latin typeface="Calibri"/>
+                        </a:rPr>
+                        <a:t>Interview 11 Dvořák</a:t>
+                      </a:r>
+                    </a:p>
+                  </a:txBody>
+                  <a:tcPr marL="45720" marR="45720" marT="18288" marB="18288">
+                    <a:solidFill>
+                      <a:srgbClr val="FFFFFF"/>
+                    </a:solidFill>
+                  </a:tcPr>
+                </a:tc>
+                <a:tc>
+                  <a:txBody>
+                    <a:bodyPr/>
+                    <a:lstStyle/>
+                    <a:p>
+                      <a:r>
+                        <a:rPr sz="680" b="0">
+                          <a:solidFill>
+                            <a:srgbClr val="1A1A1A"/>
+                          </a:solidFill>
+                          <a:latin typeface="Calibri"/>
+                        </a:rPr>
+                        <a:t>Doppelmigration, neue Insel</a:t>
+                      </a:r>
+                    </a:p>
+                  </a:txBody>
+                  <a:tcPr marL="45720" marR="45720" marT="18288" marB="18288">
+                    <a:solidFill>
+                      <a:srgbClr val="FFFFFF"/>
+                    </a:solidFill>
+                  </a:tcPr>
+                </a:tc>
+                <a:tc>
+                  <a:txBody>
+                    <a:bodyPr/>
+                    <a:lstStyle/>
+                    <a:p>
+                      <a:r>
+                        <a:rPr sz="680" b="0">
+                          <a:solidFill>
+                            <a:srgbClr val="1A1A1A"/>
+                          </a:solidFill>
+                          <a:latin typeface="Calibri"/>
+                        </a:rPr>
+                        <a:t>Abgelehnt; Pilsen als Pilot auf Ziel-ERP</a:t>
+                      </a:r>
+                    </a:p>
+                  </a:txBody>
+                  <a:tcPr marL="45720" marR="45720" marT="18288" marB="18288">
+                    <a:solidFill>
+                      <a:srgbClr val="FFFFFF"/>
+                    </a:solidFill>
+                  </a:tcPr>
+                </a:tc>
+              </a:tr>
+              <a:tr h="250371">
+                <a:tc>
+                  <a:txBody>
+                    <a:bodyPr/>
+                    <a:lstStyle/>
+                    <a:p>
+                      <a:r>
+                        <a:rPr sz="680" b="0">
+                          <a:solidFill>
+                            <a:srgbClr val="1A1A1A"/>
+                          </a:solidFill>
+                          <a:latin typeface="Calibri"/>
+                        </a:rPr>
+                        <a:t>12</a:t>
+                      </a:r>
+                    </a:p>
+                  </a:txBody>
+                  <a:tcPr marL="45720" marR="45720" marT="18288" marB="18288">
+                    <a:solidFill>
+                      <a:srgbClr val="EEF3F8"/>
+                    </a:solidFill>
+                  </a:tcPr>
+                </a:tc>
+                <a:tc>
+                  <a:txBody>
+                    <a:bodyPr/>
+                    <a:lstStyle/>
+                    <a:p>
+                      <a:r>
+                        <a:rPr sz="680" b="0">
+                          <a:solidFill>
+                            <a:srgbClr val="1A1A1A"/>
+                          </a:solidFill>
+                          <a:latin typeface="Calibri"/>
+                        </a:rPr>
+                        <a:t>Liefertreue 71 %</a:t>
+                      </a:r>
+                    </a:p>
+                  </a:txBody>
+                  <a:tcPr marL="45720" marR="45720" marT="18288" marB="18288">
+                    <a:solidFill>
+                      <a:srgbClr val="EEF3F8"/>
+                    </a:solidFill>
+                  </a:tcPr>
+                </a:tc>
+                <a:tc>
+                  <a:txBody>
+                    <a:bodyPr/>
+                    <a:lstStyle/>
+                    <a:p>
+                      <a:r>
+                        <a:rPr sz="680" b="0">
+                          <a:solidFill>
+                            <a:srgbClr val="1A1A1A"/>
+                          </a:solidFill>
+                          <a:latin typeface="Calibri"/>
+                        </a:rPr>
+                        <a:t>Controlling / Folien</a:t>
+                      </a:r>
+                    </a:p>
+                  </a:txBody>
+                  <a:tcPr marL="45720" marR="45720" marT="18288" marB="18288">
+                    <a:solidFill>
+                      <a:srgbClr val="EEF3F8"/>
+                    </a:solidFill>
+                  </a:tcPr>
+                </a:tc>
+                <a:tc>
+                  <a:txBody>
+                    <a:bodyPr/>
+                    <a:lstStyle/>
+                    <a:p>
+                      <a:r>
+                        <a:rPr sz="680" b="0">
+                          <a:solidFill>
+                            <a:srgbClr val="1A1A1A"/>
+                          </a:solidFill>
+                          <a:latin typeface="Calibri"/>
+                        </a:rPr>
+                        <a:t>Gemessen gegen letzten bestätigten Termin = geschönt</a:t>
+                      </a:r>
+                    </a:p>
+                  </a:txBody>
+                  <a:tcPr marL="45720" marR="45720" marT="18288" marB="18288">
+                    <a:solidFill>
+                      <a:srgbClr val="EEF3F8"/>
+                    </a:solidFill>
+                  </a:tcPr>
+                </a:tc>
+                <a:tc>
+                  <a:txBody>
+                    <a:bodyPr/>
+                    <a:lstStyle/>
+                    <a:p>
+                      <a:r>
+                        <a:rPr sz="680" b="0">
+                          <a:solidFill>
+                            <a:srgbClr val="1A1A1A"/>
+                          </a:solidFill>
+                          <a:latin typeface="Calibri"/>
+                        </a:rPr>
+                        <a:t>58 % als Ausgangswert</a:t>
+                      </a:r>
+                    </a:p>
+                  </a:txBody>
+                  <a:tcPr marL="45720" marR="45720" marT="18288" marB="18288">
+                    <a:solidFill>
+                      <a:srgbClr val="EEF3F8"/>
+                    </a:solidFill>
+                  </a:tcPr>
+                </a:tc>
+              </a:tr>
+              <a:tr h="250371">
+                <a:tc>
+                  <a:txBody>
+                    <a:bodyPr/>
+                    <a:lstStyle/>
+                    <a:p>
+                      <a:r>
+                        <a:rPr sz="680" b="0">
+                          <a:solidFill>
+                            <a:srgbClr val="1A1A1A"/>
+                          </a:solidFill>
+                          <a:latin typeface="Calibri"/>
+                        </a:rPr>
+                        <a:t>13</a:t>
+                      </a:r>
+                    </a:p>
+                  </a:txBody>
+                  <a:tcPr marL="45720" marR="45720" marT="18288" marB="18288">
+                    <a:solidFill>
+                      <a:srgbClr val="FFFFFF"/>
+                    </a:solidFill>
+                  </a:tcPr>
+                </a:tc>
+                <a:tc>
+                  <a:txBody>
+                    <a:bodyPr/>
+                    <a:lstStyle/>
+                    <a:p>
+                      <a:r>
+                        <a:rPr sz="680" b="0">
+                          <a:solidFill>
+                            <a:srgbClr val="1A1A1A"/>
+                          </a:solidFill>
+                          <a:latin typeface="Calibri"/>
+                        </a:rPr>
+                        <a:t>Umsatz 86,4 Mio. €</a:t>
+                      </a:r>
+                    </a:p>
+                  </a:txBody>
+                  <a:tcPr marL="45720" marR="45720" marT="18288" marB="18288">
+                    <a:solidFill>
+                      <a:srgbClr val="FFFFFF"/>
+                    </a:solidFill>
+                  </a:tcPr>
+                </a:tc>
+                <a:tc>
+                  <a:txBody>
+                    <a:bodyPr/>
+                    <a:lstStyle/>
+                    <a:p>
+                      <a:r>
+                        <a:rPr sz="680" b="0">
+                          <a:solidFill>
+                            <a:srgbClr val="1A1A1A"/>
+                          </a:solidFill>
+                          <a:latin typeface="Calibri"/>
+                        </a:rPr>
+                        <a:t>Unternehmensprofil</a:t>
+                      </a:r>
+                    </a:p>
+                  </a:txBody>
+                  <a:tcPr marL="45720" marR="45720" marT="18288" marB="18288">
+                    <a:solidFill>
+                      <a:srgbClr val="FFFFFF"/>
+                    </a:solidFill>
+                  </a:tcPr>
+                </a:tc>
+                <a:tc>
+                  <a:txBody>
+                    <a:bodyPr/>
+                    <a:lstStyle/>
+                    <a:p>
+                      <a:r>
+                        <a:rPr sz="680" b="0">
+                          <a:solidFill>
+                            <a:srgbClr val="1A1A1A"/>
+                          </a:solidFill>
+                          <a:latin typeface="Calibri"/>
+                        </a:rPr>
+                        <a:t>Summe der Einzelabschlüsse, nicht konsolidiert</a:t>
+                      </a:r>
+                    </a:p>
+                  </a:txBody>
+                  <a:tcPr marL="45720" marR="45720" marT="18288" marB="18288">
+                    <a:solidFill>
+                      <a:srgbClr val="FFFFFF"/>
+                    </a:solidFill>
+                  </a:tcPr>
+                </a:tc>
+                <a:tc>
+                  <a:txBody>
+                    <a:bodyPr/>
+                    <a:lstStyle/>
+                    <a:p>
+                      <a:r>
+                        <a:rPr sz="680" b="0">
+                          <a:solidFill>
+                            <a:srgbClr val="1A1A1A"/>
+                          </a:solidFill>
+                          <a:latin typeface="Calibri"/>
+                        </a:rPr>
+                        <a:t>82,7 Mio. € für Kennzahlen</a:t>
+                      </a:r>
+                    </a:p>
+                  </a:txBody>
+                  <a:tcPr marL="45720" marR="45720" marT="18288" marB="18288">
+                    <a:solidFill>
+                      <a:srgbClr val="FFFFFF"/>
+                    </a:solidFill>
+                  </a:tcPr>
+                </a:tc>
+              </a:tr>
+              <a:tr h="250371">
+                <a:tc>
+                  <a:txBody>
+                    <a:bodyPr/>
+                    <a:lstStyle/>
+                    <a:p>
+                      <a:r>
+                        <a:rPr sz="680" b="0">
+                          <a:solidFill>
+                            <a:srgbClr val="1A1A1A"/>
+                          </a:solidFill>
+                          <a:latin typeface="Calibri"/>
+                        </a:rPr>
+                        <a:t>14</a:t>
+                      </a:r>
+                    </a:p>
+                  </a:txBody>
+                  <a:tcPr marL="45720" marR="45720" marT="18288" marB="18288">
+                    <a:solidFill>
+                      <a:srgbClr val="EEF3F8"/>
+                    </a:solidFill>
+                  </a:tcPr>
+                </a:tc>
+                <a:tc>
+                  <a:txBody>
+                    <a:bodyPr/>
+                    <a:lstStyle/>
+                    <a:p>
+                      <a:r>
+                        <a:rPr sz="680" b="0">
+                          <a:solidFill>
+                            <a:srgbClr val="1A1A1A"/>
+                          </a:solidFill>
+                          <a:latin typeface="Calibri"/>
+                        </a:rPr>
+                        <a:t>„Alle 340 Listen müssen verfügbar sein“</a:t>
+                      </a:r>
+                    </a:p>
+                  </a:txBody>
+                  <a:tcPr marL="45720" marR="45720" marT="18288" marB="18288">
+                    <a:solidFill>
+                      <a:srgbClr val="EEF3F8"/>
+                    </a:solidFill>
+                  </a:tcPr>
+                </a:tc>
+                <a:tc>
+                  <a:txBody>
+                    <a:bodyPr/>
+                    <a:lstStyle/>
+                    <a:p>
+                      <a:r>
+                        <a:rPr sz="680" b="0">
+                          <a:solidFill>
+                            <a:srgbClr val="1A1A1A"/>
+                          </a:solidFill>
+                          <a:latin typeface="Calibri"/>
+                        </a:rPr>
+                        <a:t>Lastenheft 2015 / A-010</a:t>
+                      </a:r>
+                    </a:p>
+                  </a:txBody>
+                  <a:tcPr marL="45720" marR="45720" marT="18288" marB="18288">
+                    <a:solidFill>
+                      <a:srgbClr val="EEF3F8"/>
+                    </a:solidFill>
+                  </a:tcPr>
+                </a:tc>
+                <a:tc>
+                  <a:txBody>
+                    <a:bodyPr/>
+                    <a:lstStyle/>
+                    <a:p>
+                      <a:r>
+                        <a:rPr sz="680" b="0">
+                          <a:solidFill>
+                            <a:srgbClr val="1A1A1A"/>
+                          </a:solidFill>
+                          <a:latin typeface="Calibri"/>
+                        </a:rPr>
+                        <a:t>Nur ca. 40 genutzt; war 2016 unerfüllbar</a:t>
+                      </a:r>
+                    </a:p>
+                  </a:txBody>
+                  <a:tcPr marL="45720" marR="45720" marT="18288" marB="18288">
+                    <a:solidFill>
+                      <a:srgbClr val="EEF3F8"/>
+                    </a:solidFill>
+                  </a:tcPr>
+                </a:tc>
+                <a:tc>
+                  <a:txBody>
+                    <a:bodyPr/>
+                    <a:lstStyle/>
+                    <a:p>
+                      <a:r>
+                        <a:rPr sz="680" b="0">
+                          <a:solidFill>
+                            <a:srgbClr val="1A1A1A"/>
+                          </a:solidFill>
+                          <a:latin typeface="Calibri"/>
+                        </a:rPr>
+                        <a:t>Top-40 nach Nutzungsstatistik</a:t>
+                      </a:r>
+                    </a:p>
+                  </a:txBody>
+                  <a:tcPr marL="45720" marR="45720" marT="18288" marB="18288">
+                    <a:solidFill>
+                      <a:srgbClr val="EEF3F8"/>
+                    </a:solidFill>
+                  </a:tcPr>
+                </a:tc>
+              </a:tr>
+              <a:tr h="250371">
+                <a:tc>
+                  <a:txBody>
+                    <a:bodyPr/>
+                    <a:lstStyle/>
+                    <a:p>
+                      <a:r>
+                        <a:rPr sz="680" b="0">
+                          <a:solidFill>
+                            <a:srgbClr val="1A1A1A"/>
+                          </a:solidFill>
+                          <a:latin typeface="Calibri"/>
+                        </a:rPr>
+                        <a:t>15</a:t>
+                      </a:r>
+                    </a:p>
+                  </a:txBody>
+                  <a:tcPr marL="45720" marR="45720" marT="18288" marB="18288">
+                    <a:solidFill>
+                      <a:srgbClr val="FFFFFF"/>
+                    </a:solidFill>
+                  </a:tcPr>
+                </a:tc>
+                <a:tc>
+                  <a:txBody>
+                    <a:bodyPr/>
+                    <a:lstStyle/>
+                    <a:p>
+                      <a:r>
+                        <a:rPr sz="680" b="0">
+                          <a:solidFill>
+                            <a:srgbClr val="1A1A1A"/>
+                          </a:solidFill>
+                          <a:latin typeface="Calibri"/>
+                        </a:rPr>
+                        <a:t>„10 Jahre Historie im neuen System“</a:t>
+                      </a:r>
+                    </a:p>
+                  </a:txBody>
+                  <a:tcPr marL="45720" marR="45720" marT="18288" marB="18288">
+                    <a:solidFill>
+                      <a:srgbClr val="FFFFFF"/>
+                    </a:solidFill>
+                  </a:tcPr>
+                </a:tc>
+                <a:tc>
+                  <a:txBody>
+                    <a:bodyPr/>
+                    <a:lstStyle/>
+                    <a:p>
+                      <a:r>
+                        <a:rPr sz="680" b="0">
+                          <a:solidFill>
+                            <a:srgbClr val="1A1A1A"/>
+                          </a:solidFill>
+                          <a:latin typeface="Calibri"/>
+                        </a:rPr>
+                        <a:t>A-009 Vertrieb mündlich</a:t>
+                      </a:r>
+                    </a:p>
+                  </a:txBody>
+                  <a:tcPr marL="45720" marR="45720" marT="18288" marB="18288">
+                    <a:solidFill>
+                      <a:srgbClr val="FFFFFF"/>
+                    </a:solidFill>
+                  </a:tcPr>
+                </a:tc>
+                <a:tc>
+                  <a:txBody>
+                    <a:bodyPr/>
+                    <a:lstStyle/>
+                    <a:p>
+                      <a:r>
+                        <a:rPr sz="680" b="0">
+                          <a:solidFill>
+                            <a:srgbClr val="1A1A1A"/>
+                          </a:solidFill>
+                          <a:latin typeface="Calibri"/>
+                        </a:rPr>
+                        <a:t>Teuer, schlechte Datenqualität, kein Nutzen im Tagesgeschäft</a:t>
+                      </a:r>
+                    </a:p>
+                  </a:txBody>
+                  <a:tcPr marL="45720" marR="45720" marT="18288" marB="18288">
+                    <a:solidFill>
+                      <a:srgbClr val="FFFFFF"/>
+                    </a:solidFill>
+                  </a:tcPr>
+                </a:tc>
+                <a:tc>
+                  <a:txBody>
+                    <a:bodyPr/>
+                    <a:lstStyle/>
+                    <a:p>
+                      <a:r>
+                        <a:rPr sz="680" b="0">
+                          <a:solidFill>
+                            <a:srgbClr val="1A1A1A"/>
+                          </a:solidFill>
+                          <a:latin typeface="Calibri"/>
+                        </a:rPr>
+                        <a:t>Archiv statt Migration</a:t>
+                      </a:r>
+                    </a:p>
+                  </a:txBody>
+                  <a:tcPr marL="45720" marR="45720" marT="18288" marB="18288">
+                    <a:solidFill>
+                      <a:srgbClr val="FFFFFF"/>
+                    </a:solidFill>
+                  </a:tcPr>
+                </a:tc>
+              </a:tr>
+              <a:tr h="250371">
+                <a:tc>
+                  <a:txBody>
+                    <a:bodyPr/>
+                    <a:lstStyle/>
+                    <a:p>
+                      <a:r>
+                        <a:rPr sz="680" b="0">
+                          <a:solidFill>
+                            <a:srgbClr val="1A1A1A"/>
+                          </a:solidFill>
+                          <a:latin typeface="Calibri"/>
+                        </a:rPr>
+                        <a:t>16</a:t>
+                      </a:r>
+                    </a:p>
+                  </a:txBody>
+                  <a:tcPr marL="45720" marR="45720" marT="18288" marB="18288">
+                    <a:solidFill>
+                      <a:srgbClr val="EEF3F8"/>
+                    </a:solidFill>
+                  </a:tcPr>
+                </a:tc>
+                <a:tc>
+                  <a:txBody>
+                    <a:bodyPr/>
+                    <a:lstStyle/>
+                    <a:p>
+                      <a:r>
+                        <a:rPr sz="680" b="0">
+                          <a:solidFill>
+                            <a:srgbClr val="1A1A1A"/>
+                          </a:solidFill>
+                          <a:latin typeface="Calibri"/>
+                        </a:rPr>
+                        <a:t>Modernisierung RPG→Java für 300–400 T€</a:t>
+                      </a:r>
+                    </a:p>
+                  </a:txBody>
+                  <a:tcPr marL="45720" marR="45720" marT="18288" marB="18288">
+                    <a:solidFill>
+                      <a:srgbClr val="EEF3F8"/>
+                    </a:solidFill>
+                  </a:tcPr>
+                </a:tc>
+                <a:tc>
+                  <a:txBody>
+                    <a:bodyPr/>
+                    <a:lstStyle/>
+                    <a:p>
+                      <a:r>
+                        <a:rPr sz="680" b="0">
+                          <a:solidFill>
+                            <a:srgbClr val="1A1A1A"/>
+                          </a:solidFill>
+                          <a:latin typeface="Calibri"/>
+                        </a:rPr>
+                        <a:t>Interview 02 / Mail Vogt</a:t>
+                      </a:r>
+                    </a:p>
+                  </a:txBody>
+                  <a:tcPr marL="45720" marR="45720" marT="18288" marB="18288">
+                    <a:solidFill>
+                      <a:srgbClr val="EEF3F8"/>
+                    </a:solidFill>
+                  </a:tcPr>
+                </a:tc>
+                <a:tc>
+                  <a:txBody>
+                    <a:bodyPr/>
+                    <a:lstStyle/>
+                    <a:p>
+                      <a:r>
+                        <a:rPr sz="680" b="0">
+                          <a:solidFill>
+                            <a:srgbClr val="1A1A1A"/>
+                          </a:solidFill>
+                          <a:latin typeface="Calibri"/>
+                        </a:rPr>
+                        <a:t>Kein Angebot vorliegend; löst Funktionslücken nicht</a:t>
+                      </a:r>
+                    </a:p>
+                  </a:txBody>
+                  <a:tcPr marL="45720" marR="45720" marT="18288" marB="18288">
+                    <a:solidFill>
+                      <a:srgbClr val="EEF3F8"/>
+                    </a:solidFill>
+                  </a:tcPr>
+                </a:tc>
+                <a:tc>
+                  <a:txBody>
+                    <a:bodyPr/>
+                    <a:lstStyle/>
+                    <a:p>
+                      <a:r>
+                        <a:rPr sz="680" b="0">
+                          <a:solidFill>
+                            <a:srgbClr val="1A1A1A"/>
+                          </a:solidFill>
+                          <a:latin typeface="Calibri"/>
+                        </a:rPr>
+                        <a:t>Als Option 0 fair geprüft und verworfen</a:t>
+                      </a:r>
+                    </a:p>
+                  </a:txBody>
+                  <a:tcPr marL="45720" marR="45720" marT="18288" marB="18288">
+                    <a:solidFill>
+                      <a:srgbClr val="EEF3F8"/>
+                    </a:solidFill>
+                  </a:tcPr>
+                </a:tc>
+              </a:tr>
+              <a:tr h="250371">
+                <a:tc>
+                  <a:txBody>
+                    <a:bodyPr/>
+                    <a:lstStyle/>
+                    <a:p>
+                      <a:r>
+                        <a:rPr sz="680" b="0">
+                          <a:solidFill>
+                            <a:srgbClr val="1A1A1A"/>
+                          </a:solidFill>
+                          <a:latin typeface="Calibri"/>
+                        </a:rPr>
+                        <a:t>17</a:t>
+                      </a:r>
+                    </a:p>
+                  </a:txBody>
+                  <a:tcPr marL="45720" marR="45720" marT="18288" marB="18288">
+                    <a:solidFill>
+                      <a:srgbClr val="FFFFFF"/>
+                    </a:solidFill>
+                  </a:tcPr>
+                </a:tc>
+                <a:tc>
+                  <a:txBody>
+                    <a:bodyPr/>
+                    <a:lstStyle/>
+                    <a:p>
+                      <a:r>
+                        <a:rPr sz="680" b="0">
+                          <a:solidFill>
+                            <a:srgbClr val="1A1A1A"/>
+                          </a:solidFill>
+                          <a:latin typeface="Calibri"/>
+                        </a:rPr>
+                        <a:t>Einsparung Einkaufsbündelung 300–500 T€ p. a.</a:t>
+                      </a:r>
+                    </a:p>
+                  </a:txBody>
+                  <a:tcPr marL="45720" marR="45720" marT="18288" marB="18288">
+                    <a:solidFill>
+                      <a:srgbClr val="FFFFFF"/>
+                    </a:solidFill>
+                  </a:tcPr>
+                </a:tc>
+                <a:tc>
+                  <a:txBody>
+                    <a:bodyPr/>
+                    <a:lstStyle/>
+                    <a:p>
+                      <a:r>
+                        <a:rPr sz="680" b="0">
+                          <a:solidFill>
+                            <a:srgbClr val="1A1A1A"/>
+                          </a:solidFill>
+                          <a:latin typeface="Calibri"/>
+                        </a:rPr>
+                        <a:t>Interview 07 Frick</a:t>
+                      </a:r>
+                    </a:p>
+                  </a:txBody>
+                  <a:tcPr marL="45720" marR="45720" marT="18288" marB="18288">
+                    <a:solidFill>
+                      <a:srgbClr val="FFFFFF"/>
+                    </a:solidFill>
+                  </a:tcPr>
+                </a:tc>
+                <a:tc>
+                  <a:txBody>
+                    <a:bodyPr/>
+                    <a:lstStyle/>
+                    <a:p>
+                      <a:r>
+                        <a:rPr sz="680" b="0">
+                          <a:solidFill>
+                            <a:srgbClr val="1A1A1A"/>
+                          </a:solidFill>
+                          <a:latin typeface="Calibri"/>
+                        </a:rPr>
+                        <a:t>Unbelegte Eigenschätzung</a:t>
+                      </a:r>
+                    </a:p>
+                  </a:txBody>
+                  <a:tcPr marL="45720" marR="45720" marT="18288" marB="18288">
+                    <a:solidFill>
+                      <a:srgbClr val="FFFFFF"/>
+                    </a:solidFill>
+                  </a:tcPr>
+                </a:tc>
+                <a:tc>
+                  <a:txBody>
+                    <a:bodyPr/>
+                    <a:lstStyle/>
+                    <a:p>
+                      <a:r>
+                        <a:rPr sz="680" b="0">
+                          <a:solidFill>
+                            <a:srgbClr val="1A1A1A"/>
+                          </a:solidFill>
+                          <a:latin typeface="Calibri"/>
+                        </a:rPr>
+                        <a:t>Im Business Case halbiert</a:t>
+                      </a:r>
+                    </a:p>
+                  </a:txBody>
+                  <a:tcPr marL="45720" marR="45720" marT="18288" marB="18288">
+                    <a:solidFill>
+                      <a:srgbClr val="FFFFFF"/>
+                    </a:solidFill>
+                  </a:tcPr>
+                </a:tc>
+              </a:tr>
+              <a:tr h="250371">
+                <a:tc>
+                  <a:txBody>
+                    <a:bodyPr/>
+                    <a:lstStyle/>
+                    <a:p>
+                      <a:r>
+                        <a:rPr sz="680" b="0">
+                          <a:solidFill>
+                            <a:srgbClr val="1A1A1A"/>
+                          </a:solidFill>
+                          <a:latin typeface="Calibri"/>
+                        </a:rPr>
+                        <a:t>18</a:t>
+                      </a:r>
+                    </a:p>
+                  </a:txBody>
+                  <a:tcPr marL="45720" marR="45720" marT="18288" marB="18288">
+                    <a:solidFill>
+                      <a:srgbClr val="EEF3F8"/>
+                    </a:solidFill>
+                  </a:tcPr>
+                </a:tc>
+                <a:tc>
+                  <a:txBody>
+                    <a:bodyPr/>
+                    <a:lstStyle/>
+                    <a:p>
+                      <a:r>
+                        <a:rPr sz="680" b="0">
+                          <a:solidFill>
+                            <a:srgbClr val="1A1A1A"/>
+                          </a:solidFill>
+                          <a:latin typeface="Calibri"/>
+                        </a:rPr>
+                        <a:t>LkSG „ab 1.000 MA, noch nicht relevant“, CO₂-Fußabdruck, IoT/Predictive Maintenance</a:t>
+                      </a:r>
+                    </a:p>
+                  </a:txBody>
+                  <a:tcPr marL="45720" marR="45720" marT="18288" marB="18288">
+                    <a:solidFill>
+                      <a:srgbClr val="EEF3F8"/>
+                    </a:solidFill>
+                  </a:tcPr>
+                </a:tc>
+                <a:tc>
+                  <a:txBody>
+                    <a:bodyPr/>
+                    <a:lstStyle/>
+                    <a:p>
+                      <a:r>
+                        <a:rPr sz="680" b="0">
+                          <a:solidFill>
+                            <a:srgbClr val="1A1A1A"/>
+                          </a:solidFill>
+                          <a:latin typeface="Calibri"/>
+                        </a:rPr>
+                        <a:t>Interview 07, 09</a:t>
+                      </a:r>
+                    </a:p>
+                  </a:txBody>
+                  <a:tcPr marL="45720" marR="45720" marT="18288" marB="18288">
+                    <a:solidFill>
+                      <a:srgbClr val="EEF3F8"/>
+                    </a:solidFill>
+                  </a:tcPr>
+                </a:tc>
+                <a:tc>
+                  <a:txBody>
+                    <a:bodyPr/>
+                    <a:lstStyle/>
+                    <a:p>
+                      <a:r>
+                        <a:rPr sz="680" b="0">
+                          <a:solidFill>
+                            <a:srgbClr val="1A1A1A"/>
+                          </a:solidFill>
+                          <a:latin typeface="Calibri"/>
+                        </a:rPr>
+                        <a:t>Für die Systemauswahl Phase 1 nicht entscheidend</a:t>
+                      </a:r>
+                    </a:p>
+                  </a:txBody>
+                  <a:tcPr marL="45720" marR="45720" marT="18288" marB="18288">
+                    <a:solidFill>
+                      <a:srgbClr val="EEF3F8"/>
+                    </a:solidFill>
+                  </a:tcPr>
+                </a:tc>
+                <a:tc>
+                  <a:txBody>
+                    <a:bodyPr/>
+                    <a:lstStyle/>
+                    <a:p>
+                      <a:r>
+                        <a:rPr sz="680" b="0">
+                          <a:solidFill>
+                            <a:srgbClr val="1A1A1A"/>
+                          </a:solidFill>
+                          <a:latin typeface="Calibri"/>
+                        </a:rPr>
+                        <a:t>Kann/Phase 2; nur offene API gefordert</a:t>
+                      </a:r>
+                    </a:p>
+                  </a:txBody>
+                  <a:tcPr marL="45720" marR="45720" marT="18288" marB="18288">
+                    <a:solidFill>
+                      <a:srgbClr val="EEF3F8"/>
+                    </a:solidFill>
+                  </a:tcPr>
+                </a:tc>
+              </a:tr>
+              <a:tr h="250371">
+                <a:tc>
+                  <a:txBody>
+                    <a:bodyPr/>
+                    <a:lstStyle/>
+                    <a:p>
+                      <a:r>
+                        <a:rPr sz="680" b="0">
+                          <a:solidFill>
+                            <a:srgbClr val="1A1A1A"/>
+                          </a:solidFill>
+                          <a:latin typeface="Calibri"/>
+                        </a:rPr>
+                        <a:t>19</a:t>
+                      </a:r>
+                    </a:p>
+                  </a:txBody>
+                  <a:tcPr marL="45720" marR="45720" marT="18288" marB="18288">
+                    <a:solidFill>
+                      <a:srgbClr val="FFFFFF"/>
+                    </a:solidFill>
+                  </a:tcPr>
+                </a:tc>
+                <a:tc>
+                  <a:txBody>
+                    <a:bodyPr/>
+                    <a:lstStyle/>
+                    <a:p>
+                      <a:r>
+                        <a:rPr sz="680" b="0">
+                          <a:solidFill>
+                            <a:srgbClr val="1A1A1A"/>
+                          </a:solidFill>
+                          <a:latin typeface="Calibri"/>
+                        </a:rPr>
+                        <a:t>Umbau Organigramm 01.07.2026 (AV + Produktion)</a:t>
+                      </a:r>
+                    </a:p>
+                  </a:txBody>
+                  <a:tcPr marL="45720" marR="45720" marT="18288" marB="18288">
+                    <a:solidFill>
+                      <a:srgbClr val="FFFFFF"/>
+                    </a:solidFill>
+                  </a:tcPr>
+                </a:tc>
+                <a:tc>
+                  <a:txBody>
+                    <a:bodyPr/>
+                    <a:lstStyle/>
+                    <a:p>
+                      <a:r>
+                        <a:rPr sz="680" b="0">
+                          <a:solidFill>
+                            <a:srgbClr val="1A1A1A"/>
+                          </a:solidFill>
+                          <a:latin typeface="Calibri"/>
+                        </a:rPr>
+                        <a:t>Organigramm</a:t>
+                      </a:r>
+                    </a:p>
+                  </a:txBody>
+                  <a:tcPr marL="45720" marR="45720" marT="18288" marB="18288">
+                    <a:solidFill>
+                      <a:srgbClr val="FFFFFF"/>
+                    </a:solidFill>
+                  </a:tcPr>
+                </a:tc>
+                <a:tc>
+                  <a:txBody>
+                    <a:bodyPr/>
+                    <a:lstStyle/>
+                    <a:p>
+                      <a:r>
+                        <a:rPr sz="680" b="0">
+                          <a:solidFill>
+                            <a:srgbClr val="1A1A1A"/>
+                          </a:solidFill>
+                          <a:latin typeface="Calibri"/>
+                        </a:rPr>
+                        <a:t>Ohne Einfluss auf Systemauswahl</a:t>
+                      </a:r>
+                    </a:p>
+                  </a:txBody>
+                  <a:tcPr marL="45720" marR="45720" marT="18288" marB="18288">
+                    <a:solidFill>
+                      <a:srgbClr val="FFFFFF"/>
+                    </a:solidFill>
+                  </a:tcPr>
+                </a:tc>
+                <a:tc>
+                  <a:txBody>
+                    <a:bodyPr/>
+                    <a:lstStyle/>
+                    <a:p>
+                      <a:r>
+                        <a:rPr sz="680" b="0">
+                          <a:solidFill>
+                            <a:srgbClr val="1A1A1A"/>
+                          </a:solidFill>
+                          <a:latin typeface="Calibri"/>
+                        </a:rPr>
+                        <a:t>Nicht berücksichtigt</a:t>
+                      </a:r>
+                    </a:p>
+                  </a:txBody>
+                  <a:tcPr marL="45720" marR="45720" marT="18288" marB="18288">
+                    <a:solidFill>
+                      <a:srgbClr val="FFFFFF"/>
+                    </a:solidFill>
+                  </a:tcPr>
+                </a:tc>
+              </a:tr>
+              <a:tr h="250380">
+                <a:tc>
+                  <a:txBody>
+                    <a:bodyPr/>
+                    <a:lstStyle/>
+                    <a:p>
+                      <a:r>
+                        <a:rPr sz="680" b="0">
+                          <a:solidFill>
+                            <a:srgbClr val="1A1A1A"/>
+                          </a:solidFill>
+                          <a:latin typeface="Calibri"/>
+                        </a:rPr>
+                        <a:t>20</a:t>
+                      </a:r>
+                    </a:p>
+                  </a:txBody>
+                  <a:tcPr marL="45720" marR="45720" marT="18288" marB="18288">
+                    <a:solidFill>
+                      <a:srgbClr val="EEF3F8"/>
+                    </a:solidFill>
+                  </a:tcPr>
+                </a:tc>
+                <a:tc>
+                  <a:txBody>
+                    <a:bodyPr/>
+                    <a:lstStyle/>
+                    <a:p>
+                      <a:r>
+                        <a:rPr sz="680" b="0">
+                          <a:solidFill>
+                            <a:srgbClr val="1A1A1A"/>
+                          </a:solidFill>
+                          <a:latin typeface="Calibri"/>
+                        </a:rPr>
+                        <a:t>„Nehmen Sie, was die Produktion versteht. Die Buchhaltung kommt mit allem klar.“</a:t>
+                      </a:r>
+                    </a:p>
+                  </a:txBody>
+                  <a:tcPr marL="45720" marR="45720" marT="18288" marB="18288">
+                    <a:solidFill>
+                      <a:srgbClr val="EEF3F8"/>
+                    </a:solidFill>
+                  </a:tcPr>
+                </a:tc>
+                <a:tc>
+                  <a:txBody>
+                    <a:bodyPr/>
+                    <a:lstStyle/>
+                    <a:p>
+                      <a:r>
+                        <a:rPr sz="680" b="0">
+                          <a:solidFill>
+                            <a:srgbClr val="1A1A1A"/>
+                          </a:solidFill>
+                          <a:latin typeface="Calibri"/>
+                        </a:rPr>
+                        <a:t>Interview 04 Brugger</a:t>
+                      </a:r>
+                    </a:p>
+                  </a:txBody>
+                  <a:tcPr marL="45720" marR="45720" marT="18288" marB="18288">
+                    <a:solidFill>
+                      <a:srgbClr val="EEF3F8"/>
+                    </a:solidFill>
+                  </a:tcPr>
+                </a:tc>
+                <a:tc>
+                  <a:txBody>
+                    <a:bodyPr/>
+                    <a:lstStyle/>
+                    <a:p>
+                      <a:r>
+                        <a:rPr sz="680" b="0">
+                          <a:solidFill>
+                            <a:srgbClr val="1A1A1A"/>
+                          </a:solidFill>
+                          <a:latin typeface="Calibri"/>
+                        </a:rPr>
+                        <a:t>Meinung; Finanzen/Konsolidierung sind K.o.-relevant</a:t>
+                      </a:r>
+                    </a:p>
+                  </a:txBody>
+                  <a:tcPr marL="45720" marR="45720" marT="18288" marB="18288">
+                    <a:solidFill>
+                      <a:srgbClr val="EEF3F8"/>
+                    </a:solidFill>
+                  </a:tcPr>
+                </a:tc>
+                <a:tc>
+                  <a:txBody>
+                    <a:bodyPr/>
+                    <a:lstStyle/>
+                    <a:p>
+                      <a:r>
+                        <a:rPr sz="680" b="0">
+                          <a:solidFill>
+                            <a:srgbClr val="1A1A1A"/>
+                          </a:solidFill>
+                          <a:latin typeface="Calibri"/>
+                        </a:rPr>
+                        <a:t>Nicht als Kriterium übernommen</a:t>
+                      </a:r>
+                    </a:p>
+                  </a:txBody>
+                  <a:tcPr marL="45720" marR="45720" marT="18288" marB="18288">
+                    <a:solidFill>
+                      <a:srgbClr val="EEF3F8"/>
+                    </a:solidFill>
+                  </a:tcPr>
+                </a:tc>
+              </a:tr>
+            </a:tbl>
+          </a:graphicData>
+        </a:graphic>
+      </p:graphicFrame>
+    </p:spTree>
+  </p:cSld>
+  <p:clrMapOvr>
+    <a:masterClrMapping/>
+  </p:clrMapOvr>
+</p:sld>
+</file>
+
+<file path=ppt/slides/slide15.xml><?xml version="1.0" encoding="utf-8"?>
+<p:sld xmlns:a="http://schemas.openxmlformats.org/drawingml/2006/main" xmlns:p="http://schemas.openxmlformats.org/presentationml/2006/main" xmlns:r="http://schemas.openxmlformats.org/officeDocument/2006/relationships">
+  <p:cSld>
+    <p:spTree>
+      <p:nvGrpSpPr>
+        <p:cNvPr id="1" name=""/>
+        <p:cNvGrpSpPr/>
+        <p:nvPr/>
+      </p:nvGrpSpPr>
+      <p:grpSpPr/>
+      <p:sp>
+        <p:nvSpPr>
+          <p:cNvPr id="2" name="Rectangle 1"/>
+          <p:cNvSpPr/>
+          <p:nvPr/>
+        </p:nvSpPr>
+        <p:spPr>
+          <a:xfrm>
+            <a:off x="0" y="0"/>
+            <a:ext cx="12191695" cy="73152"/>
+          </a:xfrm>
+          <a:prstGeom prst="rect">
+            <a:avLst/>
+          </a:prstGeom>
+          <a:solidFill>
+            <a:srgbClr val="1F4E79"/>
+          </a:solidFill>
+          <a:ln>
+            <a:noFill/>
+          </a:ln>
+          <a:effectLst/>
+        </p:spPr>
+        <p:txBody>
+          <a:bodyPr rtlCol="0" anchor="ctr"/>
+          <a:lstStyle/>
+          <a:p>
+            <a:pPr algn="ctr"/>
+          </a:p>
+        </p:txBody>
+      </p:sp>
+      <p:sp>
+        <p:nvSpPr>
+          <p:cNvPr id="3" name="Rectangle 2"/>
+          <p:cNvSpPr/>
+          <p:nvPr/>
+        </p:nvSpPr>
+        <p:spPr>
+          <a:xfrm>
+            <a:off x="457200" y="182880"/>
+            <a:ext cx="10972800" cy="274320"/>
+          </a:xfrm>
+          <a:prstGeom prst="rect">
+            <a:avLst/>
+          </a:prstGeom>
+          <a:noFill/>
+          <a:ln>
+            <a:noFill/>
+          </a:ln>
+          <a:effectLst/>
+        </p:spPr>
+        <p:txBody>
+          <a:bodyPr rtlCol="0" anchor="t" wrap="square" lIns="45720" rIns="45720"/>
+          <a:lstStyle/>
+          <a:p>
+            <a:pPr algn="l">
+              <a:spcAft>
+                <a:spcPts val="200"/>
+              </a:spcAft>
+            </a:pPr>
+            <a:r>
+              <a:rPr sz="1100" b="1">
+                <a:solidFill>
+                  <a:srgbClr val="C55A11"/>
+                </a:solidFill>
+                <a:latin typeface="Calibri"/>
+              </a:rPr>
+              <a:t>ANHANG</a:t>
+            </a:r>
+          </a:p>
+        </p:txBody>
+      </p:sp>
+      <p:sp>
+        <p:nvSpPr>
+          <p:cNvPr id="4" name="Rectangle 3"/>
+          <p:cNvSpPr/>
+          <p:nvPr/>
+        </p:nvSpPr>
+        <p:spPr>
+          <a:xfrm>
+            <a:off x="457200" y="411480"/>
+            <a:ext cx="11247120" cy="822960"/>
+          </a:xfrm>
+          <a:prstGeom prst="rect">
+            <a:avLst/>
+          </a:prstGeom>
+          <a:noFill/>
+          <a:ln>
+            <a:noFill/>
+          </a:ln>
+          <a:effectLst/>
+        </p:spPr>
+        <p:txBody>
+          <a:bodyPr rtlCol="0" anchor="t" wrap="square" lIns="45720" rIns="45720"/>
+          <a:lstStyle/>
+          <a:p>
+            <a:pPr algn="l">
+              <a:spcAft>
+                <a:spcPts val="200"/>
+              </a:spcAft>
+            </a:pPr>
+            <a:r>
+              <a:rPr sz="2400" b="1">
+                <a:solidFill>
+                  <a:srgbClr val="1F4E79"/>
+                </a:solidFill>
+                <a:latin typeface="Calibri"/>
+              </a:rPr>
+              <a:t>Anhang A10 – Länder und Rechtsrahmen: Inland, EU-Ausland, Drittland</a:t>
+            </a:r>
+          </a:p>
+        </p:txBody>
+      </p:sp>
+      <p:sp>
+        <p:nvSpPr>
+          <p:cNvPr id="5" name="Rectangle 4"/>
+          <p:cNvSpPr/>
+          <p:nvPr/>
+        </p:nvSpPr>
+        <p:spPr>
+          <a:xfrm>
+            <a:off x="457200" y="6473952"/>
+            <a:ext cx="8229600" cy="274320"/>
+          </a:xfrm>
+          <a:prstGeom prst="rect">
+            <a:avLst/>
+          </a:prstGeom>
+          <a:noFill/>
+          <a:ln>
+            <a:noFill/>
+          </a:ln>
+          <a:effectLst/>
+        </p:spPr>
+        <p:txBody>
+          <a:bodyPr rtlCol="0" anchor="t" wrap="square" lIns="45720" rIns="45720"/>
+          <a:lstStyle/>
+          <a:p>
+            <a:pPr algn="l">
+              <a:spcAft>
+                <a:spcPts val="200"/>
+              </a:spcAft>
+            </a:pPr>
+            <a:r>
+              <a:rPr sz="900" b="0">
+                <a:solidFill>
+                  <a:srgbClr val="595959"/>
+                </a:solidFill>
+                <a:latin typeface="Calibri"/>
+              </a:rPr>
+              <a:t>HTWG Konstanz · ERP-Systeme · Fallstudie KVA · Entscheidungsvorlage ERP 2028</a:t>
+            </a:r>
+          </a:p>
+        </p:txBody>
+      </p:sp>
+      <p:sp>
+        <p:nvSpPr>
+          <p:cNvPr id="6" name="Rectangle 5"/>
+          <p:cNvSpPr/>
+          <p:nvPr/>
+        </p:nvSpPr>
+        <p:spPr>
+          <a:xfrm>
+            <a:off x="11155680" y="6473952"/>
+            <a:ext cx="640080" cy="274320"/>
+          </a:xfrm>
+          <a:prstGeom prst="rect">
+            <a:avLst/>
+          </a:prstGeom>
+          <a:noFill/>
+          <a:ln>
+            <a:noFill/>
+          </a:ln>
+          <a:effectLst/>
+        </p:spPr>
+        <p:txBody>
+          <a:bodyPr rtlCol="0" anchor="t" wrap="square" lIns="45720" rIns="45720"/>
+          <a:lstStyle/>
+          <a:p>
+            <a:pPr algn="r">
+              <a:spcAft>
+                <a:spcPts val="200"/>
+              </a:spcAft>
+            </a:pPr>
+            <a:r>
+              <a:rPr sz="900" b="0">
+                <a:solidFill>
+                  <a:srgbClr val="595959"/>
+                </a:solidFill>
+                <a:latin typeface="Calibri"/>
+              </a:rPr>
+              <a:t>A10</a:t>
+            </a:r>
+          </a:p>
+        </p:txBody>
+      </p:sp>
+      <p:graphicFrame>
+        <p:nvGraphicFramePr>
+          <p:cNvPr id="7" name="Table 6"/>
+          <p:cNvGraphicFramePr>
+            <a:graphicFrameLocks noGrp="1"/>
+          </p:cNvGraphicFramePr>
+          <p:nvPr/>
+        </p:nvGraphicFramePr>
+        <p:xfrm>
+          <a:off x="320040" y="1188720"/>
+          <a:ext cx="11567160" cy="3840480"/>
+        </p:xfrm>
+        <a:graphic>
+          <a:graphicData uri="http://schemas.openxmlformats.org/drawingml/2006/table">
+            <a:tbl>
+              <a:tblPr firstRow="1" bandRow="1">
+                <a:tableStyleId>{5C22544A-7EE6-4342-B048-85BDC9FD1C3A}</a:tableStyleId>
+              </a:tblPr>
+              <a:tblGrid>
+                <a:gridCol w="1828800"/>
+                <a:gridCol w="1280160"/>
+                <a:gridCol w="5029200"/>
+                <a:gridCol w="3429000"/>
+              </a:tblGrid>
+              <a:tr h="768096">
+                <a:tc>
+                  <a:txBody>
+                    <a:bodyPr/>
+                    <a:lstStyle/>
+                    <a:p>
+                      <a:r>
+                        <a:rPr sz="950" b="1">
+                          <a:solidFill>
+                            <a:srgbClr val="FFFFFF"/>
+                          </a:solidFill>
+                          <a:latin typeface="Calibri"/>
+                        </a:rPr>
+                        <a:t>Gesellschaft</a:t>
+                      </a:r>
+                    </a:p>
+                  </a:txBody>
+                  <a:tcPr marL="45720" marR="45720" marT="18288" marB="18288">
+                    <a:solidFill>
+                      <a:srgbClr val="1F4E79"/>
+                    </a:solidFill>
+                  </a:tcPr>
+                </a:tc>
+                <a:tc>
+                  <a:txBody>
+                    <a:bodyPr/>
+                    <a:lstStyle/>
+                    <a:p>
+                      <a:r>
+                        <a:rPr sz="950" b="1">
+                          <a:solidFill>
+                            <a:srgbClr val="FFFFFF"/>
+                          </a:solidFill>
+                          <a:latin typeface="Calibri"/>
+                        </a:rPr>
+                        <a:t>Status</a:t>
+                      </a:r>
+                    </a:p>
+                  </a:txBody>
+                  <a:tcPr marL="45720" marR="45720" marT="18288" marB="18288">
+                    <a:solidFill>
+                      <a:srgbClr val="1F4E79"/>
+                    </a:solidFill>
+                  </a:tcPr>
+                </a:tc>
+                <a:tc>
+                  <a:txBody>
+                    <a:bodyPr/>
+                    <a:lstStyle/>
+                    <a:p>
+                      <a:r>
+                        <a:rPr sz="950" b="1">
+                          <a:solidFill>
+                            <a:srgbClr val="FFFFFF"/>
+                          </a:solidFill>
+                          <a:latin typeface="Calibri"/>
+                        </a:rPr>
+                        <a:t>Rechtliche Anforderungen an das ERP</a:t>
+                      </a:r>
+                    </a:p>
+                  </a:txBody>
+                  <a:tcPr marL="45720" marR="45720" marT="18288" marB="18288">
+                    <a:solidFill>
+                      <a:srgbClr val="1F4E79"/>
+                    </a:solidFill>
+                  </a:tcPr>
+                </a:tc>
+                <a:tc>
+                  <a:txBody>
+                    <a:bodyPr/>
+                    <a:lstStyle/>
+                    <a:p>
+                      <a:r>
+                        <a:rPr sz="950" b="1">
+                          <a:solidFill>
+                            <a:srgbClr val="FFFFFF"/>
+                          </a:solidFill>
+                          <a:latin typeface="Calibri"/>
+                        </a:rPr>
+                        <a:t>Weitere Anforderungen</a:t>
+                      </a:r>
+                    </a:p>
+                  </a:txBody>
+                  <a:tcPr marL="45720" marR="45720" marT="18288" marB="18288">
+                    <a:solidFill>
+                      <a:srgbClr val="1F4E79"/>
+                    </a:solidFill>
+                  </a:tcPr>
+                </a:tc>
+              </a:tr>
+              <a:tr h="768096">
+                <a:tc>
+                  <a:txBody>
+                    <a:bodyPr/>
+                    <a:lstStyle/>
+                    <a:p>
+                      <a:r>
+                        <a:rPr sz="950" b="0">
+                          <a:solidFill>
+                            <a:srgbClr val="1A1A1A"/>
+                          </a:solidFill>
+                          <a:latin typeface="Calibri"/>
+                        </a:rPr>
+                        <a:t>Deutschland (Singen)</a:t>
+                      </a:r>
+                    </a:p>
+                  </a:txBody>
+                  <a:tcPr marL="45720" marR="45720" marT="18288" marB="18288">
+                    <a:solidFill>
+                      <a:srgbClr val="FFFFFF"/>
+                    </a:solidFill>
+                  </a:tcPr>
+                </a:tc>
+                <a:tc>
+                  <a:txBody>
+                    <a:bodyPr/>
+                    <a:lstStyle/>
+                    <a:p>
+                      <a:r>
+                        <a:rPr sz="950" b="0">
+                          <a:solidFill>
+                            <a:srgbClr val="1A1A1A"/>
+                          </a:solidFill>
+                          <a:latin typeface="Calibri"/>
+                        </a:rPr>
+                        <a:t>Inland</a:t>
+                      </a:r>
+                    </a:p>
+                  </a:txBody>
+                  <a:tcPr marL="45720" marR="45720" marT="18288" marB="18288">
+                    <a:solidFill>
+                      <a:srgbClr val="FFFFFF"/>
+                    </a:solidFill>
+                  </a:tcPr>
+                </a:tc>
+                <a:tc>
+                  <a:txBody>
+                    <a:bodyPr/>
+                    <a:lstStyle/>
+                    <a:p>
+                      <a:r>
+                        <a:rPr sz="950" b="0">
+                          <a:solidFill>
+                            <a:srgbClr val="1A1A1A"/>
+                          </a:solidFill>
+                          <a:latin typeface="Calibri"/>
+                        </a:rPr>
+                        <a:t>GoBD + Verfahrensdoku, HGB (IFRS künftig Kann), E-Rechnung Versand ab 01.01.2027, NIS2, BetrVG § 87/90, Exportkontrolle (BAFA, Dual-Use)</a:t>
+                      </a:r>
+                    </a:p>
+                  </a:txBody>
+                  <a:tcPr marL="45720" marR="45720" marT="18288" marB="18288">
+                    <a:solidFill>
+                      <a:srgbClr val="FFFFFF"/>
+                    </a:solidFill>
+                  </a:tcPr>
+                </a:tc>
+                <a:tc>
+                  <a:txBody>
+                    <a:bodyPr/>
+                    <a:lstStyle/>
+                    <a:p>
+                      <a:r>
+                        <a:rPr sz="950" b="0">
+                          <a:solidFill>
+                            <a:srgbClr val="1A1A1A"/>
+                          </a:solidFill>
+                          <a:latin typeface="Calibri"/>
+                        </a:rPr>
+                        <a:t>EUR, DATEV-Lohn-Schnittstelle, ELO-Archiv</a:t>
+                      </a:r>
+                    </a:p>
+                  </a:txBody>
+                  <a:tcPr marL="45720" marR="45720" marT="18288" marB="18288">
+                    <a:solidFill>
+                      <a:srgbClr val="FFFFFF"/>
+                    </a:solidFill>
+                  </a:tcPr>
+                </a:tc>
+              </a:tr>
+              <a:tr h="768096">
+                <a:tc>
+                  <a:txBody>
+                    <a:bodyPr/>
+                    <a:lstStyle/>
+                    <a:p>
+                      <a:r>
+                        <a:rPr sz="950" b="0">
+                          <a:solidFill>
+                            <a:srgbClr val="1A1A1A"/>
+                          </a:solidFill>
+                          <a:latin typeface="Calibri"/>
+                        </a:rPr>
+                        <a:t>Tschechien (Plzeň)</a:t>
+                      </a:r>
+                    </a:p>
+                  </a:txBody>
+                  <a:tcPr marL="45720" marR="45720" marT="18288" marB="18288">
+                    <a:solidFill>
+                      <a:srgbClr val="EEF3F8"/>
+                    </a:solidFill>
+                  </a:tcPr>
+                </a:tc>
+                <a:tc>
+                  <a:txBody>
+                    <a:bodyPr/>
+                    <a:lstStyle/>
+                    <a:p>
+                      <a:r>
+                        <a:rPr sz="950" b="0">
+                          <a:solidFill>
+                            <a:srgbClr val="1A1A1A"/>
+                          </a:solidFill>
+                          <a:latin typeface="Calibri"/>
+                        </a:rPr>
+                        <a:t>EU-Ausland</a:t>
+                      </a:r>
+                    </a:p>
+                  </a:txBody>
+                  <a:tcPr marL="45720" marR="45720" marT="18288" marB="18288">
+                    <a:solidFill>
+                      <a:srgbClr val="EEF3F8"/>
+                    </a:solidFill>
+                  </a:tcPr>
+                </a:tc>
+                <a:tc>
+                  <a:txBody>
+                    <a:bodyPr/>
+                    <a:lstStyle/>
+                    <a:p>
+                      <a:r>
+                        <a:rPr sz="950" b="0">
+                          <a:solidFill>
+                            <a:srgbClr val="1A1A1A"/>
+                          </a:solidFill>
+                          <a:latin typeface="Calibri"/>
+                        </a:rPr>
+                        <a:t>Kontrollmeldung (kontrolní hlášení), Intrastat, Zusammenfassende Meldung/VIES, CZ-Rechnungslegung, steuerfreie innergemeinschaftliche Lieferung, Verrechnungspreise IC</a:t>
+                      </a:r>
+                    </a:p>
+                  </a:txBody>
+                  <a:tcPr marL="45720" marR="45720" marT="18288" marB="18288">
+                    <a:solidFill>
+                      <a:srgbClr val="EEF3F8"/>
+                    </a:solidFill>
+                  </a:tcPr>
+                </a:tc>
+                <a:tc>
+                  <a:txBody>
+                    <a:bodyPr/>
+                    <a:lstStyle/>
+                    <a:p>
+                      <a:r>
+                        <a:rPr sz="950" b="0">
+                          <a:solidFill>
+                            <a:srgbClr val="1A1A1A"/>
+                          </a:solidFill>
+                          <a:latin typeface="Calibri"/>
+                        </a:rPr>
+                        <a:t>CZK, Oberfläche + Belege Tschechisch, lokaler Lohn-Dienstleister, CZ-sprachiger Partner</a:t>
+                      </a:r>
+                    </a:p>
+                  </a:txBody>
+                  <a:tcPr marL="45720" marR="45720" marT="18288" marB="18288">
+                    <a:solidFill>
+                      <a:srgbClr val="EEF3F8"/>
+                    </a:solidFill>
+                  </a:tcPr>
+                </a:tc>
+              </a:tr>
+              <a:tr h="768096">
+                <a:tc>
+                  <a:txBody>
+                    <a:bodyPr/>
+                    <a:lstStyle/>
+                    <a:p>
+                      <a:r>
+                        <a:rPr sz="950" b="0">
+                          <a:solidFill>
+                            <a:srgbClr val="1A1A1A"/>
+                          </a:solidFill>
+                          <a:latin typeface="Calibri"/>
+                        </a:rPr>
+                        <a:t>Schweiz (Kreuzlingen)</a:t>
+                      </a:r>
+                    </a:p>
+                  </a:txBody>
+                  <a:tcPr marL="45720" marR="45720" marT="18288" marB="18288">
+                    <a:solidFill>
+                      <a:srgbClr val="FFFFFF"/>
+                    </a:solidFill>
+                  </a:tcPr>
+                </a:tc>
+                <a:tc>
+                  <a:txBody>
+                    <a:bodyPr/>
+                    <a:lstStyle/>
+                    <a:p>
+                      <a:r>
+                        <a:rPr sz="950" b="0">
+                          <a:solidFill>
+                            <a:srgbClr val="1A1A1A"/>
+                          </a:solidFill>
+                          <a:latin typeface="Calibri"/>
+                        </a:rPr>
+                        <a:t>Drittland (nicht EU)</a:t>
+                      </a:r>
+                    </a:p>
+                  </a:txBody>
+                  <a:tcPr marL="45720" marR="45720" marT="18288" marB="18288">
+                    <a:solidFill>
+                      <a:srgbClr val="FFFFFF"/>
+                    </a:solidFill>
+                  </a:tcPr>
+                </a:tc>
+                <a:tc>
+                  <a:txBody>
+                    <a:bodyPr/>
+                    <a:lstStyle/>
+                    <a:p>
+                      <a:r>
+                        <a:rPr sz="950" b="0">
+                          <a:solidFill>
+                            <a:srgbClr val="1A1A1A"/>
+                          </a:solidFill>
+                          <a:latin typeface="Calibri"/>
+                        </a:rPr>
+                        <a:t>Zoll: Ausfuhranmeldung (ATLAS) + Ursprungsnachweise für jede Lieferung, MWST CH, QR-Rechnung, Datenschutz revDSG</a:t>
+                      </a:r>
+                    </a:p>
+                  </a:txBody>
+                  <a:tcPr marL="45720" marR="45720" marT="18288" marB="18288">
+                    <a:solidFill>
+                      <a:srgbClr val="FFFFFF"/>
+                    </a:solidFill>
+                  </a:tcPr>
+                </a:tc>
+                <a:tc>
+                  <a:txBody>
+                    <a:bodyPr/>
+                    <a:lstStyle/>
+                    <a:p>
+                      <a:r>
+                        <a:rPr sz="950" b="0">
+                          <a:solidFill>
+                            <a:srgbClr val="1A1A1A"/>
+                          </a:solidFill>
+                          <a:latin typeface="Calibri"/>
+                        </a:rPr>
+                        <a:t>CHF, Bexio ablösen, Servicetechniker CH in Phase 1b</a:t>
+                      </a:r>
+                    </a:p>
+                  </a:txBody>
+                  <a:tcPr marL="45720" marR="45720" marT="18288" marB="18288">
+                    <a:solidFill>
+                      <a:srgbClr val="FFFFFF"/>
+                    </a:solidFill>
+                  </a:tcPr>
+                </a:tc>
+              </a:tr>
+              <a:tr h="768096">
+                <a:tc>
+                  <a:txBody>
+                    <a:bodyPr/>
+                    <a:lstStyle/>
+                    <a:p>
+                      <a:r>
+                        <a:rPr sz="950" b="0">
+                          <a:solidFill>
+                            <a:srgbClr val="1A1A1A"/>
+                          </a:solidFill>
+                          <a:latin typeface="Calibri"/>
+                        </a:rPr>
+                        <a:t>Datenstandort / Anbieter</a:t>
+                      </a:r>
+                    </a:p>
+                  </a:txBody>
+                  <a:tcPr marL="45720" marR="45720" marT="18288" marB="18288">
+                    <a:solidFill>
+                      <a:srgbClr val="EEF3F8"/>
+                    </a:solidFill>
+                  </a:tcPr>
+                </a:tc>
+                <a:tc>
+                  <a:txBody>
+                    <a:bodyPr/>
+                    <a:lstStyle/>
+                    <a:p>
+                      <a:r>
+                        <a:rPr sz="950" b="0">
+                          <a:solidFill>
+                            <a:srgbClr val="1A1A1A"/>
+                          </a:solidFill>
+                          <a:latin typeface="Calibri"/>
+                        </a:rPr>
+                        <a:t>EU vs. USA</a:t>
+                      </a:r>
+                    </a:p>
+                  </a:txBody>
+                  <a:tcPr marL="45720" marR="45720" marT="18288" marB="18288">
+                    <a:solidFill>
+                      <a:srgbClr val="EEF3F8"/>
+                    </a:solidFill>
+                  </a:tcPr>
+                </a:tc>
+                <a:tc>
+                  <a:txBody>
+                    <a:bodyPr/>
+                    <a:lstStyle/>
+                    <a:p>
+                      <a:r>
+                        <a:rPr sz="950" b="0">
+                          <a:solidFill>
+                            <a:srgbClr val="1A1A1A"/>
+                          </a:solidFill>
+                          <a:latin typeface="Calibri"/>
+                        </a:rPr>
+                        <a:t>EU-Rechenzentrum + AVV; bei US-Anbietern CLOUD Act als Restrisiko (Brenner, BR); Option Datenhaltung DE für Wehrtechnik abfragen</a:t>
+                      </a:r>
+                    </a:p>
+                  </a:txBody>
+                  <a:tcPr marL="45720" marR="45720" marT="18288" marB="18288">
+                    <a:solidFill>
+                      <a:srgbClr val="EEF3F8"/>
+                    </a:solidFill>
+                  </a:tcPr>
+                </a:tc>
+                <a:tc>
+                  <a:txBody>
+                    <a:bodyPr/>
+                    <a:lstStyle/>
+                    <a:p>
+                      <a:r>
+                        <a:rPr sz="950" b="0">
+                          <a:solidFill>
+                            <a:srgbClr val="1A1A1A"/>
+                          </a:solidFill>
+                          <a:latin typeface="Calibri"/>
+                        </a:rPr>
+                        <a:t>BC: Azure EU-Region + Plan B Hosting DE; APplus DE; IFS EU (SE)</a:t>
+                      </a:r>
+                    </a:p>
+                  </a:txBody>
+                  <a:tcPr marL="45720" marR="45720" marT="18288" marB="18288">
+                    <a:solidFill>
+                      <a:srgbClr val="EEF3F8"/>
+                    </a:solidFill>
+                  </a:tcPr>
+                </a:tc>
+              </a:tr>
+            </a:tbl>
+          </a:graphicData>
+        </a:graphic>
+      </p:graphicFrame>
+      <p:sp>
+        <p:nvSpPr>
+          <p:cNvPr id="8" name="Rectangle 7"/>
+          <p:cNvSpPr/>
+          <p:nvPr/>
+        </p:nvSpPr>
+        <p:spPr>
+          <a:xfrm>
+            <a:off x="320040" y="5212080"/>
+            <a:ext cx="11567160" cy="914400"/>
+          </a:xfrm>
+          <a:prstGeom prst="rect">
+            <a:avLst/>
+          </a:prstGeom>
+          <a:solidFill>
+            <a:srgbClr val="EEF3F8"/>
+          </a:solidFill>
+          <a:ln>
+            <a:noFill/>
+          </a:ln>
+          <a:effectLst/>
+        </p:spPr>
+        <p:txBody>
+          <a:bodyPr rtlCol="0" anchor="t" wrap="square" tIns="91440" bIns="91440"/>
+          <a:lstStyle/>
+          <a:p>
+            <a:pPr algn="l">
+              <a:spcAft>
+                <a:spcPts val="200"/>
+              </a:spcAft>
+            </a:pPr>
+            <a:r>
+              <a:rPr sz="1050" b="0">
+                <a:solidFill>
+                  <a:srgbClr val="1A1A1A"/>
+                </a:solidFill>
+                <a:latin typeface="Calibri"/>
+              </a:rPr>
+              <a:t>Folge für die Auswahl: Lokalisierung für DE, CZ und CH ist K.o.-Kriterium K4, mehrere Gesellschaften und Währungen K3. Schweiz-Lieferungen brauchen heute Papier-Zolldokumente (Interview 08) – Zoll/ATLAS-Anbindung ist Muss (L-006). Datenhaltung: EU-Rechenzentrum ist K7; die Schweiz erkennt das EU-Datenschutzniveau als angemessen an.</a:t>
+            </a:r>
+          </a:p>
+        </p:txBody>
+      </p:sp>
+    </p:spTree>
+  </p:cSld>
+  <p:clrMapOvr>
+    <a:masterClrMapping/>
+  </p:clrMapOvr>
+</p:sld>
+</file>
+
+<file path=ppt/slides/slide16.xml><?xml version="1.0" encoding="utf-8"?>
+<p:sld xmlns:a="http://schemas.openxmlformats.org/drawingml/2006/main" xmlns:p="http://schemas.openxmlformats.org/presentationml/2006/main" xmlns:r="http://schemas.openxmlformats.org/officeDocument/2006/relationships">
+  <p:cSld>
+    <p:spTree>
+      <p:nvGrpSpPr>
+        <p:cNvPr id="1" name=""/>
+        <p:cNvGrpSpPr/>
+        <p:nvPr/>
+      </p:nvGrpSpPr>
+      <p:grpSpPr/>
+      <p:sp>
+        <p:nvSpPr>
+          <p:cNvPr id="2" name="Rectangle 1"/>
+          <p:cNvSpPr/>
+          <p:nvPr/>
+        </p:nvSpPr>
+        <p:spPr>
+          <a:xfrm>
+            <a:off x="0" y="0"/>
+            <a:ext cx="12191695" cy="73152"/>
+          </a:xfrm>
+          <a:prstGeom prst="rect">
+            <a:avLst/>
+          </a:prstGeom>
+          <a:solidFill>
+            <a:srgbClr val="1F4E79"/>
+          </a:solidFill>
+          <a:ln>
+            <a:noFill/>
+          </a:ln>
+          <a:effectLst/>
+        </p:spPr>
+        <p:txBody>
+          <a:bodyPr rtlCol="0" anchor="ctr"/>
+          <a:lstStyle/>
+          <a:p>
+            <a:pPr algn="ctr"/>
+          </a:p>
+        </p:txBody>
+      </p:sp>
+      <p:sp>
+        <p:nvSpPr>
+          <p:cNvPr id="3" name="Rectangle 2"/>
+          <p:cNvSpPr/>
+          <p:nvPr/>
+        </p:nvSpPr>
+        <p:spPr>
+          <a:xfrm>
+            <a:off x="457200" y="182880"/>
+            <a:ext cx="10972800" cy="274320"/>
+          </a:xfrm>
+          <a:prstGeom prst="rect">
+            <a:avLst/>
+          </a:prstGeom>
+          <a:noFill/>
+          <a:ln>
+            <a:noFill/>
+          </a:ln>
+          <a:effectLst/>
+        </p:spPr>
+        <p:txBody>
+          <a:bodyPr rtlCol="0" anchor="t" wrap="square" lIns="45720" rIns="45720"/>
+          <a:lstStyle/>
+          <a:p>
+            <a:pPr algn="l">
+              <a:spcAft>
+                <a:spcPts val="200"/>
+              </a:spcAft>
+            </a:pPr>
+            <a:r>
+              <a:rPr sz="1100" b="1">
+                <a:solidFill>
+                  <a:srgbClr val="C55A11"/>
+                </a:solidFill>
+                <a:latin typeface="Calibri"/>
+              </a:rPr>
+              <a:t>ANHANG</a:t>
+            </a:r>
+          </a:p>
+        </p:txBody>
+      </p:sp>
+      <p:sp>
+        <p:nvSpPr>
+          <p:cNvPr id="4" name="Rectangle 3"/>
+          <p:cNvSpPr/>
+          <p:nvPr/>
+        </p:nvSpPr>
+        <p:spPr>
+          <a:xfrm>
+            <a:off x="457200" y="411480"/>
+            <a:ext cx="11247120" cy="822960"/>
+          </a:xfrm>
+          <a:prstGeom prst="rect">
+            <a:avLst/>
+          </a:prstGeom>
+          <a:noFill/>
+          <a:ln>
+            <a:noFill/>
+          </a:ln>
+          <a:effectLst/>
+        </p:spPr>
+        <p:txBody>
+          <a:bodyPr rtlCol="0" anchor="t" wrap="square" lIns="45720" rIns="45720"/>
+          <a:lstStyle/>
+          <a:p>
+            <a:pPr algn="l">
+              <a:spcAft>
+                <a:spcPts val="200"/>
+              </a:spcAft>
+            </a:pPr>
+            <a:r>
+              <a:rPr sz="2400" b="1">
+                <a:solidFill>
+                  <a:srgbClr val="1F4E79"/>
+                </a:solidFill>
+                <a:latin typeface="Calibri"/>
+              </a:rPr>
+              <a:t>Anhang A11 – Quellen</a:t>
+            </a:r>
+          </a:p>
+        </p:txBody>
+      </p:sp>
+      <p:sp>
+        <p:nvSpPr>
+          <p:cNvPr id="5" name="Rectangle 4"/>
+          <p:cNvSpPr/>
+          <p:nvPr/>
+        </p:nvSpPr>
+        <p:spPr>
+          <a:xfrm>
+            <a:off x="457200" y="6473952"/>
+            <a:ext cx="8229600" cy="274320"/>
+          </a:xfrm>
+          <a:prstGeom prst="rect">
+            <a:avLst/>
+          </a:prstGeom>
+          <a:noFill/>
+          <a:ln>
+            <a:noFill/>
+          </a:ln>
+          <a:effectLst/>
+        </p:spPr>
+        <p:txBody>
+          <a:bodyPr rtlCol="0" anchor="t" wrap="square" lIns="45720" rIns="45720"/>
+          <a:lstStyle/>
+          <a:p>
+            <a:pPr algn="l">
+              <a:spcAft>
+                <a:spcPts val="200"/>
+              </a:spcAft>
+            </a:pPr>
+            <a:r>
+              <a:rPr sz="900" b="0">
+                <a:solidFill>
+                  <a:srgbClr val="595959"/>
+                </a:solidFill>
+                <a:latin typeface="Calibri"/>
+              </a:rPr>
+              <a:t>HTWG Konstanz · ERP-Systeme · Fallstudie KVA · Entscheidungsvorlage ERP 2028</a:t>
+            </a:r>
+          </a:p>
+        </p:txBody>
+      </p:sp>
+      <p:sp>
+        <p:nvSpPr>
+          <p:cNvPr id="6" name="Rectangle 5"/>
+          <p:cNvSpPr/>
+          <p:nvPr/>
+        </p:nvSpPr>
+        <p:spPr>
+          <a:xfrm>
+            <a:off x="11155680" y="6473952"/>
+            <a:ext cx="640080" cy="274320"/>
+          </a:xfrm>
+          <a:prstGeom prst="rect">
+            <a:avLst/>
+          </a:prstGeom>
+          <a:noFill/>
+          <a:ln>
+            <a:noFill/>
+          </a:ln>
+          <a:effectLst/>
+        </p:spPr>
+        <p:txBody>
+          <a:bodyPr rtlCol="0" anchor="t" wrap="square" lIns="45720" rIns="45720"/>
+          <a:lstStyle/>
+          <a:p>
+            <a:pPr algn="r">
+              <a:spcAft>
+                <a:spcPts val="200"/>
+              </a:spcAft>
+            </a:pPr>
+            <a:r>
+              <a:rPr sz="900" b="0">
+                <a:solidFill>
+                  <a:srgbClr val="595959"/>
+                </a:solidFill>
+                <a:latin typeface="Calibri"/>
+              </a:rPr>
+              <a:t>A11</a:t>
             </a:r>
           </a:p>
         </p:txBody>
@@ -9120,13 +17125,29 @@
               </a:spcAft>
             </a:pPr>
             <a:r>
-              <a:rPr sz="1000" b="0">
+              <a:rPr sz="950" b="0">
+                <a:solidFill>
+                  <a:srgbClr val="1A1A1A"/>
+                </a:solidFill>
+                <a:latin typeface="Calibri"/>
+              </a:rPr>
+              <a:t>Ausland beachtet: CZ = EU (Intrastat, Kontrollmeldung, CZ-Sprache) · CH = Drittland (Zoll bei jeder Lieferung, MWST, QR-Rechnung, CHF) → K3/K4, Anhang A10</a:t>
+            </a:r>
+          </a:p>
+          <a:p>
+            <a:pPr algn="l">
+              <a:spcAft>
+                <a:spcPts val="200"/>
+              </a:spcAft>
+            </a:pPr>
+            <a:r>
+              <a:rPr sz="950" b="0">
                 <a:solidFill>
                   <a:srgbClr val="595959"/>
                 </a:solidFill>
                 <a:latin typeface="Calibri"/>
               </a:rPr>
-              <a:t>Bewusst KEIN K.o.: Offline-Konfigurator auf dem iPad mit 3D, feste Oberfläche wie KVA-WARE, Anbieter „aus Süddeutschland“ – das sind Lösungsvorgaben oder Präferenzen, keine Anforderungen.</a:t>
+              <a:t>20 Störinformationen bewusst aussortiert (veraltetes Lastenheft 2015, Anekdoten, iPad-3D-Wunsch, falsche Zahlen) → Anhang A9</a:t>
             </a:r>
           </a:p>
         </p:txBody>
@@ -9816,13 +17837,29 @@
               </a:spcAft>
             </a:pPr>
             <a:r>
-              <a:rPr sz="1100" b="1">
+              <a:rPr sz="1050" b="1">
                 <a:solidFill>
                   <a:srgbClr val="1F4E79"/>
                 </a:solidFill>
                 <a:latin typeface="Calibri"/>
               </a:rPr>
-              <a:t>Shortlist: ① Business Central + Branchenlösung (SaaS, Plan B Hosting, CZ-Lokalisierung von Microsoft)   ② Asseco APplus (Variantenfertigung DE, CZ-Lokalisierung im RFI bestätigen)   ③ IFS Cloud (ETO/Service, EU-Anbieter, SaaS oder kundenbetrieben)</a:t>
+              <a:t>Shortlist:  ① Business Central + Branchenlösung – Abo je Nutzer, SaaS mit Hosting als Plan B, CZ-Lokalisierung von Microsoft</a:t>
+            </a:r>
+          </a:p>
+          <a:p>
+            <a:pPr algn="l">
+              <a:spcAft>
+                <a:spcPts val="200"/>
+              </a:spcAft>
+            </a:pPr>
+            <a:r>
+              <a:rPr sz="1050" b="1">
+                <a:solidFill>
+                  <a:srgbClr val="1F4E79"/>
+                </a:solidFill>
+                <a:latin typeface="Calibri"/>
+              </a:rPr>
+              <a:t>② Asseco APplus – Kauflizenz oder Abo, Spezialist Variantenfertigung, CZ-Lokalisierung im RFI bestätigen   ③ IFS Cloud – Abo, ETO/Service-stark, EU-Anbieter, SaaS oder kundenbetrieben</a:t>
             </a:r>
           </a:p>
         </p:txBody>
@@ -9863,7 +17900,7 @@
                 </a:solidFill>
                 <a:latin typeface="Calibri"/>
               </a:rPr>
-              <a:t>Quellen: Herstellerseiten und Primärquellen (Abruf 10/2026): learn.microsoft.com (BC CZ-Lokalisierung), erp-software.org/applus, ifs.com Partnerverzeichnis, SAP KBA 3744200; vollständige Longlist mit Begründung und Prüfstatus: XLSX Blatt 5, Anhang A2.</a:t>
+              <a:t>Quellen: Herstellerseiten und Primärquellen (Abruf 10/2026): learn.microsoft.com (BC CZ-Lokalisierung), erp-software.org/applus, ifs.com Partnerverzeichnis, SAP KBA 3744200; vollständige Longlist mit Begründung: XLSX Blatt 5, Anhang A7; Lizenzmodelle: Anhang A8.</a:t>
             </a:r>
           </a:p>
         </p:txBody>
@@ -10726,7 +18763,7 @@
                 </a:solidFill>
                 <a:latin typeface="Calibri"/>
               </a:rPr>
-              <a:t>• IFS liegt 0,34 Punkte vor BC – vor allem bei ETO, Service und Konfigurator (Phase-2-Themen bzw. PoC-prüfbar).</a:t>
+              <a:t>• IFS liegt 0,34 Punkte vor BC (ETO, Service, Konfigurator) – kostet aber rund 1,2 Mio. € (+46 %) mehr.</a:t>
             </a:r>
           </a:p>
           <a:p>
@@ -10742,7 +18779,7 @@
                 </a:solidFill>
                 <a:latin typeface="Calibri"/>
               </a:rPr>
-              <a:t>• IFS kostet rund 1,2 Mio. € (+46 %) mehr; BC ist bei „Fokus Zeit &amp; Pilsen“ gleichauf mit IFS (Sensitivität, A3).</a:t>
+              <a:t>• BC: bester Nutzen je Euro, einziger Weg zu Pilsen vor Ende 2027, Hosting als Plan B; bei „Fokus Zeit &amp; Pilsen“ gleichauf mit IFS (A3).</a:t>
             </a:r>
           </a:p>
           <a:p>
@@ -10759,6 +18796,22 @@
                 <a:latin typeface="Calibri"/>
               </a:rPr>
               <a:t>• APplus fällt wegen offener CZ-Lokalisierung zurück – bei Bestätigung im RFI Platz 2.</a:t>
+            </a:r>
+          </a:p>
+          <a:p>
+            <a:pPr algn="l">
+              <a:spcAft>
+                <a:spcPts val="200"/>
+              </a:spcAft>
+            </a:pPr>
+            <a:r>
+              <a:rPr sz="1050" b="0">
+                <a:solidFill>
+                  <a:srgbClr val="1A1A1A"/>
+                </a:solidFill>
+                <a:latin typeface="Calibri"/>
+              </a:rPr>
+              <a:t>• Vollkosten je Nutzer und Monat: BC ≈ 190 €, APplus ≈ 230 €, IFS ≈ 275 € (230 Nutzer, 60 Monate).</a:t>
             </a:r>
           </a:p>
         </p:txBody>
@@ -10815,7 +18868,7 @@
                 </a:solidFill>
                 <a:latin typeface="Calibri"/>
               </a:rPr>
-              <a:t>• Der Projektauftrag rechnet interne Kosten mit 120 T€ (realistisch 350–450 T€) und nur 3 Jahre Lizenzen.</a:t>
+              <a:t>• Der Projektauftrag rechnet interne Kosten mit 120 T€ (realistisch 350–450 T€). Selbst in seiner Logik (Einführung + 3 J. Lizenzen) kostet BC ≈ 1,9 Mio. €.</a:t>
             </a:r>
           </a:p>
           <a:p>
@@ -12023,22 +20076,20 @@
         </p:nvSpPr>
         <p:spPr>
           <a:xfrm>
-            <a:off x="457200" y="3840480"/>
-            <a:ext cx="6949440" cy="2286000"/>
+            <a:off x="457200" y="3703320"/>
+            <a:ext cx="6949440" cy="274320"/>
           </a:xfrm>
           <a:prstGeom prst="rect">
             <a:avLst/>
           </a:prstGeom>
-          <a:solidFill>
-            <a:srgbClr val="EEF3F8"/>
-          </a:solidFill>
+          <a:noFill/>
           <a:ln>
             <a:noFill/>
           </a:ln>
           <a:effectLst/>
         </p:spPr>
         <p:txBody>
-          <a:bodyPr rtlCol="0" anchor="t" wrap="square" lIns="109728" rIns="109728" tIns="109728" bIns="109728"/>
+          <a:bodyPr rtlCol="0" anchor="t" wrap="square" lIns="45720" rIns="45720"/>
           <a:lstStyle/>
           <a:p>
             <a:pPr algn="l">
@@ -12053,9 +20104,537 @@
                 </a:solidFill>
                 <a:latin typeface="Calibri"/>
               </a:rPr>
-              <a:t>Warum Business Central?</a:t>
+              <a:t>Was die Empfehlung für Sie bedeutet</a:t>
             </a:r>
           </a:p>
+        </p:txBody>
+      </p:sp>
+      <p:graphicFrame>
+        <p:nvGraphicFramePr>
+          <p:cNvPr id="28" name="Table 27"/>
+          <p:cNvGraphicFramePr>
+            <a:graphicFrameLocks noGrp="1"/>
+          </p:cNvGraphicFramePr>
+          <p:nvPr/>
+        </p:nvGraphicFramePr>
+        <p:xfrm>
+          <a:off x="457200" y="3977639"/>
+          <a:ext cx="6949440" cy="1828800"/>
+        </p:xfrm>
+        <a:graphic>
+          <a:graphicData uri="http://schemas.openxmlformats.org/drawingml/2006/table">
+            <a:tbl>
+              <a:tblPr firstRow="1" bandRow="1">
+                <a:tableStyleId>{5C22544A-7EE6-4342-B048-85BDC9FD1C3A}</a:tableStyleId>
+              </a:tblPr>
+              <a:tblGrid>
+                <a:gridCol w="1600200"/>
+                <a:gridCol w="2514600"/>
+                <a:gridCol w="2834640"/>
+              </a:tblGrid>
+              <a:tr h="261257">
+                <a:tc>
+                  <a:txBody>
+                    <a:bodyPr/>
+                    <a:lstStyle/>
+                    <a:p>
+                      <a:r>
+                        <a:rPr sz="750" b="1">
+                          <a:solidFill>
+                            <a:srgbClr val="FFFFFF"/>
+                          </a:solidFill>
+                          <a:latin typeface="Calibri"/>
+                        </a:rPr>
+                        <a:t>Wer</a:t>
+                      </a:r>
+                    </a:p>
+                  </a:txBody>
+                  <a:tcPr marL="45720" marR="45720" marT="18288" marB="18288">
+                    <a:solidFill>
+                      <a:srgbClr val="1F4E79"/>
+                    </a:solidFill>
+                  </a:tcPr>
+                </a:tc>
+                <a:tc>
+                  <a:txBody>
+                    <a:bodyPr/>
+                    <a:lstStyle/>
+                    <a:p>
+                      <a:r>
+                        <a:rPr sz="750" b="1">
+                          <a:solidFill>
+                            <a:srgbClr val="FFFFFF"/>
+                          </a:solidFill>
+                          <a:latin typeface="Calibri"/>
+                        </a:rPr>
+                        <a:t>Ihr Anliegen</a:t>
+                      </a:r>
+                    </a:p>
+                  </a:txBody>
+                  <a:tcPr marL="45720" marR="45720" marT="18288" marB="18288">
+                    <a:solidFill>
+                      <a:srgbClr val="1F4E79"/>
+                    </a:solidFill>
+                  </a:tcPr>
+                </a:tc>
+                <a:tc>
+                  <a:txBody>
+                    <a:bodyPr/>
+                    <a:lstStyle/>
+                    <a:p>
+                      <a:r>
+                        <a:rPr sz="750" b="1">
+                          <a:solidFill>
+                            <a:srgbClr val="FFFFFF"/>
+                          </a:solidFill>
+                          <a:latin typeface="Calibri"/>
+                        </a:rPr>
+                        <a:t>Unsere Antwort</a:t>
+                      </a:r>
+                    </a:p>
+                  </a:txBody>
+                  <a:tcPr marL="45720" marR="45720" marT="18288" marB="18288">
+                    <a:solidFill>
+                      <a:srgbClr val="1F4E79"/>
+                    </a:solidFill>
+                  </a:tcPr>
+                </a:tc>
+              </a:tr>
+              <a:tr h="261257">
+                <a:tc>
+                  <a:txBody>
+                    <a:bodyPr/>
+                    <a:lstStyle/>
+                    <a:p>
+                      <a:r>
+                        <a:rPr sz="750" b="0">
+                          <a:solidFill>
+                            <a:srgbClr val="1A1A1A"/>
+                          </a:solidFill>
+                          <a:latin typeface="Calibri"/>
+                        </a:rPr>
+                        <a:t>Dr. Martina Kessler (CEO)</a:t>
+                      </a:r>
+                    </a:p>
+                  </a:txBody>
+                  <a:tcPr marL="45720" marR="45720" marT="18288" marB="18288">
+                    <a:solidFill>
+                      <a:srgbClr val="FFFFFF"/>
+                    </a:solidFill>
+                  </a:tcPr>
+                </a:tc>
+                <a:tc>
+                  <a:txBody>
+                    <a:bodyPr/>
+                    <a:lstStyle/>
+                    <a:p>
+                      <a:r>
+                        <a:rPr sz="750" b="0">
+                          <a:solidFill>
+                            <a:srgbClr val="1A1A1A"/>
+                          </a:solidFill>
+                          <a:latin typeface="Calibri"/>
+                        </a:rPr>
+                        <a:t>Transparenz, ein System, Standard, planbare Kosten, „&lt; 1 Mio.“</a:t>
+                      </a:r>
+                    </a:p>
+                  </a:txBody>
+                  <a:tcPr marL="45720" marR="45720" marT="18288" marB="18288">
+                    <a:solidFill>
+                      <a:srgbClr val="FFFFFF"/>
+                    </a:solidFill>
+                  </a:tcPr>
+                </a:tc>
+                <a:tc>
+                  <a:txBody>
+                    <a:bodyPr/>
+                    <a:lstStyle/>
+                    <a:p>
+                      <a:r>
+                        <a:rPr sz="750" b="0">
+                          <a:solidFill>
+                            <a:srgbClr val="1A1A1A"/>
+                          </a:solidFill>
+                          <a:latin typeface="Calibri"/>
+                        </a:rPr>
+                        <a:t>Standard + Power BI mobil, Subskription; ehrlicher TCO statt Wunschbudget</a:t>
+                      </a:r>
+                    </a:p>
+                  </a:txBody>
+                  <a:tcPr marL="45720" marR="45720" marT="18288" marB="18288">
+                    <a:solidFill>
+                      <a:srgbClr val="FFFFFF"/>
+                    </a:solidFill>
+                  </a:tcPr>
+                </a:tc>
+              </a:tr>
+              <a:tr h="261257">
+                <a:tc>
+                  <a:txBody>
+                    <a:bodyPr/>
+                    <a:lstStyle/>
+                    <a:p>
+                      <a:r>
+                        <a:rPr sz="750" b="0">
+                          <a:solidFill>
+                            <a:srgbClr val="1A1A1A"/>
+                          </a:solidFill>
+                          <a:latin typeface="Calibri"/>
+                        </a:rPr>
+                        <a:t>Werner Vogt (GF Technik)</a:t>
+                      </a:r>
+                    </a:p>
+                  </a:txBody>
+                  <a:tcPr marL="45720" marR="45720" marT="18288" marB="18288">
+                    <a:solidFill>
+                      <a:srgbClr val="EEF3F8"/>
+                    </a:solidFill>
+                  </a:tcPr>
+                </a:tc>
+                <a:tc>
+                  <a:txBody>
+                    <a:bodyPr/>
+                    <a:lstStyle/>
+                    <a:p>
+                      <a:r>
+                        <a:rPr sz="750" b="0">
+                          <a:solidFill>
+                            <a:srgbClr val="1A1A1A"/>
+                          </a:solidFill>
+                          <a:latin typeface="Calibri"/>
+                        </a:rPr>
+                        <a:t>Konfigurator = Herzstück, Produktion darf nie stehen, keine Miete, kein zweites 2016</a:t>
+                      </a:r>
+                    </a:p>
+                  </a:txBody>
+                  <a:tcPr marL="45720" marR="45720" marT="18288" marB="18288">
+                    <a:solidFill>
+                      <a:srgbClr val="EEF3F8"/>
+                    </a:solidFill>
+                  </a:tcPr>
+                </a:tc>
+                <a:tc>
+                  <a:txBody>
+                    <a:bodyPr/>
+                    <a:lstStyle/>
+                    <a:p>
+                      <a:r>
+                        <a:rPr sz="750" b="0">
+                          <a:solidFill>
+                            <a:srgbClr val="1A1A1A"/>
+                          </a:solidFill>
+                          <a:latin typeface="Calibri"/>
+                        </a:rPr>
+                        <a:t>Konfigurator-PoC mit SEINEM Baukasten vor Vertrag; Offline-Puffer + 2. Leitung; Option 0 fair geprüft</a:t>
+                      </a:r>
+                    </a:p>
+                  </a:txBody>
+                  <a:tcPr marL="45720" marR="45720" marT="18288" marB="18288">
+                    <a:solidFill>
+                      <a:srgbClr val="EEF3F8"/>
+                    </a:solidFill>
+                  </a:tcPr>
+                </a:tc>
+              </a:tr>
+              <a:tr h="261257">
+                <a:tc>
+                  <a:txBody>
+                    <a:bodyPr/>
+                    <a:lstStyle/>
+                    <a:p>
+                      <a:r>
+                        <a:rPr sz="750" b="0">
+                          <a:solidFill>
+                            <a:srgbClr val="1A1A1A"/>
+                          </a:solidFill>
+                          <a:latin typeface="Calibri"/>
+                        </a:rPr>
+                        <a:t>Sabine Haller (CFO)</a:t>
+                      </a:r>
+                    </a:p>
+                  </a:txBody>
+                  <a:tcPr marL="45720" marR="45720" marT="18288" marB="18288">
+                    <a:solidFill>
+                      <a:srgbClr val="FFFFFF"/>
+                    </a:solidFill>
+                  </a:tcPr>
+                </a:tc>
+                <a:tc>
+                  <a:txBody>
+                    <a:bodyPr/>
+                    <a:lstStyle/>
+                    <a:p>
+                      <a:r>
+                        <a:rPr sz="750" b="0">
+                          <a:solidFill>
+                            <a:srgbClr val="1A1A1A"/>
+                          </a:solidFill>
+                          <a:latin typeface="Calibri"/>
+                        </a:rPr>
+                        <a:t>Abschluss 5 AT, Konsolidierung ab Go-live, 5-J.-TCO</a:t>
+                      </a:r>
+                    </a:p>
+                  </a:txBody>
+                  <a:tcPr marL="45720" marR="45720" marT="18288" marB="18288">
+                    <a:solidFill>
+                      <a:srgbClr val="FFFFFF"/>
+                    </a:solidFill>
+                  </a:tcPr>
+                </a:tc>
+                <a:tc>
+                  <a:txBody>
+                    <a:bodyPr/>
+                    <a:lstStyle/>
+                    <a:p>
+                      <a:r>
+                        <a:rPr sz="750" b="0">
+                          <a:solidFill>
+                            <a:srgbClr val="1A1A1A"/>
+                          </a:solidFill>
+                          <a:latin typeface="Calibri"/>
+                        </a:rPr>
+                        <a:t>Mandanten/IC ab Pilsen-Pilot, ihre TCO-Methode übernommen</a:t>
+                      </a:r>
+                    </a:p>
+                  </a:txBody>
+                  <a:tcPr marL="45720" marR="45720" marT="18288" marB="18288">
+                    <a:solidFill>
+                      <a:srgbClr val="FFFFFF"/>
+                    </a:solidFill>
+                  </a:tcPr>
+                </a:tc>
+              </a:tr>
+              <a:tr h="261257">
+                <a:tc>
+                  <a:txBody>
+                    <a:bodyPr/>
+                    <a:lstStyle/>
+                    <a:p>
+                      <a:r>
+                        <a:rPr sz="750" b="0">
+                          <a:solidFill>
+                            <a:srgbClr val="1A1A1A"/>
+                          </a:solidFill>
+                          <a:latin typeface="Calibri"/>
+                        </a:rPr>
+                        <a:t>Markus Brenner (IT)</a:t>
+                      </a:r>
+                    </a:p>
+                  </a:txBody>
+                  <a:tcPr marL="45720" marR="45720" marT="18288" marB="18288">
+                    <a:solidFill>
+                      <a:srgbClr val="EEF3F8"/>
+                    </a:solidFill>
+                  </a:tcPr>
+                </a:tc>
+                <a:tc>
+                  <a:txBody>
+                    <a:bodyPr/>
+                    <a:lstStyle/>
+                    <a:p>
+                      <a:r>
+                        <a:rPr sz="750" b="0">
+                          <a:solidFill>
+                            <a:srgbClr val="1A1A1A"/>
+                          </a:solidFill>
+                          <a:latin typeface="Calibri"/>
+                        </a:rPr>
+                        <a:t>Cloud nur mit Plan B, 1,5 FTE, Pilsen nicht parallel</a:t>
+                      </a:r>
+                    </a:p>
+                  </a:txBody>
+                  <a:tcPr marL="45720" marR="45720" marT="18288" marB="18288">
+                    <a:solidFill>
+                      <a:srgbClr val="EEF3F8"/>
+                    </a:solidFill>
+                  </a:tcPr>
+                </a:tc>
+                <a:tc>
+                  <a:txBody>
+                    <a:bodyPr/>
+                    <a:lstStyle/>
+                    <a:p>
+                      <a:r>
+                        <a:rPr sz="750" b="0">
+                          <a:solidFill>
+                            <a:srgbClr val="1A1A1A"/>
+                          </a:solidFill>
+                          <a:latin typeface="Calibri"/>
+                        </a:rPr>
+                        <a:t>Gleiche Software hostbar, sequenziell, Partner-Betrieb</a:t>
+                      </a:r>
+                    </a:p>
+                  </a:txBody>
+                  <a:tcPr marL="45720" marR="45720" marT="18288" marB="18288">
+                    <a:solidFill>
+                      <a:srgbClr val="EEF3F8"/>
+                    </a:solidFill>
+                  </a:tcPr>
+                </a:tc>
+              </a:tr>
+              <a:tr h="261257">
+                <a:tc>
+                  <a:txBody>
+                    <a:bodyPr/>
+                    <a:lstStyle/>
+                    <a:p>
+                      <a:r>
+                        <a:rPr sz="750" b="0">
+                          <a:solidFill>
+                            <a:srgbClr val="1A1A1A"/>
+                          </a:solidFill>
+                          <a:latin typeface="Calibri"/>
+                        </a:rPr>
+                        <a:t>Elena Nováková (Pilsen)</a:t>
+                      </a:r>
+                    </a:p>
+                  </a:txBody>
+                  <a:tcPr marL="45720" marR="45720" marT="18288" marB="18288">
+                    <a:solidFill>
+                      <a:srgbClr val="FFFFFF"/>
+                    </a:solidFill>
+                  </a:tcPr>
+                </a:tc>
+                <a:tc>
+                  <a:txBody>
+                    <a:bodyPr/>
+                    <a:lstStyle/>
+                    <a:p>
+                      <a:r>
+                        <a:rPr sz="750" b="0">
+                          <a:solidFill>
+                            <a:srgbClr val="1A1A1A"/>
+                          </a:solidFill>
+                          <a:latin typeface="Calibri"/>
+                        </a:rPr>
+                        <a:t>„We cannot wait until 2029“, CZ-Oberfläche</a:t>
+                      </a:r>
+                    </a:p>
+                  </a:txBody>
+                  <a:tcPr marL="45720" marR="45720" marT="18288" marB="18288">
+                    <a:solidFill>
+                      <a:srgbClr val="FFFFFF"/>
+                    </a:solidFill>
+                  </a:tcPr>
+                </a:tc>
+                <a:tc>
+                  <a:txBody>
+                    <a:bodyPr/>
+                    <a:lstStyle/>
+                    <a:p>
+                      <a:r>
+                        <a:rPr sz="750" b="0">
+                          <a:solidFill>
+                            <a:srgbClr val="1A1A1A"/>
+                          </a:solidFill>
+                          <a:latin typeface="Calibri"/>
+                        </a:rPr>
+                        <a:t>Pilsen zuerst (10/2027), CZ-Lokalisierung von Microsoft</a:t>
+                      </a:r>
+                    </a:p>
+                  </a:txBody>
+                  <a:tcPr marL="45720" marR="45720" marT="18288" marB="18288">
+                    <a:solidFill>
+                      <a:srgbClr val="FFFFFF"/>
+                    </a:solidFill>
+                  </a:tcPr>
+                </a:tc>
+              </a:tr>
+              <a:tr h="261258">
+                <a:tc>
+                  <a:txBody>
+                    <a:bodyPr/>
+                    <a:lstStyle/>
+                    <a:p>
+                      <a:r>
+                        <a:rPr sz="750" b="0">
+                          <a:solidFill>
+                            <a:srgbClr val="1A1A1A"/>
+                          </a:solidFill>
+                          <a:latin typeface="Calibri"/>
+                        </a:rPr>
+                        <a:t>Jürgen Kolb (Betriebsrat)</a:t>
+                      </a:r>
+                    </a:p>
+                  </a:txBody>
+                  <a:tcPr marL="45720" marR="45720" marT="18288" marB="18288">
+                    <a:solidFill>
+                      <a:srgbClr val="EEF3F8"/>
+                    </a:solidFill>
+                  </a:tcPr>
+                </a:tc>
+                <a:tc>
+                  <a:txBody>
+                    <a:bodyPr/>
+                    <a:lstStyle/>
+                    <a:p>
+                      <a:r>
+                        <a:rPr sz="750" b="0">
+                          <a:solidFill>
+                            <a:srgbClr val="1A1A1A"/>
+                          </a:solidFill>
+                          <a:latin typeface="Calibri"/>
+                        </a:rPr>
+                        <a:t>BV vor Vertrag, keine Leistungskontrolle</a:t>
+                      </a:r>
+                    </a:p>
+                  </a:txBody>
+                  <a:tcPr marL="45720" marR="45720" marT="18288" marB="18288">
+                    <a:solidFill>
+                      <a:srgbClr val="EEF3F8"/>
+                    </a:solidFill>
+                  </a:tcPr>
+                </a:tc>
+                <a:tc>
+                  <a:txBody>
+                    <a:bodyPr/>
+                    <a:lstStyle/>
+                    <a:p>
+                      <a:r>
+                        <a:rPr sz="750" b="0">
+                          <a:solidFill>
+                            <a:srgbClr val="1A1A1A"/>
+                          </a:solidFill>
+                          <a:latin typeface="Calibri"/>
+                        </a:rPr>
+                        <a:t>Rahmen-BV vor Unterschrift, Rückmeldung je Arbeitsplatz, BR in Demos</a:t>
+                      </a:r>
+                    </a:p>
+                  </a:txBody>
+                  <a:tcPr marL="45720" marR="45720" marT="18288" marB="18288">
+                    <a:solidFill>
+                      <a:srgbClr val="EEF3F8"/>
+                    </a:solidFill>
+                  </a:tcPr>
+                </a:tc>
+              </a:tr>
+            </a:tbl>
+          </a:graphicData>
+        </a:graphic>
+      </p:graphicFrame>
+      <p:sp>
+        <p:nvSpPr>
+          <p:cNvPr id="29" name="Rectangle 28"/>
+          <p:cNvSpPr/>
+          <p:nvPr/>
+        </p:nvSpPr>
+        <p:spPr>
+          <a:xfrm>
+            <a:off x="457200" y="5943600"/>
+            <a:ext cx="6949440" cy="274320"/>
+          </a:xfrm>
+          <a:prstGeom prst="rect">
+            <a:avLst/>
+          </a:prstGeom>
+          <a:noFill/>
+          <a:ln>
+            <a:noFill/>
+          </a:ln>
+          <a:effectLst/>
+        </p:spPr>
+        <p:txBody>
+          <a:bodyPr rtlCol="0" anchor="t" wrap="square" lIns="45720" rIns="45720"/>
+          <a:lstStyle/>
           <a:p>
             <a:pPr algn="l">
               <a:spcAft>
@@ -12063,100 +20642,20 @@
               </a:spcAft>
             </a:pPr>
             <a:r>
-              <a:rPr sz="1050" b="0">
-                <a:solidFill>
-                  <a:srgbClr val="1A1A1A"/>
-                </a:solidFill>
-                <a:latin typeface="Calibri"/>
-              </a:rPr>
-              <a:t>• Bestes Verhältnis von Nutzen zu Kosten (1,44 Nutzwertpunkte je Mio. € vs. 1,08 bei IFS).</a:t>
-            </a:r>
-          </a:p>
-          <a:p>
-            <a:pPr algn="l">
-              <a:spcAft>
-                <a:spcPts val="200"/>
-              </a:spcAft>
-            </a:pPr>
-            <a:r>
-              <a:rPr sz="1050" b="0">
-                <a:solidFill>
-                  <a:srgbClr val="1A1A1A"/>
-                </a:solidFill>
-                <a:latin typeface="Calibri"/>
-              </a:rPr>
-              <a:t>• Einziger Kandidat, mit dem Pilsen vor Ende 2027 realistisch live gehen kann – DataSoft und viele CZ-Partner kennen BC.</a:t>
-            </a:r>
-          </a:p>
-          <a:p>
-            <a:pPr algn="l">
-              <a:spcAft>
-                <a:spcPts val="200"/>
-              </a:spcAft>
-            </a:pPr>
-            <a:r>
-              <a:rPr sz="1050" b="0">
-                <a:solidFill>
-                  <a:srgbClr val="1A1A1A"/>
-                </a:solidFill>
-                <a:latin typeface="Calibri"/>
-              </a:rPr>
-              <a:t>• Gleiche Software als SaaS oder beim deutschen Hoster → beantwortet „Cloud mit Plan B“ (IT, GF Technik, BR).</a:t>
-            </a:r>
-          </a:p>
-          <a:p>
-            <a:pPr algn="l">
-              <a:spcAft>
-                <a:spcPts val="200"/>
-              </a:spcAft>
-            </a:pPr>
-            <a:r>
-              <a:rPr sz="1050" b="1">
+              <a:rPr sz="950" b="1">
                 <a:solidFill>
                   <a:srgbClr val="C00000"/>
                 </a:solidFill>
                 <a:latin typeface="Calibri"/>
               </a:rPr>
-              <a:t>Bedingung (Lehre aus 2016):</a:t>
-            </a:r>
-          </a:p>
-          <a:p>
-            <a:pPr algn="l">
-              <a:spcAft>
-                <a:spcPts val="200"/>
-              </a:spcAft>
-            </a:pPr>
-            <a:r>
-              <a:rPr sz="1050" b="0">
-                <a:solidFill>
-                  <a:srgbClr val="1A1A1A"/>
-                </a:solidFill>
-                <a:latin typeface="Calibri"/>
-              </a:rPr>
-              <a:t>Vertrag erst, wenn die Branchenlösung den KVA-Baukasten im PoC abbildet. Scheitert der PoC → IFS Cloud (+1,2 Mio. €); APplus nur bei bestätigter CZ-Lokalisierung.</a:t>
-            </a:r>
-          </a:p>
-          <a:p>
-            <a:pPr algn="l">
-              <a:spcAft>
-                <a:spcPts val="200"/>
-              </a:spcAft>
-            </a:pPr>
-            <a:r>
-              <a:rPr sz="950" b="0">
-                <a:solidFill>
-                  <a:srgbClr val="595959"/>
-                </a:solidFill>
-                <a:latin typeface="Calibri"/>
-              </a:rPr>
-              <a:t>Größte Risiken: Konfigurator · Key-User-Kapazität · Stammdaten · revidierte Entscheidungen → Gegenmaßnahmen in A5</a:t>
+              <a:t>Bedingung (Lehre aus 2016): Vertrag erst nach bestandenem Konfigurator-PoC – sonst IFS (+1,2 Mio. €). Risiken: Anhang A5.</a:t>
             </a:r>
           </a:p>
         </p:txBody>
       </p:sp>
       <p:sp>
         <p:nvSpPr>
-          <p:cNvPr id="28" name="Rectangle 27"/>
+          <p:cNvPr id="30" name="Rectangle 29"/>
           <p:cNvSpPr/>
           <p:nvPr/>
         </p:nvSpPr>
@@ -12327,7 +20826,7 @@
       </p:sp>
       <p:sp>
         <p:nvSpPr>
-          <p:cNvPr id="29" name="Rectangle 28"/>
+          <p:cNvPr id="31" name="Rectangle 30"/>
           <p:cNvSpPr/>
           <p:nvPr/>
         </p:nvSpPr>
@@ -21636,4 +30135,324 @@
   </a:objectDefaults>
   <a:extraClrSchemeLst/>
 </a:theme>
+</file>
+
+<file path=ppt/theme/theme2.xml><?xml version="1.0" encoding="utf-8"?>
+<a:theme xmlns:a="http://schemas.openxmlformats.org/drawingml/2006/main" name="Office Theme">
+  <a:themeElements>
+    <a:clrScheme name="Office">
+      <a:dk1>
+        <a:sysClr val="windowText" lastClr="000000"/>
+      </a:dk1>
+      <a:lt1>
+        <a:sysClr val="window" lastClr="FFFFFF"/>
+      </a:lt1>
+      <a:dk2>
+        <a:srgbClr val="1F497D"/>
+      </a:dk2>
+      <a:lt2>
+        <a:srgbClr val="EEECE1"/>
+      </a:lt2>
+      <a:accent1>
+        <a:srgbClr val="4F81BD"/>
+      </a:accent1>
+      <a:accent2>
+        <a:srgbClr val="C0504D"/>
+      </a:accent2>
+      <a:accent3>
+        <a:srgbClr val="9BBB59"/>
+      </a:accent3>
+      <a:accent4>
+        <a:srgbClr val="8064A2"/>
+      </a:accent4>
+      <a:accent5>
+        <a:srgbClr val="4BACC6"/>
+      </a:accent5>
+      <a:accent6>
+        <a:srgbClr val="F79646"/>
+      </a:accent6>
+      <a:hlink>
+        <a:srgbClr val="0000FF"/>
+      </a:hlink>
+      <a:folHlink>
+        <a:srgbClr val="800080"/>
+      </a:folHlink>
+    </a:clrScheme>
+    <a:fontScheme name="Office">
+      <a:majorFont>
+        <a:latin typeface="Calibri"/>
+        <a:ea typeface=""/>
+        <a:cs typeface=""/>
+        <a:font script="Jpan" typeface="ＭＳ Ｐゴシック"/>
+        <a:font script="Hang" typeface="맑은 고딕"/>
+        <a:font script="Hans" typeface="宋体"/>
+        <a:font script="Hant" typeface="新細明體"/>
+        <a:font script="Arab" typeface="Times New Roman"/>
+        <a:font script="Hebr" typeface="Times New Roman"/>
+        <a:font script="Thai" typeface="Angsana New"/>
+        <a:font script="Ethi" typeface="Nyala"/>
+        <a:font script="Beng" typeface="Vrinda"/>
+        <a:font script="Gujr" typeface="Shruti"/>
+        <a:font script="Khmr" typeface="MoolBoran"/>
+        <a:font script="Knda" typeface="Tunga"/>
+        <a:font script="Guru" typeface="Raavi"/>
+        <a:font script="Cans" typeface="Euphemia"/>
+        <a:font script="Cher" typeface="Plantagenet Cherokee"/>
+        <a:font script="Yiii" typeface="Microsoft Yi Baiti"/>
+        <a:font script="Tibt" typeface="Microsoft Himalaya"/>
+        <a:font script="Thaa" typeface="MV Boli"/>
+        <a:font script="Deva" typeface="Mangal"/>
+        <a:font script="Telu" typeface="Gautami"/>
+        <a:font script="Taml" typeface="Latha"/>
+        <a:font script="Syrc" typeface="Estrangelo Edessa"/>
+        <a:font script="Orya" typeface="Kalinga"/>
+        <a:font script="Mlym" typeface="Kartika"/>
+        <a:font script="Laoo" typeface="DokChampa"/>
+        <a:font script="Sinh" typeface="Iskoola Pota"/>
+        <a:font script="Mong" typeface="Mongolian Baiti"/>
+        <a:font script="Viet" typeface="Times New Roman"/>
+        <a:font script="Uigh" typeface="Microsoft Uighur"/>
+        <a:font script="Geor" typeface="Sylfaen"/>
+      </a:majorFont>
+      <a:minorFont>
+        <a:latin typeface="Calibri"/>
+        <a:ea typeface=""/>
+        <a:cs typeface=""/>
+        <a:font script="Jpan" typeface="ＭＳ Ｐゴシック"/>
+        <a:font script="Hang" typeface="맑은 고딕"/>
+        <a:font script="Hans" typeface="宋体"/>
+        <a:font script="Hant" typeface="新細明體"/>
+        <a:font script="Arab" typeface="Arial"/>
+        <a:font script="Hebr" typeface="Arial"/>
+        <a:font script="Thai" typeface="Cordia New"/>
+        <a:font script="Ethi" typeface="Nyala"/>
+        <a:font script="Beng" typeface="Vrinda"/>
+        <a:font script="Gujr" typeface="Shruti"/>
+        <a:font script="Khmr" typeface="DaunPenh"/>
+        <a:font script="Knda" typeface="Tunga"/>
+        <a:font script="Guru" typeface="Raavi"/>
+        <a:font script="Cans" typeface="Euphemia"/>
+        <a:font script="Cher" typeface="Plantagenet Cherokee"/>
+        <a:font script="Yiii" typeface="Microsoft Yi Baiti"/>
+        <a:font script="Tibt" typeface="Microsoft Himalaya"/>
+        <a:font script="Thaa" typeface="MV Boli"/>
+        <a:font script="Deva" typeface="Mangal"/>
+        <a:font script="Telu" typeface="Gautami"/>
+        <a:font script="Taml" typeface="Latha"/>
+        <a:font script="Syrc" typeface="Estrangelo Edessa"/>
+        <a:font script="Orya" typeface="Kalinga"/>
+        <a:font script="Mlym" typeface="Kartika"/>
+        <a:font script="Laoo" typeface="DokChampa"/>
+        <a:font script="Sinh" typeface="Iskoola Pota"/>
+        <a:font script="Mong" typeface="Mongolian Baiti"/>
+        <a:font script="Viet" typeface="Arial"/>
+        <a:font script="Uigh" typeface="Microsoft Uighur"/>
+        <a:font script="Geor" typeface="Sylfaen"/>
+      </a:minorFont>
+    </a:fontScheme>
+    <a:fmtScheme name="Office">
+      <a:fillStyleLst>
+        <a:solidFill>
+          <a:schemeClr val="phClr"/>
+        </a:solidFill>
+        <a:gradFill rotWithShape="1">
+          <a:gsLst>
+            <a:gs pos="0">
+              <a:schemeClr val="phClr">
+                <a:tint val="50000"/>
+                <a:satMod val="300000"/>
+              </a:schemeClr>
+            </a:gs>
+            <a:gs pos="35000">
+              <a:schemeClr val="phClr">
+                <a:tint val="37000"/>
+                <a:satMod val="300000"/>
+              </a:schemeClr>
+            </a:gs>
+            <a:gs pos="100000">
+              <a:schemeClr val="phClr">
+                <a:tint val="15000"/>
+                <a:satMod val="350000"/>
+              </a:schemeClr>
+            </a:gs>
+          </a:gsLst>
+          <a:lin ang="16200000" scaled="1"/>
+        </a:gradFill>
+        <a:gradFill rotWithShape="1">
+          <a:gsLst>
+            <a:gs pos="0">
+              <a:schemeClr val="phClr">
+                <a:tint val="100000"/>
+                <a:shade val="100000"/>
+                <a:satMod val="130000"/>
+              </a:schemeClr>
+            </a:gs>
+            <a:gs pos="100000">
+              <a:schemeClr val="phClr">
+                <a:tint val="50000"/>
+                <a:shade val="100000"/>
+                <a:satMod val="350000"/>
+              </a:schemeClr>
+            </a:gs>
+          </a:gsLst>
+          <a:lin ang="16200000" scaled="0"/>
+        </a:gradFill>
+      </a:fillStyleLst>
+      <a:lnStyleLst>
+        <a:ln w="9525" cap="flat" cmpd="sng" algn="ctr">
+          <a:solidFill>
+            <a:schemeClr val="phClr">
+              <a:shade val="95000"/>
+              <a:satMod val="105000"/>
+            </a:schemeClr>
+          </a:solidFill>
+          <a:prstDash val="solid"/>
+        </a:ln>
+        <a:ln w="25400" cap="flat" cmpd="sng" algn="ctr">
+          <a:solidFill>
+            <a:schemeClr val="phClr"/>
+          </a:solidFill>
+          <a:prstDash val="solid"/>
+        </a:ln>
+        <a:ln w="38100" cap="flat" cmpd="sng" algn="ctr">
+          <a:solidFill>
+            <a:schemeClr val="phClr"/>
+          </a:solidFill>
+          <a:prstDash val="solid"/>
+        </a:ln>
+      </a:lnStyleLst>
+      <a:effectStyleLst>
+        <a:effectStyle>
+          <a:effectLst>
+            <a:outerShdw blurRad="40000" dist="20000" dir="5400000" rotWithShape="0">
+              <a:srgbClr val="000000">
+                <a:alpha val="38000"/>
+              </a:srgbClr>
+            </a:outerShdw>
+          </a:effectLst>
+        </a:effectStyle>
+        <a:effectStyle>
+          <a:effectLst>
+            <a:outerShdw blurRad="40000" dist="23000" dir="5400000" rotWithShape="0">
+              <a:srgbClr val="000000">
+                <a:alpha val="35000"/>
+              </a:srgbClr>
+            </a:outerShdw>
+          </a:effectLst>
+        </a:effectStyle>
+        <a:effectStyle>
+          <a:effectLst>
+            <a:outerShdw blurRad="40000" dist="23000" dir="5400000" rotWithShape="0">
+              <a:srgbClr val="000000">
+                <a:alpha val="35000"/>
+              </a:srgbClr>
+            </a:outerShdw>
+          </a:effectLst>
+          <a:scene3d>
+            <a:camera prst="orthographicFront">
+              <a:rot lat="0" lon="0" rev="0"/>
+            </a:camera>
+            <a:lightRig rig="threePt" dir="t">
+              <a:rot lat="0" lon="0" rev="1200000"/>
+            </a:lightRig>
+          </a:scene3d>
+          <a:sp3d>
+            <a:bevelT w="63500" h="25400"/>
+          </a:sp3d>
+        </a:effectStyle>
+      </a:effectStyleLst>
+      <a:bgFillStyleLst>
+        <a:solidFill>
+          <a:schemeClr val="phClr"/>
+        </a:solidFill>
+        <a:gradFill rotWithShape="1">
+          <a:gsLst>
+            <a:gs pos="0">
+              <a:schemeClr val="phClr">
+                <a:tint val="40000"/>
+                <a:satMod val="350000"/>
+              </a:schemeClr>
+            </a:gs>
+            <a:gs pos="40000">
+              <a:schemeClr val="phClr">
+                <a:tint val="45000"/>
+                <a:shade val="99000"/>
+                <a:satMod val="350000"/>
+              </a:schemeClr>
+            </a:gs>
+            <a:gs pos="100000">
+              <a:schemeClr val="phClr">
+                <a:shade val="20000"/>
+                <a:satMod val="255000"/>
+              </a:schemeClr>
+            </a:gs>
+          </a:gsLst>
+          <a:path path="circle">
+            <a:fillToRect l="50000" t="-80000" r="50000" b="180000"/>
+          </a:path>
+        </a:gradFill>
+        <a:gradFill rotWithShape="1">
+          <a:gsLst>
+            <a:gs pos="0">
+              <a:schemeClr val="phClr">
+                <a:tint val="80000"/>
+                <a:satMod val="300000"/>
+              </a:schemeClr>
+            </a:gs>
+            <a:gs pos="100000">
+              <a:schemeClr val="phClr">
+                <a:shade val="30000"/>
+                <a:satMod val="200000"/>
+              </a:schemeClr>
+            </a:gs>
+          </a:gsLst>
+          <a:path path="circle">
+            <a:fillToRect l="50000" t="50000" r="50000" b="50000"/>
+          </a:path>
+        </a:gradFill>
+      </a:bgFillStyleLst>
+    </a:fmtScheme>
+  </a:themeElements>
+  <a:objectDefaults>
+    <a:spDef>
+      <a:spPr/>
+      <a:bodyPr/>
+      <a:lstStyle/>
+      <a:style>
+        <a:lnRef idx="1">
+          <a:schemeClr val="accent1"/>
+        </a:lnRef>
+        <a:fillRef idx="3">
+          <a:schemeClr val="accent1"/>
+        </a:fillRef>
+        <a:effectRef idx="2">
+          <a:schemeClr val="accent1"/>
+        </a:effectRef>
+        <a:fontRef idx="minor">
+          <a:schemeClr val="lt1"/>
+        </a:fontRef>
+      </a:style>
+    </a:spDef>
+    <a:lnDef>
+      <a:spPr/>
+      <a:bodyPr/>
+      <a:lstStyle/>
+      <a:style>
+        <a:lnRef idx="2">
+          <a:schemeClr val="accent1"/>
+        </a:lnRef>
+        <a:fillRef idx="0">
+          <a:schemeClr val="accent1"/>
+        </a:fillRef>
+        <a:effectRef idx="1">
+          <a:schemeClr val="accent1"/>
+        </a:effectRef>
+        <a:fontRef idx="minor">
+          <a:schemeClr val="tx1"/>
+        </a:fontRef>
+      </a:style>
+    </a:lnDef>
+  </a:objectDefaults>
+  <a:extraClrSchemeLst/>
+</a:theme>
 </file>